--- a/examples/ppt/pt-br/sample-pt-br.pptx
+++ b/examples/ppt/pt-br/sample-pt-br.pptx
@@ -39,6 +39,12 @@
     <p:sldId id="278" r:id="rId39"/>
     <p:sldId id="279" r:id="rId40"/>
     <p:sldId id="280" r:id="rId41"/>
+    <p:sldId id="281" r:id="rId42"/>
+    <p:sldId id="282" r:id="rId43"/>
+    <p:sldId id="283" r:id="rId44"/>
+    <p:sldId id="284" r:id="rId45"/>
+    <p:sldId id="285" r:id="rId46"/>
+    <p:sldId id="286" r:id="rId47"/>
   </p:sldIdLst>
   <p:sldSz cx="12196763" cy="6858000"/>
   <p:notesSz cx="6858000" cy="9144000"/>
@@ -2537,48 +2543,6 @@
           <a:chExt cx="0" cy="0"/>
         </a:xfrm>
       </p:grpSpPr>
-      <p:sp>
-        <p:nvSpPr>
-          <p:cNvPr id="3" name="TextBox 2">
-            <a:extLst>
-              <a:ext uri="{FF2B5EF4-FFF2-40B4-BE49-F238E27FC236}">
-                <a16:creationId xmlns:a16="http://schemas.microsoft.com/office/drawing/2014/main" id="{C1960DD1-8AC3-8F46-9D2D-BF81187F43FC}"/>
-              </a:ext>
-            </a:extLst>
-          </p:cNvPr>
-          <p:cNvSpPr txBox="1"/>
-          <p:nvPr userDrawn="1"/>
-        </p:nvSpPr>
-        <p:spPr>
-          <a:xfrm>
-            <a:off x="607486" y="1402064"/>
-            <a:ext cx="3921034" cy="854717"/>
-          </a:xfrm>
-          <a:prstGeom prst="rect">
-            <a:avLst/>
-          </a:prstGeom>
-          <a:noFill/>
-        </p:spPr>
-        <p:txBody>
-          <a:bodyPr wrap="square" rtlCol="0">
-            <a:spAutoFit/>
-          </a:bodyPr>
-          <a:lstStyle/>
-          <a:p>
-            <a:pPr algn="l"/>
-            <a:r>
-              <a:rPr lang="en-US" sz="4800" dirty="0">
-                <a:solidFill>
-                  <a:schemeClr val="tx1"/>
-                </a:solidFill>
-                <a:latin typeface="Huawei Sans" panose="020C0503030203020204" pitchFamily="34" charset="0"/>
-                <a:cs typeface="Huawei Sans" panose="020C0503030203020204" pitchFamily="34" charset="0"/>
-              </a:rPr>
-              <a:t>Thank you.</a:t>
-            </a:r>
-          </a:p>
-        </p:txBody>
-      </p:sp>
     </p:spTree>
     <p:extLst>
       <p:ext uri="{BB962C8B-B14F-4D97-AF65-F5344CB8AC3E}">
@@ -8499,49 +8463,658 @@
         </p:nvSpPr>
         <p:spPr>
           <a:xfrm>
-            <a:off x="0" y="320040"/>
+            <a:off x="731520" y="502920"/>
           </a:xfrm>
         </p:spPr>
         <p:txBody>
           <a:bodyPr/>
           <a:lstStyle/>
-          <a:p/>
-        </p:txBody>
-      </p:sp>
-      <p:sp>
-        <p:nvSpPr>
-          <p:cNvPr id="3" name="TextBox 2"/>
-          <p:cNvSpPr txBox="1"/>
-          <p:nvPr/>
-        </p:nvSpPr>
-        <p:spPr>
-          <a:xfrm>
-            <a:off x="731520" y="2011680"/>
-            <a:ext cx="10698480" cy="1371600"/>
-          </a:xfrm>
-          <a:prstGeom prst="rect">
-            <a:avLst/>
-          </a:prstGeom>
-          <a:noFill/>
-        </p:spPr>
-        <p:txBody>
-          <a:bodyPr wrap="square">
-            <a:noAutofit/>
-          </a:bodyPr>
-          <a:lstStyle/>
           <a:p>
-            <a:pPr algn="ctr"/>
             <a:r>
-              <a:rPr sz="4000" b="1">
+              <a:rPr sz="2400" b="1">
                 <a:solidFill>
                   <a:srgbClr val="C7000B"/>
                 </a:solidFill>
               </a:rPr>
-              <a:t>Processo de Abertura de SR</a:t>
+              <a:t>Rede — Serviços em Detalhe</a:t>
             </a:r>
           </a:p>
         </p:txBody>
       </p:sp>
+      <p:graphicFrame>
+        <p:nvGraphicFramePr>
+          <p:cNvPr id="3" name="Table 2"/>
+          <p:cNvGraphicFramePr>
+            <a:graphicFrameLocks noGrp="1"/>
+          </p:cNvGraphicFramePr>
+          <p:nvPr/>
+        </p:nvGraphicFramePr>
+        <p:xfrm>
+          <a:off x="731520" y="1737360"/>
+          <a:ext cx="10698480" cy="2496312"/>
+        </p:xfrm>
+        <a:graphic>
+          <a:graphicData uri="http://schemas.openxmlformats.org/drawingml/2006/table">
+            <a:tbl>
+              <a:tblPr firstRow="1" bandRow="1">
+                <a:tableStyleId>{5C22544A-7EE6-4342-B048-85BDC9FD1C3A}</a:tableStyleId>
+              </a:tblPr>
+              <a:tblGrid>
+                <a:gridCol w="731520"/>
+                <a:gridCol w="3200400"/>
+                <a:gridCol w="2926080"/>
+                <a:gridCol w="3840480"/>
+              </a:tblGrid>
+              <a:tr h="411480">
+                <a:tc>
+                  <a:txBody>
+                    <a:bodyPr/>
+                    <a:lstStyle/>
+                    <a:p>
+                      <a:pPr algn="ctr"/>
+                      <a:r>
+                        <a:rPr sz="1300" b="1">
+                          <a:solidFill>
+                            <a:srgbClr val="FFFFFF"/>
+                          </a:solidFill>
+                        </a:rPr>
+                        <a:t>Svc</a:t>
+                      </a:r>
+                    </a:p>
+                  </a:txBody>
+                  <a:tcPr marL="109728" marR="109728" marT="36576" marB="36576" anchor="ctr">
+                    <a:solidFill>
+                      <a:srgbClr val="C7000B"/>
+                    </a:solidFill>
+                  </a:tcPr>
+                </a:tc>
+                <a:tc>
+                  <a:txBody>
+                    <a:bodyPr/>
+                    <a:lstStyle/>
+                    <a:p>
+                      <a:pPr algn="ctr"/>
+                      <a:r>
+                        <a:rPr sz="1300" b="1">
+                          <a:solidFill>
+                            <a:srgbClr val="FFFFFF"/>
+                          </a:solidFill>
+                        </a:rPr>
+                        <a:t>O Que É</a:t>
+                      </a:r>
+                    </a:p>
+                  </a:txBody>
+                  <a:tcPr marL="109728" marR="109728" marT="36576" marB="36576" anchor="ctr">
+                    <a:solidFill>
+                      <a:srgbClr val="C7000B"/>
+                    </a:solidFill>
+                  </a:tcPr>
+                </a:tc>
+                <a:tc>
+                  <a:txBody>
+                    <a:bodyPr/>
+                    <a:lstStyle/>
+                    <a:p>
+                      <a:pPr algn="ctr"/>
+                      <a:r>
+                        <a:rPr sz="1300" b="1">
+                          <a:solidFill>
+                            <a:srgbClr val="FFFFFF"/>
+                          </a:solidFill>
+                        </a:rPr>
+                        <a:t>Quando Usar</a:t>
+                      </a:r>
+                    </a:p>
+                  </a:txBody>
+                  <a:tcPr marL="109728" marR="109728" marT="36576" marB="36576" anchor="ctr">
+                    <a:solidFill>
+                      <a:srgbClr val="C7000B"/>
+                    </a:solidFill>
+                  </a:tcPr>
+                </a:tc>
+                <a:tc>
+                  <a:txBody>
+                    <a:bodyPr/>
+                    <a:lstStyle/>
+                    <a:p>
+                      <a:pPr algn="ctr"/>
+                      <a:r>
+                        <a:rPr sz="1300" b="1">
+                          <a:solidFill>
+                            <a:srgbClr val="FFFFFF"/>
+                          </a:solidFill>
+                        </a:rPr>
+                        <a:t>O Que Verificar Primeiro</a:t>
+                      </a:r>
+                    </a:p>
+                  </a:txBody>
+                  <a:tcPr marL="109728" marR="109728" marT="36576" marB="36576" anchor="ctr">
+                    <a:solidFill>
+                      <a:srgbClr val="C7000B"/>
+                    </a:solidFill>
+                  </a:tcPr>
+                </a:tc>
+              </a:tr>
+              <a:tr h="347472">
+                <a:tc>
+                  <a:txBody>
+                    <a:bodyPr/>
+                    <a:lstStyle/>
+                    <a:p>
+                      <a:r>
+                        <a:rPr sz="1100" b="1">
+                          <a:solidFill>
+                            <a:srgbClr val="1F2328"/>
+                          </a:solidFill>
+                        </a:rPr>
+                        <a:t>VPC</a:t>
+                      </a:r>
+                    </a:p>
+                  </a:txBody>
+                  <a:tcPr marL="109728" marR="109728" marT="27432" marB="27432" anchor="ctr">
+                    <a:solidFill>
+                      <a:srgbClr val="F6F8FA"/>
+                    </a:solidFill>
+                  </a:tcPr>
+                </a:tc>
+                <a:tc>
+                  <a:txBody>
+                    <a:bodyPr/>
+                    <a:lstStyle/>
+                    <a:p>
+                      <a:r>
+                        <a:rPr sz="1100">
+                          <a:solidFill>
+                            <a:srgbClr val="1F2328"/>
+                          </a:solidFill>
+                        </a:rPr>
+                        <a:t>Rede privada isolada na nuvem</a:t>
+                      </a:r>
+                    </a:p>
+                  </a:txBody>
+                  <a:tcPr marL="109728" marR="109728" marT="27432" marB="27432" anchor="ctr">
+                    <a:solidFill>
+                      <a:srgbClr val="F6F8FA"/>
+                    </a:solidFill>
+                  </a:tcPr>
+                </a:tc>
+                <a:tc>
+                  <a:txBody>
+                    <a:bodyPr/>
+                    <a:lstStyle/>
+                    <a:p>
+                      <a:r>
+                        <a:rPr sz="1100">
+                          <a:solidFill>
+                            <a:srgbClr val="1F2328"/>
+                          </a:solidFill>
+                        </a:rPr>
+                        <a:t>Todos os recursos cloud</a:t>
+                      </a:r>
+                    </a:p>
+                  </a:txBody>
+                  <a:tcPr marL="109728" marR="109728" marT="27432" marB="27432" anchor="ctr">
+                    <a:solidFill>
+                      <a:srgbClr val="F6F8FA"/>
+                    </a:solidFill>
+                  </a:tcPr>
+                </a:tc>
+                <a:tc>
+                  <a:txBody>
+                    <a:bodyPr/>
+                    <a:lstStyle/>
+                    <a:p>
+                      <a:r>
+                        <a:rPr sz="1100">
+                          <a:solidFill>
+                            <a:srgbClr val="1F2328"/>
+                          </a:solidFill>
+                        </a:rPr>
+                        <a:t>Subnets, route tables, SG</a:t>
+                      </a:r>
+                    </a:p>
+                  </a:txBody>
+                  <a:tcPr marL="109728" marR="109728" marT="27432" marB="27432" anchor="ctr">
+                    <a:solidFill>
+                      <a:srgbClr val="F6F8FA"/>
+                    </a:solidFill>
+                  </a:tcPr>
+                </a:tc>
+              </a:tr>
+              <a:tr h="347472">
+                <a:tc>
+                  <a:txBody>
+                    <a:bodyPr/>
+                    <a:lstStyle/>
+                    <a:p>
+                      <a:r>
+                        <a:rPr sz="1100" b="1">
+                          <a:solidFill>
+                            <a:srgbClr val="1F2328"/>
+                          </a:solidFill>
+                        </a:rPr>
+                        <a:t>EIP</a:t>
+                      </a:r>
+                    </a:p>
+                  </a:txBody>
+                  <a:tcPr marL="109728" marR="109728" marT="27432" marB="27432" anchor="ctr">
+                    <a:solidFill>
+                      <a:srgbClr val="FFFFFF"/>
+                    </a:solidFill>
+                  </a:tcPr>
+                </a:tc>
+                <a:tc>
+                  <a:txBody>
+                    <a:bodyPr/>
+                    <a:lstStyle/>
+                    <a:p>
+                      <a:r>
+                        <a:rPr sz="1100">
+                          <a:solidFill>
+                            <a:srgbClr val="1F2328"/>
+                          </a:solidFill>
+                        </a:rPr>
+                        <a:t>IP público para acesso externo</a:t>
+                      </a:r>
+                    </a:p>
+                  </a:txBody>
+                  <a:tcPr marL="109728" marR="109728" marT="27432" marB="27432" anchor="ctr">
+                    <a:solidFill>
+                      <a:srgbClr val="FFFFFF"/>
+                    </a:solidFill>
+                  </a:tcPr>
+                </a:tc>
+                <a:tc>
+                  <a:txBody>
+                    <a:bodyPr/>
+                    <a:lstStyle/>
+                    <a:p>
+                      <a:r>
+                        <a:rPr sz="1100">
+                          <a:solidFill>
+                            <a:srgbClr val="1F2328"/>
+                          </a:solidFill>
+                        </a:rPr>
+                        <a:t>Serviços voltados à internet</a:t>
+                      </a:r>
+                    </a:p>
+                  </a:txBody>
+                  <a:tcPr marL="109728" marR="109728" marT="27432" marB="27432" anchor="ctr">
+                    <a:solidFill>
+                      <a:srgbClr val="FFFFFF"/>
+                    </a:solidFill>
+                  </a:tcPr>
+                </a:tc>
+                <a:tc>
+                  <a:txBody>
+                    <a:bodyPr/>
+                    <a:lstStyle/>
+                    <a:p>
+                      <a:r>
+                        <a:rPr sz="1100">
+                          <a:solidFill>
+                            <a:srgbClr val="1F2328"/>
+                          </a:solidFill>
+                        </a:rPr>
+                        <a:t>EIP associada? Reachability</a:t>
+                      </a:r>
+                    </a:p>
+                  </a:txBody>
+                  <a:tcPr marL="109728" marR="109728" marT="27432" marB="27432" anchor="ctr">
+                    <a:solidFill>
+                      <a:srgbClr val="FFFFFF"/>
+                    </a:solidFill>
+                  </a:tcPr>
+                </a:tc>
+              </a:tr>
+              <a:tr h="347472">
+                <a:tc>
+                  <a:txBody>
+                    <a:bodyPr/>
+                    <a:lstStyle/>
+                    <a:p>
+                      <a:r>
+                        <a:rPr sz="1100" b="1">
+                          <a:solidFill>
+                            <a:srgbClr val="1F2328"/>
+                          </a:solidFill>
+                        </a:rPr>
+                        <a:t>ELB</a:t>
+                      </a:r>
+                    </a:p>
+                  </a:txBody>
+                  <a:tcPr marL="109728" marR="109728" marT="27432" marB="27432" anchor="ctr">
+                    <a:solidFill>
+                      <a:srgbClr val="F6F8FA"/>
+                    </a:solidFill>
+                  </a:tcPr>
+                </a:tc>
+                <a:tc>
+                  <a:txBody>
+                    <a:bodyPr/>
+                    <a:lstStyle/>
+                    <a:p>
+                      <a:r>
+                        <a:rPr sz="1100">
+                          <a:solidFill>
+                            <a:srgbClr val="1F2328"/>
+                          </a:solidFill>
+                        </a:rPr>
+                        <a:t>Distribui tráfego entre servidores</a:t>
+                      </a:r>
+                    </a:p>
+                  </a:txBody>
+                  <a:tcPr marL="109728" marR="109728" marT="27432" marB="27432" anchor="ctr">
+                    <a:solidFill>
+                      <a:srgbClr val="F6F8FA"/>
+                    </a:solidFill>
+                  </a:tcPr>
+                </a:tc>
+                <a:tc>
+                  <a:txBody>
+                    <a:bodyPr/>
+                    <a:lstStyle/>
+                    <a:p>
+                      <a:r>
+                        <a:rPr sz="1100">
+                          <a:solidFill>
+                            <a:srgbClr val="1F2328"/>
+                          </a:solidFill>
+                        </a:rPr>
+                        <a:t>Alta disponibilidade, scaling</a:t>
+                      </a:r>
+                    </a:p>
+                  </a:txBody>
+                  <a:tcPr marL="109728" marR="109728" marT="27432" marB="27432" anchor="ctr">
+                    <a:solidFill>
+                      <a:srgbClr val="F6F8FA"/>
+                    </a:solidFill>
+                  </a:tcPr>
+                </a:tc>
+                <a:tc>
+                  <a:txBody>
+                    <a:bodyPr/>
+                    <a:lstStyle/>
+                    <a:p>
+                      <a:r>
+                        <a:rPr sz="1100">
+                          <a:solidFill>
+                            <a:srgbClr val="1F2328"/>
+                          </a:solidFill>
+                        </a:rPr>
+                        <a:t>Health checks, backends saudáveis?</a:t>
+                      </a:r>
+                    </a:p>
+                  </a:txBody>
+                  <a:tcPr marL="109728" marR="109728" marT="27432" marB="27432" anchor="ctr">
+                    <a:solidFill>
+                      <a:srgbClr val="F6F8FA"/>
+                    </a:solidFill>
+                  </a:tcPr>
+                </a:tc>
+              </a:tr>
+              <a:tr h="347472">
+                <a:tc>
+                  <a:txBody>
+                    <a:bodyPr/>
+                    <a:lstStyle/>
+                    <a:p>
+                      <a:r>
+                        <a:rPr sz="1100" b="1">
+                          <a:solidFill>
+                            <a:srgbClr val="1F2328"/>
+                          </a:solidFill>
+                        </a:rPr>
+                        <a:t>NAT</a:t>
+                      </a:r>
+                    </a:p>
+                  </a:txBody>
+                  <a:tcPr marL="109728" marR="109728" marT="27432" marB="27432" anchor="ctr">
+                    <a:solidFill>
+                      <a:srgbClr val="FFFFFF"/>
+                    </a:solidFill>
+                  </a:tcPr>
+                </a:tc>
+                <a:tc>
+                  <a:txBody>
+                    <a:bodyPr/>
+                    <a:lstStyle/>
+                    <a:p>
+                      <a:r>
+                        <a:rPr sz="1100">
+                          <a:solidFill>
+                            <a:srgbClr val="1F2328"/>
+                          </a:solidFill>
+                        </a:rPr>
+                        <a:t>VMs privadas acessam internet</a:t>
+                      </a:r>
+                    </a:p>
+                  </a:txBody>
+                  <a:tcPr marL="109728" marR="109728" marT="27432" marB="27432" anchor="ctr">
+                    <a:solidFill>
+                      <a:srgbClr val="FFFFFF"/>
+                    </a:solidFill>
+                  </a:tcPr>
+                </a:tc>
+                <a:tc>
+                  <a:txBody>
+                    <a:bodyPr/>
+                    <a:lstStyle/>
+                    <a:p>
+                      <a:r>
+                        <a:rPr sz="1100">
+                          <a:solidFill>
+                            <a:srgbClr val="1F2328"/>
+                          </a:solidFill>
+                        </a:rPr>
+                        <a:t>VMs sem EIP que precisam de internet</a:t>
+                      </a:r>
+                    </a:p>
+                  </a:txBody>
+                  <a:tcPr marL="109728" marR="109728" marT="27432" marB="27432" anchor="ctr">
+                    <a:solidFill>
+                      <a:srgbClr val="FFFFFF"/>
+                    </a:solidFill>
+                  </a:tcPr>
+                </a:tc>
+                <a:tc>
+                  <a:txBody>
+                    <a:bodyPr/>
+                    <a:lstStyle/>
+                    <a:p>
+                      <a:r>
+                        <a:rPr sz="1100">
+                          <a:solidFill>
+                            <a:srgbClr val="1F2328"/>
+                          </a:solidFill>
+                        </a:rPr>
+                        <a:t>Regras NAT, gateway ativo?</a:t>
+                      </a:r>
+                    </a:p>
+                  </a:txBody>
+                  <a:tcPr marL="109728" marR="109728" marT="27432" marB="27432" anchor="ctr">
+                    <a:solidFill>
+                      <a:srgbClr val="FFFFFF"/>
+                    </a:solidFill>
+                  </a:tcPr>
+                </a:tc>
+              </a:tr>
+              <a:tr h="347472">
+                <a:tc>
+                  <a:txBody>
+                    <a:bodyPr/>
+                    <a:lstStyle/>
+                    <a:p>
+                      <a:r>
+                        <a:rPr sz="1100" b="1">
+                          <a:solidFill>
+                            <a:srgbClr val="1F2328"/>
+                          </a:solidFill>
+                        </a:rPr>
+                        <a:t>VPN</a:t>
+                      </a:r>
+                    </a:p>
+                  </a:txBody>
+                  <a:tcPr marL="109728" marR="109728" marT="27432" marB="27432" anchor="ctr">
+                    <a:solidFill>
+                      <a:srgbClr val="F6F8FA"/>
+                    </a:solidFill>
+                  </a:tcPr>
+                </a:tc>
+                <a:tc>
+                  <a:txBody>
+                    <a:bodyPr/>
+                    <a:lstStyle/>
+                    <a:p>
+                      <a:r>
+                        <a:rPr sz="1100">
+                          <a:solidFill>
+                            <a:srgbClr val="1F2328"/>
+                          </a:solidFill>
+                        </a:rPr>
+                        <a:t>Túnel seguro on-premise ↔ nuvem</a:t>
+                      </a:r>
+                    </a:p>
+                  </a:txBody>
+                  <a:tcPr marL="109728" marR="109728" marT="27432" marB="27432" anchor="ctr">
+                    <a:solidFill>
+                      <a:srgbClr val="F6F8FA"/>
+                    </a:solidFill>
+                  </a:tcPr>
+                </a:tc>
+                <a:tc>
+                  <a:txBody>
+                    <a:bodyPr/>
+                    <a:lstStyle/>
+                    <a:p>
+                      <a:r>
+                        <a:rPr sz="1100">
+                          <a:solidFill>
+                            <a:srgbClr val="1F2328"/>
+                          </a:solidFill>
+                        </a:rPr>
+                        <a:t>Conexão híbrida, acesso remoto</a:t>
+                      </a:r>
+                    </a:p>
+                  </a:txBody>
+                  <a:tcPr marL="109728" marR="109728" marT="27432" marB="27432" anchor="ctr">
+                    <a:solidFill>
+                      <a:srgbClr val="F6F8FA"/>
+                    </a:solidFill>
+                  </a:tcPr>
+                </a:tc>
+                <a:tc>
+                  <a:txBody>
+                    <a:bodyPr/>
+                    <a:lstStyle/>
+                    <a:p>
+                      <a:r>
+                        <a:rPr sz="1100">
+                          <a:solidFill>
+                            <a:srgbClr val="1F2328"/>
+                          </a:solidFill>
+                        </a:rPr>
+                        <a:t>Tunnel up? Rotas corretas?</a:t>
+                      </a:r>
+                    </a:p>
+                  </a:txBody>
+                  <a:tcPr marL="109728" marR="109728" marT="27432" marB="27432" anchor="ctr">
+                    <a:solidFill>
+                      <a:srgbClr val="F6F8FA"/>
+                    </a:solidFill>
+                  </a:tcPr>
+                </a:tc>
+              </a:tr>
+              <a:tr h="347472">
+                <a:tc>
+                  <a:txBody>
+                    <a:bodyPr/>
+                    <a:lstStyle/>
+                    <a:p>
+                      <a:r>
+                        <a:rPr sz="1100" b="1">
+                          <a:solidFill>
+                            <a:srgbClr val="1F2328"/>
+                          </a:solidFill>
+                        </a:rPr>
+                        <a:t>DNS</a:t>
+                      </a:r>
+                    </a:p>
+                  </a:txBody>
+                  <a:tcPr marL="109728" marR="109728" marT="27432" marB="27432" anchor="ctr">
+                    <a:solidFill>
+                      <a:srgbClr val="FFFFFF"/>
+                    </a:solidFill>
+                  </a:tcPr>
+                </a:tc>
+                <a:tc>
+                  <a:txBody>
+                    <a:bodyPr/>
+                    <a:lstStyle/>
+                    <a:p>
+                      <a:r>
+                        <a:rPr sz="1100">
+                          <a:solidFill>
+                            <a:srgbClr val="1F2328"/>
+                          </a:solidFill>
+                        </a:rPr>
+                        <a:t>Resolução de nomes em IPs</a:t>
+                      </a:r>
+                    </a:p>
+                  </a:txBody>
+                  <a:tcPr marL="109728" marR="109728" marT="27432" marB="27432" anchor="ctr">
+                    <a:solidFill>
+                      <a:srgbClr val="FFFFFF"/>
+                    </a:solidFill>
+                  </a:tcPr>
+                </a:tc>
+                <a:tc>
+                  <a:txBody>
+                    <a:bodyPr/>
+                    <a:lstStyle/>
+                    <a:p>
+                      <a:r>
+                        <a:rPr sz="1100">
+                          <a:solidFill>
+                            <a:srgbClr val="1F2328"/>
+                          </a:solidFill>
+                        </a:rPr>
+                        <a:t>Todos os serviços com nomes</a:t>
+                      </a:r>
+                    </a:p>
+                  </a:txBody>
+                  <a:tcPr marL="109728" marR="109728" marT="27432" marB="27432" anchor="ctr">
+                    <a:solidFill>
+                      <a:srgbClr val="FFFFFF"/>
+                    </a:solidFill>
+                  </a:tcPr>
+                </a:tc>
+                <a:tc>
+                  <a:txBody>
+                    <a:bodyPr/>
+                    <a:lstStyle/>
+                    <a:p>
+                      <a:r>
+                        <a:rPr sz="1100">
+                          <a:solidFill>
+                            <a:srgbClr val="1F2328"/>
+                          </a:solidFill>
+                        </a:rPr>
+                        <a:t>Zona existe? Records corretos?</a:t>
+                      </a:r>
+                    </a:p>
+                  </a:txBody>
+                  <a:tcPr marL="109728" marR="109728" marT="27432" marB="27432" anchor="ctr">
+                    <a:solidFill>
+                      <a:srgbClr val="FFFFFF"/>
+                    </a:solidFill>
+                  </a:tcPr>
+                </a:tc>
+              </a:tr>
+            </a:tbl>
+          </a:graphicData>
+        </a:graphic>
+      </p:graphicFrame>
       <p:sp>
         <p:nvSpPr>
           <p:cNvPr id="4" name="TextBox 3"/>
@@ -8550,13 +9123,16 @@
         </p:nvSpPr>
         <p:spPr>
           <a:xfrm>
-            <a:off x="731520" y="3474720"/>
-            <a:ext cx="10698480" cy="914400"/>
+            <a:off x="731520" y="4754880"/>
+            <a:ext cx="10698480" cy="667512"/>
           </a:xfrm>
           <a:prstGeom prst="rect">
             <a:avLst/>
           </a:prstGeom>
           <a:noFill/>
+          <a:solidFill>
+            <a:srgbClr val="EDF3F9"/>
+          </a:solidFill>
         </p:spPr>
         <p:txBody>
           <a:bodyPr wrap="square">
@@ -8564,14 +9140,21 @@
           </a:bodyPr>
           <a:lstStyle/>
           <a:p>
-            <a:pPr algn="ctr"/>
             <a:r>
-              <a:rPr sz="1800" b="0">
-                <a:solidFill>
-                  <a:srgbClr val="666666"/>
-                </a:solidFill>
-              </a:rPr>
-              <a:t>Do email do cliente ao fechamento</a:t>
+              <a:rPr sz="1400" b="1">
+                <a:solidFill>
+                  <a:srgbClr val="1F2328"/>
+                </a:solidFill>
+              </a:rPr>
+              <a:t>ℹ  </a:t>
+            </a:r>
+            <a:r>
+              <a:rPr sz="1200" b="0">
+                <a:solidFill>
+                  <a:srgbClr val="1F2328"/>
+                </a:solidFill>
+              </a:rPr>
+              <a:t>Problemas de rede quase sempre envolvem Security Group ou VPC. Confirmar SG (portas abertas) e route table antes de escalar.</a:t>
             </a:r>
           </a:p>
         </p:txBody>
@@ -8606,7 +9189,2481 @@
         </p:nvSpPr>
         <p:spPr>
           <a:xfrm>
-            <a:off x="0" y="320040"/>
+            <a:off x="731520" y="502920"/>
+          </a:xfrm>
+        </p:spPr>
+        <p:txBody>
+          <a:bodyPr/>
+          <a:lstStyle/>
+          <a:p>
+            <a:r>
+              <a:rPr sz="2400" b="1">
+                <a:solidFill>
+                  <a:srgbClr val="C7000B"/>
+                </a:solidFill>
+              </a:rPr>
+              <a:t>Banco de Dados — Serviços em Detalhe</a:t>
+            </a:r>
+          </a:p>
+        </p:txBody>
+      </p:sp>
+      <p:graphicFrame>
+        <p:nvGraphicFramePr>
+          <p:cNvPr id="3" name="Table 2"/>
+          <p:cNvGraphicFramePr>
+            <a:graphicFrameLocks noGrp="1"/>
+          </p:cNvGraphicFramePr>
+          <p:nvPr/>
+        </p:nvGraphicFramePr>
+        <p:xfrm>
+          <a:off x="731520" y="1737360"/>
+          <a:ext cx="10698480" cy="1801368"/>
+        </p:xfrm>
+        <a:graphic>
+          <a:graphicData uri="http://schemas.openxmlformats.org/drawingml/2006/table">
+            <a:tbl>
+              <a:tblPr firstRow="1" bandRow="1">
+                <a:tableStyleId>{5C22544A-7EE6-4342-B048-85BDC9FD1C3A}</a:tableStyleId>
+              </a:tblPr>
+              <a:tblGrid>
+                <a:gridCol w="731520"/>
+                <a:gridCol w="3200400"/>
+                <a:gridCol w="2926080"/>
+                <a:gridCol w="3840480"/>
+              </a:tblGrid>
+              <a:tr h="411480">
+                <a:tc>
+                  <a:txBody>
+                    <a:bodyPr/>
+                    <a:lstStyle/>
+                    <a:p>
+                      <a:pPr algn="ctr"/>
+                      <a:r>
+                        <a:rPr sz="1300" b="1">
+                          <a:solidFill>
+                            <a:srgbClr val="FFFFFF"/>
+                          </a:solidFill>
+                        </a:rPr>
+                        <a:t>Svc</a:t>
+                      </a:r>
+                    </a:p>
+                  </a:txBody>
+                  <a:tcPr marL="109728" marR="109728" marT="36576" marB="36576" anchor="ctr">
+                    <a:solidFill>
+                      <a:srgbClr val="C7000B"/>
+                    </a:solidFill>
+                  </a:tcPr>
+                </a:tc>
+                <a:tc>
+                  <a:txBody>
+                    <a:bodyPr/>
+                    <a:lstStyle/>
+                    <a:p>
+                      <a:pPr algn="ctr"/>
+                      <a:r>
+                        <a:rPr sz="1300" b="1">
+                          <a:solidFill>
+                            <a:srgbClr val="FFFFFF"/>
+                          </a:solidFill>
+                        </a:rPr>
+                        <a:t>O Que É</a:t>
+                      </a:r>
+                    </a:p>
+                  </a:txBody>
+                  <a:tcPr marL="109728" marR="109728" marT="36576" marB="36576" anchor="ctr">
+                    <a:solidFill>
+                      <a:srgbClr val="C7000B"/>
+                    </a:solidFill>
+                  </a:tcPr>
+                </a:tc>
+                <a:tc>
+                  <a:txBody>
+                    <a:bodyPr/>
+                    <a:lstStyle/>
+                    <a:p>
+                      <a:pPr algn="ctr"/>
+                      <a:r>
+                        <a:rPr sz="1300" b="1">
+                          <a:solidFill>
+                            <a:srgbClr val="FFFFFF"/>
+                          </a:solidFill>
+                        </a:rPr>
+                        <a:t>Quando Usar</a:t>
+                      </a:r>
+                    </a:p>
+                  </a:txBody>
+                  <a:tcPr marL="109728" marR="109728" marT="36576" marB="36576" anchor="ctr">
+                    <a:solidFill>
+                      <a:srgbClr val="C7000B"/>
+                    </a:solidFill>
+                  </a:tcPr>
+                </a:tc>
+                <a:tc>
+                  <a:txBody>
+                    <a:bodyPr/>
+                    <a:lstStyle/>
+                    <a:p>
+                      <a:pPr algn="ctr"/>
+                      <a:r>
+                        <a:rPr sz="1300" b="1">
+                          <a:solidFill>
+                            <a:srgbClr val="FFFFFF"/>
+                          </a:solidFill>
+                        </a:rPr>
+                        <a:t>O Que Verificar Primeiro</a:t>
+                      </a:r>
+                    </a:p>
+                  </a:txBody>
+                  <a:tcPr marL="109728" marR="109728" marT="36576" marB="36576" anchor="ctr">
+                    <a:solidFill>
+                      <a:srgbClr val="C7000B"/>
+                    </a:solidFill>
+                  </a:tcPr>
+                </a:tc>
+              </a:tr>
+              <a:tr h="347472">
+                <a:tc>
+                  <a:txBody>
+                    <a:bodyPr/>
+                    <a:lstStyle/>
+                    <a:p>
+                      <a:r>
+                        <a:rPr sz="1100" b="1">
+                          <a:solidFill>
+                            <a:srgbClr val="1F2328"/>
+                          </a:solidFill>
+                        </a:rPr>
+                        <a:t>RDS</a:t>
+                      </a:r>
+                    </a:p>
+                  </a:txBody>
+                  <a:tcPr marL="109728" marR="109728" marT="27432" marB="27432" anchor="ctr">
+                    <a:solidFill>
+                      <a:srgbClr val="F6F8FA"/>
+                    </a:solidFill>
+                  </a:tcPr>
+                </a:tc>
+                <a:tc>
+                  <a:txBody>
+                    <a:bodyPr/>
+                    <a:lstStyle/>
+                    <a:p>
+                      <a:r>
+                        <a:rPr sz="1100">
+                          <a:solidFill>
+                            <a:srgbClr val="1F2328"/>
+                          </a:solidFill>
+                        </a:rPr>
+                        <a:t>BD relacional gerenciado (MySQL, PG)</a:t>
+                      </a:r>
+                    </a:p>
+                  </a:txBody>
+                  <a:tcPr marL="109728" marR="109728" marT="27432" marB="27432" anchor="ctr">
+                    <a:solidFill>
+                      <a:srgbClr val="F6F8FA"/>
+                    </a:solidFill>
+                  </a:tcPr>
+                </a:tc>
+                <a:tc>
+                  <a:txBody>
+                    <a:bodyPr/>
+                    <a:lstStyle/>
+                    <a:p>
+                      <a:r>
+                        <a:rPr sz="1100">
+                          <a:solidFill>
+                            <a:srgbClr val="1F2328"/>
+                          </a:solidFill>
+                        </a:rPr>
+                        <a:t>Apps que usam SQL padrão</a:t>
+                      </a:r>
+                    </a:p>
+                  </a:txBody>
+                  <a:tcPr marL="109728" marR="109728" marT="27432" marB="27432" anchor="ctr">
+                    <a:solidFill>
+                      <a:srgbClr val="F6F8FA"/>
+                    </a:solidFill>
+                  </a:tcPr>
+                </a:tc>
+                <a:tc>
+                  <a:txBody>
+                    <a:bodyPr/>
+                    <a:lstStyle/>
+                    <a:p>
+                      <a:r>
+                        <a:rPr sz="1100">
+                          <a:solidFill>
+                            <a:srgbClr val="1F2328"/>
+                          </a:solidFill>
+                        </a:rPr>
+                        <a:t>Slow log, conexões, status HA</a:t>
+                      </a:r>
+                    </a:p>
+                  </a:txBody>
+                  <a:tcPr marL="109728" marR="109728" marT="27432" marB="27432" anchor="ctr">
+                    <a:solidFill>
+                      <a:srgbClr val="F6F8FA"/>
+                    </a:solidFill>
+                  </a:tcPr>
+                </a:tc>
+              </a:tr>
+              <a:tr h="347472">
+                <a:tc>
+                  <a:txBody>
+                    <a:bodyPr/>
+                    <a:lstStyle/>
+                    <a:p>
+                      <a:r>
+                        <a:rPr sz="1100" b="1">
+                          <a:solidFill>
+                            <a:srgbClr val="1F2328"/>
+                          </a:solidFill>
+                        </a:rPr>
+                        <a:t>GaussDB</a:t>
+                      </a:r>
+                    </a:p>
+                  </a:txBody>
+                  <a:tcPr marL="109728" marR="109728" marT="27432" marB="27432" anchor="ctr">
+                    <a:solidFill>
+                      <a:srgbClr val="FFFFFF"/>
+                    </a:solidFill>
+                  </a:tcPr>
+                </a:tc>
+                <a:tc>
+                  <a:txBody>
+                    <a:bodyPr/>
+                    <a:lstStyle/>
+                    <a:p>
+                      <a:r>
+                        <a:rPr sz="1100">
+                          <a:solidFill>
+                            <a:srgbClr val="1F2328"/>
+                          </a:solidFill>
+                        </a:rPr>
+                        <a:t>BD de alta performance da Huawei</a:t>
+                      </a:r>
+                    </a:p>
+                  </a:txBody>
+                  <a:tcPr marL="109728" marR="109728" marT="27432" marB="27432" anchor="ctr">
+                    <a:solidFill>
+                      <a:srgbClr val="FFFFFF"/>
+                    </a:solidFill>
+                  </a:tcPr>
+                </a:tc>
+                <a:tc>
+                  <a:txBody>
+                    <a:bodyPr/>
+                    <a:lstStyle/>
+                    <a:p>
+                      <a:r>
+                        <a:rPr sz="1100">
+                          <a:solidFill>
+                            <a:srgbClr val="1F2328"/>
+                          </a:solidFill>
+                        </a:rPr>
+                        <a:t>Grande escala, OLTP</a:t>
+                      </a:r>
+                    </a:p>
+                  </a:txBody>
+                  <a:tcPr marL="109728" marR="109728" marT="27432" marB="27432" anchor="ctr">
+                    <a:solidFill>
+                      <a:srgbClr val="FFFFFF"/>
+                    </a:solidFill>
+                  </a:tcPr>
+                </a:tc>
+                <a:tc>
+                  <a:txBody>
+                    <a:bodyPr/>
+                    <a:lstStyle/>
+                    <a:p>
+                      <a:r>
+                        <a:rPr sz="1100">
+                          <a:solidFill>
+                            <a:srgbClr val="1F2328"/>
+                          </a:solidFill>
+                        </a:rPr>
+                        <a:t>Performance, sync, conexões</a:t>
+                      </a:r>
+                    </a:p>
+                  </a:txBody>
+                  <a:tcPr marL="109728" marR="109728" marT="27432" marB="27432" anchor="ctr">
+                    <a:solidFill>
+                      <a:srgbClr val="FFFFFF"/>
+                    </a:solidFill>
+                  </a:tcPr>
+                </a:tc>
+              </a:tr>
+              <a:tr h="347472">
+                <a:tc>
+                  <a:txBody>
+                    <a:bodyPr/>
+                    <a:lstStyle/>
+                    <a:p>
+                      <a:r>
+                        <a:rPr sz="1100" b="1">
+                          <a:solidFill>
+                            <a:srgbClr val="1F2328"/>
+                          </a:solidFill>
+                        </a:rPr>
+                        <a:t>DRS</a:t>
+                      </a:r>
+                    </a:p>
+                  </a:txBody>
+                  <a:tcPr marL="109728" marR="109728" marT="27432" marB="27432" anchor="ctr">
+                    <a:solidFill>
+                      <a:srgbClr val="F6F8FA"/>
+                    </a:solidFill>
+                  </a:tcPr>
+                </a:tc>
+                <a:tc>
+                  <a:txBody>
+                    <a:bodyPr/>
+                    <a:lstStyle/>
+                    <a:p>
+                      <a:r>
+                        <a:rPr sz="1100">
+                          <a:solidFill>
+                            <a:srgbClr val="1F2328"/>
+                          </a:solidFill>
+                        </a:rPr>
+                        <a:t>Replicação e migração de dados</a:t>
+                      </a:r>
+                    </a:p>
+                  </a:txBody>
+                  <a:tcPr marL="109728" marR="109728" marT="27432" marB="27432" anchor="ctr">
+                    <a:solidFill>
+                      <a:srgbClr val="F6F8FA"/>
+                    </a:solidFill>
+                  </a:tcPr>
+                </a:tc>
+                <a:tc>
+                  <a:txBody>
+                    <a:bodyPr/>
+                    <a:lstStyle/>
+                    <a:p>
+                      <a:r>
+                        <a:rPr sz="1100">
+                          <a:solidFill>
+                            <a:srgbClr val="1F2328"/>
+                          </a:solidFill>
+                        </a:rPr>
+                        <a:t>Migração entre bancos, sync contínua</a:t>
+                      </a:r>
+                    </a:p>
+                  </a:txBody>
+                  <a:tcPr marL="109728" marR="109728" marT="27432" marB="27432" anchor="ctr">
+                    <a:solidFill>
+                      <a:srgbClr val="F6F8FA"/>
+                    </a:solidFill>
+                  </a:tcPr>
+                </a:tc>
+                <a:tc>
+                  <a:txBody>
+                    <a:bodyPr/>
+                    <a:lstStyle/>
+                    <a:p>
+                      <a:r>
+                        <a:rPr sz="1100">
+                          <a:solidFill>
+                            <a:srgbClr val="1F2328"/>
+                          </a:solidFill>
+                        </a:rPr>
+                        <a:t>Lag de sync, status do job</a:t>
+                      </a:r>
+                    </a:p>
+                  </a:txBody>
+                  <a:tcPr marL="109728" marR="109728" marT="27432" marB="27432" anchor="ctr">
+                    <a:solidFill>
+                      <a:srgbClr val="F6F8FA"/>
+                    </a:solidFill>
+                  </a:tcPr>
+                </a:tc>
+              </a:tr>
+              <a:tr h="347472">
+                <a:tc>
+                  <a:txBody>
+                    <a:bodyPr/>
+                    <a:lstStyle/>
+                    <a:p>
+                      <a:r>
+                        <a:rPr sz="1100" b="1">
+                          <a:solidFill>
+                            <a:srgbClr val="1F2328"/>
+                          </a:solidFill>
+                        </a:rPr>
+                        <a:t>DDS</a:t>
+                      </a:r>
+                    </a:p>
+                  </a:txBody>
+                  <a:tcPr marL="109728" marR="109728" marT="27432" marB="27432" anchor="ctr">
+                    <a:solidFill>
+                      <a:srgbClr val="FFFFFF"/>
+                    </a:solidFill>
+                  </a:tcPr>
+                </a:tc>
+                <a:tc>
+                  <a:txBody>
+                    <a:bodyPr/>
+                    <a:lstStyle/>
+                    <a:p>
+                      <a:r>
+                        <a:rPr sz="1100">
+                          <a:solidFill>
+                            <a:srgbClr val="1F2328"/>
+                          </a:solidFill>
+                        </a:rPr>
+                        <a:t>Banco de documentos (NoSQL)</a:t>
+                      </a:r>
+                    </a:p>
+                  </a:txBody>
+                  <a:tcPr marL="109728" marR="109728" marT="27432" marB="27432" anchor="ctr">
+                    <a:solidFill>
+                      <a:srgbClr val="FFFFFF"/>
+                    </a:solidFill>
+                  </a:tcPr>
+                </a:tc>
+                <a:tc>
+                  <a:txBody>
+                    <a:bodyPr/>
+                    <a:lstStyle/>
+                    <a:p>
+                      <a:r>
+                        <a:rPr sz="1100">
+                          <a:solidFill>
+                            <a:srgbClr val="1F2328"/>
+                          </a:solidFill>
+                        </a:rPr>
+                        <a:t>Apps com schema flexível</a:t>
+                      </a:r>
+                    </a:p>
+                  </a:txBody>
+                  <a:tcPr marL="109728" marR="109728" marT="27432" marB="27432" anchor="ctr">
+                    <a:solidFill>
+                      <a:srgbClr val="FFFFFF"/>
+                    </a:solidFill>
+                  </a:tcPr>
+                </a:tc>
+                <a:tc>
+                  <a:txBody>
+                    <a:bodyPr/>
+                    <a:lstStyle/>
+                    <a:p>
+                      <a:r>
+                        <a:rPr sz="1100">
+                          <a:solidFill>
+                            <a:srgbClr val="1F2328"/>
+                          </a:solidFill>
+                        </a:rPr>
+                        <a:t>Queries lentas, índices, conexões</a:t>
+                      </a:r>
+                    </a:p>
+                  </a:txBody>
+                  <a:tcPr marL="109728" marR="109728" marT="27432" marB="27432" anchor="ctr">
+                    <a:solidFill>
+                      <a:srgbClr val="FFFFFF"/>
+                    </a:solidFill>
+                  </a:tcPr>
+                </a:tc>
+              </a:tr>
+            </a:tbl>
+          </a:graphicData>
+        </a:graphic>
+      </p:graphicFrame>
+      <p:sp>
+        <p:nvSpPr>
+          <p:cNvPr id="4" name="TextBox 3"/>
+          <p:cNvSpPr txBox="1"/>
+          <p:nvPr/>
+        </p:nvSpPr>
+        <p:spPr>
+          <a:xfrm>
+            <a:off x="731520" y="4754880"/>
+            <a:ext cx="10698480" cy="667512"/>
+          </a:xfrm>
+          <a:prstGeom prst="rect">
+            <a:avLst/>
+          </a:prstGeom>
+          <a:noFill/>
+          <a:solidFill>
+            <a:srgbClr val="EDF6ED"/>
+          </a:solidFill>
+        </p:spPr>
+        <p:txBody>
+          <a:bodyPr wrap="square">
+            <a:noAutofit/>
+          </a:bodyPr>
+          <a:lstStyle/>
+          <a:p>
+            <a:r>
+              <a:rPr sz="1400" b="1">
+                <a:solidFill>
+                  <a:srgbClr val="1F2328"/>
+                </a:solidFill>
+              </a:rPr>
+              <a:t>✓  </a:t>
+            </a:r>
+            <a:r>
+              <a:rPr sz="1200" b="0">
+                <a:solidFill>
+                  <a:srgbClr val="1F2328"/>
+                </a:solidFill>
+              </a:rPr>
+              <a:t>RDS é o BD mais usado. Problemas comuns: slow queries e limite de conexões. Pedir sempre o slow log e o número de conexões ativas.</a:t>
+            </a:r>
+          </a:p>
+        </p:txBody>
+      </p:sp>
+    </p:spTree>
+  </p:cSld>
+  <p:clrMapOvr>
+    <a:masterClrMapping/>
+  </p:clrMapOvr>
+</p:sld>
+</file>
+
+<file path=ppt/slides/slide12.xml><?xml version="1.0" encoding="utf-8"?>
+<p:sld xmlns:a="http://schemas.openxmlformats.org/drawingml/2006/main" xmlns:p="http://schemas.openxmlformats.org/presentationml/2006/main" xmlns:r="http://schemas.openxmlformats.org/officeDocument/2006/relationships">
+  <p:cSld>
+    <p:spTree>
+      <p:nvGrpSpPr>
+        <p:cNvPr id="1" name=""/>
+        <p:cNvGrpSpPr/>
+        <p:nvPr/>
+      </p:nvGrpSpPr>
+      <p:grpSpPr/>
+      <p:sp>
+        <p:nvSpPr>
+          <p:cNvPr id="2" name="Title 1"/>
+          <p:cNvSpPr>
+            <a:spLocks noGrp="1"/>
+          </p:cNvSpPr>
+          <p:nvPr>
+            <p:ph type="title"/>
+          </p:nvPr>
+        </p:nvSpPr>
+        <p:spPr>
+          <a:xfrm>
+            <a:off x="731520" y="502920"/>
+          </a:xfrm>
+        </p:spPr>
+        <p:txBody>
+          <a:bodyPr/>
+          <a:lstStyle/>
+          <a:p>
+            <a:r>
+              <a:rPr sz="2400" b="1">
+                <a:solidFill>
+                  <a:srgbClr val="C7000B"/>
+                </a:solidFill>
+              </a:rPr>
+              <a:t>Segurança — Serviços em Detalhe</a:t>
+            </a:r>
+          </a:p>
+        </p:txBody>
+      </p:sp>
+      <p:graphicFrame>
+        <p:nvGraphicFramePr>
+          <p:cNvPr id="3" name="Table 2"/>
+          <p:cNvGraphicFramePr>
+            <a:graphicFrameLocks noGrp="1"/>
+          </p:cNvGraphicFramePr>
+          <p:nvPr/>
+        </p:nvGraphicFramePr>
+        <p:xfrm>
+          <a:off x="731520" y="1737360"/>
+          <a:ext cx="10698480" cy="1801368"/>
+        </p:xfrm>
+        <a:graphic>
+          <a:graphicData uri="http://schemas.openxmlformats.org/drawingml/2006/table">
+            <a:tbl>
+              <a:tblPr firstRow="1" bandRow="1">
+                <a:tableStyleId>{5C22544A-7EE6-4342-B048-85BDC9FD1C3A}</a:tableStyleId>
+              </a:tblPr>
+              <a:tblGrid>
+                <a:gridCol w="731520"/>
+                <a:gridCol w="3200400"/>
+                <a:gridCol w="2926080"/>
+                <a:gridCol w="3840480"/>
+              </a:tblGrid>
+              <a:tr h="411480">
+                <a:tc>
+                  <a:txBody>
+                    <a:bodyPr/>
+                    <a:lstStyle/>
+                    <a:p>
+                      <a:pPr algn="ctr"/>
+                      <a:r>
+                        <a:rPr sz="1300" b="1">
+                          <a:solidFill>
+                            <a:srgbClr val="FFFFFF"/>
+                          </a:solidFill>
+                        </a:rPr>
+                        <a:t>Svc</a:t>
+                      </a:r>
+                    </a:p>
+                  </a:txBody>
+                  <a:tcPr marL="109728" marR="109728" marT="36576" marB="36576" anchor="ctr">
+                    <a:solidFill>
+                      <a:srgbClr val="C7000B"/>
+                    </a:solidFill>
+                  </a:tcPr>
+                </a:tc>
+                <a:tc>
+                  <a:txBody>
+                    <a:bodyPr/>
+                    <a:lstStyle/>
+                    <a:p>
+                      <a:pPr algn="ctr"/>
+                      <a:r>
+                        <a:rPr sz="1300" b="1">
+                          <a:solidFill>
+                            <a:srgbClr val="FFFFFF"/>
+                          </a:solidFill>
+                        </a:rPr>
+                        <a:t>O Que É</a:t>
+                      </a:r>
+                    </a:p>
+                  </a:txBody>
+                  <a:tcPr marL="109728" marR="109728" marT="36576" marB="36576" anchor="ctr">
+                    <a:solidFill>
+                      <a:srgbClr val="C7000B"/>
+                    </a:solidFill>
+                  </a:tcPr>
+                </a:tc>
+                <a:tc>
+                  <a:txBody>
+                    <a:bodyPr/>
+                    <a:lstStyle/>
+                    <a:p>
+                      <a:pPr algn="ctr"/>
+                      <a:r>
+                        <a:rPr sz="1300" b="1">
+                          <a:solidFill>
+                            <a:srgbClr val="FFFFFF"/>
+                          </a:solidFill>
+                        </a:rPr>
+                        <a:t>Quando Usar</a:t>
+                      </a:r>
+                    </a:p>
+                  </a:txBody>
+                  <a:tcPr marL="109728" marR="109728" marT="36576" marB="36576" anchor="ctr">
+                    <a:solidFill>
+                      <a:srgbClr val="C7000B"/>
+                    </a:solidFill>
+                  </a:tcPr>
+                </a:tc>
+                <a:tc>
+                  <a:txBody>
+                    <a:bodyPr/>
+                    <a:lstStyle/>
+                    <a:p>
+                      <a:pPr algn="ctr"/>
+                      <a:r>
+                        <a:rPr sz="1300" b="1">
+                          <a:solidFill>
+                            <a:srgbClr val="FFFFFF"/>
+                          </a:solidFill>
+                        </a:rPr>
+                        <a:t>O Que Verificar Primeiro</a:t>
+                      </a:r>
+                    </a:p>
+                  </a:txBody>
+                  <a:tcPr marL="109728" marR="109728" marT="36576" marB="36576" anchor="ctr">
+                    <a:solidFill>
+                      <a:srgbClr val="C7000B"/>
+                    </a:solidFill>
+                  </a:tcPr>
+                </a:tc>
+              </a:tr>
+              <a:tr h="347472">
+                <a:tc>
+                  <a:txBody>
+                    <a:bodyPr/>
+                    <a:lstStyle/>
+                    <a:p>
+                      <a:r>
+                        <a:rPr sz="1100" b="1">
+                          <a:solidFill>
+                            <a:srgbClr val="1F2328"/>
+                          </a:solidFill>
+                        </a:rPr>
+                        <a:t>Anti-DDoS</a:t>
+                      </a:r>
+                    </a:p>
+                  </a:txBody>
+                  <a:tcPr marL="109728" marR="109728" marT="27432" marB="27432" anchor="ctr">
+                    <a:solidFill>
+                      <a:srgbClr val="F6F8FA"/>
+                    </a:solidFill>
+                  </a:tcPr>
+                </a:tc>
+                <a:tc>
+                  <a:txBody>
+                    <a:bodyPr/>
+                    <a:lstStyle/>
+                    <a:p>
+                      <a:r>
+                        <a:rPr sz="1100">
+                          <a:solidFill>
+                            <a:srgbClr val="1F2328"/>
+                          </a:solidFill>
+                        </a:rPr>
+                        <a:t>Proteção contra ataques de negação</a:t>
+                      </a:r>
+                    </a:p>
+                  </a:txBody>
+                  <a:tcPr marL="109728" marR="109728" marT="27432" marB="27432" anchor="ctr">
+                    <a:solidFill>
+                      <a:srgbClr val="F6F8FA"/>
+                    </a:solidFill>
+                  </a:tcPr>
+                </a:tc>
+                <a:tc>
+                  <a:txBody>
+                    <a:bodyPr/>
+                    <a:lstStyle/>
+                    <a:p>
+                      <a:r>
+                        <a:rPr sz="1100">
+                          <a:solidFill>
+                            <a:srgbClr val="1F2328"/>
+                          </a:solidFill>
+                        </a:rPr>
+                        <a:t>Serviços públicos expostos</a:t>
+                      </a:r>
+                    </a:p>
+                  </a:txBody>
+                  <a:tcPr marL="109728" marR="109728" marT="27432" marB="27432" anchor="ctr">
+                    <a:solidFill>
+                      <a:srgbClr val="F6F8FA"/>
+                    </a:solidFill>
+                  </a:tcPr>
+                </a:tc>
+                <a:tc>
+                  <a:txBody>
+                    <a:bodyPr/>
+                    <a:lstStyle/>
+                    <a:p>
+                      <a:r>
+                        <a:rPr sz="1100">
+                          <a:solidFill>
+                            <a:srgbClr val="1F2328"/>
+                          </a:solidFill>
+                        </a:rPr>
+                        <a:t>Tráfego anormal, evento de ataque</a:t>
+                      </a:r>
+                    </a:p>
+                  </a:txBody>
+                  <a:tcPr marL="109728" marR="109728" marT="27432" marB="27432" anchor="ctr">
+                    <a:solidFill>
+                      <a:srgbClr val="F6F8FA"/>
+                    </a:solidFill>
+                  </a:tcPr>
+                </a:tc>
+              </a:tr>
+              <a:tr h="347472">
+                <a:tc>
+                  <a:txBody>
+                    <a:bodyPr/>
+                    <a:lstStyle/>
+                    <a:p>
+                      <a:r>
+                        <a:rPr sz="1100" b="1">
+                          <a:solidFill>
+                            <a:srgbClr val="1F2328"/>
+                          </a:solidFill>
+                        </a:rPr>
+                        <a:t>WAF</a:t>
+                      </a:r>
+                    </a:p>
+                  </a:txBody>
+                  <a:tcPr marL="109728" marR="109728" marT="27432" marB="27432" anchor="ctr">
+                    <a:solidFill>
+                      <a:srgbClr val="FFFFFF"/>
+                    </a:solidFill>
+                  </a:tcPr>
+                </a:tc>
+                <a:tc>
+                  <a:txBody>
+                    <a:bodyPr/>
+                    <a:lstStyle/>
+                    <a:p>
+                      <a:r>
+                        <a:rPr sz="1100">
+                          <a:solidFill>
+                            <a:srgbClr val="1F2328"/>
+                          </a:solidFill>
+                        </a:rPr>
+                        <a:t>Firewall de aplicação web</a:t>
+                      </a:r>
+                    </a:p>
+                  </a:txBody>
+                  <a:tcPr marL="109728" marR="109728" marT="27432" marB="27432" anchor="ctr">
+                    <a:solidFill>
+                      <a:srgbClr val="FFFFFF"/>
+                    </a:solidFill>
+                  </a:tcPr>
+                </a:tc>
+                <a:tc>
+                  <a:txBody>
+                    <a:bodyPr/>
+                    <a:lstStyle/>
+                    <a:p>
+                      <a:r>
+                        <a:rPr sz="1100">
+                          <a:solidFill>
+                            <a:srgbClr val="1F2328"/>
+                          </a:solidFill>
+                        </a:rPr>
+                        <a:t>Sites e APIs web</a:t>
+                      </a:r>
+                    </a:p>
+                  </a:txBody>
+                  <a:tcPr marL="109728" marR="109728" marT="27432" marB="27432" anchor="ctr">
+                    <a:solidFill>
+                      <a:srgbClr val="FFFFFF"/>
+                    </a:solidFill>
+                  </a:tcPr>
+                </a:tc>
+                <a:tc>
+                  <a:txBody>
+                    <a:bodyPr/>
+                    <a:lstStyle/>
+                    <a:p>
+                      <a:r>
+                        <a:rPr sz="1100">
+                          <a:solidFill>
+                            <a:srgbClr val="1F2328"/>
+                          </a:solidFill>
+                        </a:rPr>
+                        <a:t>Regras WAF, falsos positivos, logs</a:t>
+                      </a:r>
+                    </a:p>
+                  </a:txBody>
+                  <a:tcPr marL="109728" marR="109728" marT="27432" marB="27432" anchor="ctr">
+                    <a:solidFill>
+                      <a:srgbClr val="FFFFFF"/>
+                    </a:solidFill>
+                  </a:tcPr>
+                </a:tc>
+              </a:tr>
+              <a:tr h="347472">
+                <a:tc>
+                  <a:txBody>
+                    <a:bodyPr/>
+                    <a:lstStyle/>
+                    <a:p>
+                      <a:r>
+                        <a:rPr sz="1100" b="1">
+                          <a:solidFill>
+                            <a:srgbClr val="1F2328"/>
+                          </a:solidFill>
+                        </a:rPr>
+                        <a:t>IAM</a:t>
+                      </a:r>
+                    </a:p>
+                  </a:txBody>
+                  <a:tcPr marL="109728" marR="109728" marT="27432" marB="27432" anchor="ctr">
+                    <a:solidFill>
+                      <a:srgbClr val="F6F8FA"/>
+                    </a:solidFill>
+                  </a:tcPr>
+                </a:tc>
+                <a:tc>
+                  <a:txBody>
+                    <a:bodyPr/>
+                    <a:lstStyle/>
+                    <a:p>
+                      <a:r>
+                        <a:rPr sz="1100">
+                          <a:solidFill>
+                            <a:srgbClr val="1F2328"/>
+                          </a:solidFill>
+                        </a:rPr>
+                        <a:t>Gestão de identidade e acesso</a:t>
+                      </a:r>
+                    </a:p>
+                  </a:txBody>
+                  <a:tcPr marL="109728" marR="109728" marT="27432" marB="27432" anchor="ctr">
+                    <a:solidFill>
+                      <a:srgbClr val="F6F8FA"/>
+                    </a:solidFill>
+                  </a:tcPr>
+                </a:tc>
+                <a:tc>
+                  <a:txBody>
+                    <a:bodyPr/>
+                    <a:lstStyle/>
+                    <a:p>
+                      <a:r>
+                        <a:rPr sz="1100">
+                          <a:solidFill>
+                            <a:srgbClr val="1F2328"/>
+                          </a:solidFill>
+                        </a:rPr>
+                        <a:t>Todos os serviços</a:t>
+                      </a:r>
+                    </a:p>
+                  </a:txBody>
+                  <a:tcPr marL="109728" marR="109728" marT="27432" marB="27432" anchor="ctr">
+                    <a:solidFill>
+                      <a:srgbClr val="F6F8FA"/>
+                    </a:solidFill>
+                  </a:tcPr>
+                </a:tc>
+                <a:tc>
+                  <a:txBody>
+                    <a:bodyPr/>
+                    <a:lstStyle/>
+                    <a:p>
+                      <a:r>
+                        <a:rPr sz="1100">
+                          <a:solidFill>
+                            <a:srgbClr val="1F2328"/>
+                          </a:solidFill>
+                        </a:rPr>
+                        <a:t>Políticas, roles, permissões</a:t>
+                      </a:r>
+                    </a:p>
+                  </a:txBody>
+                  <a:tcPr marL="109728" marR="109728" marT="27432" marB="27432" anchor="ctr">
+                    <a:solidFill>
+                      <a:srgbClr val="F6F8FA"/>
+                    </a:solidFill>
+                  </a:tcPr>
+                </a:tc>
+              </a:tr>
+              <a:tr h="347472">
+                <a:tc>
+                  <a:txBody>
+                    <a:bodyPr/>
+                    <a:lstStyle/>
+                    <a:p>
+                      <a:r>
+                        <a:rPr sz="1100" b="1">
+                          <a:solidFill>
+                            <a:srgbClr val="1F2328"/>
+                          </a:solidFill>
+                        </a:rPr>
+                        <a:t>KMS</a:t>
+                      </a:r>
+                    </a:p>
+                  </a:txBody>
+                  <a:tcPr marL="109728" marR="109728" marT="27432" marB="27432" anchor="ctr">
+                    <a:solidFill>
+                      <a:srgbClr val="FFFFFF"/>
+                    </a:solidFill>
+                  </a:tcPr>
+                </a:tc>
+                <a:tc>
+                  <a:txBody>
+                    <a:bodyPr/>
+                    <a:lstStyle/>
+                    <a:p>
+                      <a:r>
+                        <a:rPr sz="1100">
+                          <a:solidFill>
+                            <a:srgbClr val="1F2328"/>
+                          </a:solidFill>
+                        </a:rPr>
+                        <a:t>Gestão de chaves de criptografia</a:t>
+                      </a:r>
+                    </a:p>
+                  </a:txBody>
+                  <a:tcPr marL="109728" marR="109728" marT="27432" marB="27432" anchor="ctr">
+                    <a:solidFill>
+                      <a:srgbClr val="FFFFFF"/>
+                    </a:solidFill>
+                  </a:tcPr>
+                </a:tc>
+                <a:tc>
+                  <a:txBody>
+                    <a:bodyPr/>
+                    <a:lstStyle/>
+                    <a:p>
+                      <a:r>
+                        <a:rPr sz="1100">
+                          <a:solidFill>
+                            <a:srgbClr val="1F2328"/>
+                          </a:solidFill>
+                        </a:rPr>
+                        <a:t>Dados sensíveis, compliance</a:t>
+                      </a:r>
+                    </a:p>
+                  </a:txBody>
+                  <a:tcPr marL="109728" marR="109728" marT="27432" marB="27432" anchor="ctr">
+                    <a:solidFill>
+                      <a:srgbClr val="FFFFFF"/>
+                    </a:solidFill>
+                  </a:tcPr>
+                </a:tc>
+                <a:tc>
+                  <a:txBody>
+                    <a:bodyPr/>
+                    <a:lstStyle/>
+                    <a:p>
+                      <a:r>
+                        <a:rPr sz="1100">
+                          <a:solidFill>
+                            <a:srgbClr val="1F2328"/>
+                          </a:solidFill>
+                        </a:rPr>
+                        <a:t>Chave existe? Permissão de uso?</a:t>
+                      </a:r>
+                    </a:p>
+                  </a:txBody>
+                  <a:tcPr marL="109728" marR="109728" marT="27432" marB="27432" anchor="ctr">
+                    <a:solidFill>
+                      <a:srgbClr val="FFFFFF"/>
+                    </a:solidFill>
+                  </a:tcPr>
+                </a:tc>
+              </a:tr>
+            </a:tbl>
+          </a:graphicData>
+        </a:graphic>
+      </p:graphicFrame>
+      <p:sp>
+        <p:nvSpPr>
+          <p:cNvPr id="4" name="TextBox 3"/>
+          <p:cNvSpPr txBox="1"/>
+          <p:nvPr/>
+        </p:nvSpPr>
+        <p:spPr>
+          <a:xfrm>
+            <a:off x="731520" y="4754880"/>
+            <a:ext cx="10698480" cy="667512"/>
+          </a:xfrm>
+          <a:prstGeom prst="rect">
+            <a:avLst/>
+          </a:prstGeom>
+          <a:noFill/>
+          <a:solidFill>
+            <a:srgbClr val="FDF8EE"/>
+          </a:solidFill>
+        </p:spPr>
+        <p:txBody>
+          <a:bodyPr wrap="square">
+            <a:noAutofit/>
+          </a:bodyPr>
+          <a:lstStyle/>
+          <a:p>
+            <a:r>
+              <a:rPr sz="1400" b="1">
+                <a:solidFill>
+                  <a:srgbClr val="1F2328"/>
+                </a:solidFill>
+              </a:rPr>
+              <a:t>⚠  </a:t>
+            </a:r>
+            <a:r>
+              <a:rPr sz="1200" b="0">
+                <a:solidFill>
+                  <a:srgbClr val="1F2328"/>
+                </a:solidFill>
+              </a:rPr>
+              <a:t>Nunca solicitar credenciais do cliente. Para problemas de acesso, verificar política IAM e orientar o cliente a validar permissões.</a:t>
+            </a:r>
+          </a:p>
+        </p:txBody>
+      </p:sp>
+    </p:spTree>
+  </p:cSld>
+  <p:clrMapOvr>
+    <a:masterClrMapping/>
+  </p:clrMapOvr>
+</p:sld>
+</file>
+
+<file path=ppt/slides/slide13.xml><?xml version="1.0" encoding="utf-8"?>
+<p:sld xmlns:a="http://schemas.openxmlformats.org/drawingml/2006/main" xmlns:p="http://schemas.openxmlformats.org/presentationml/2006/main" xmlns:r="http://schemas.openxmlformats.org/officeDocument/2006/relationships">
+  <p:cSld>
+    <p:spTree>
+      <p:nvGrpSpPr>
+        <p:cNvPr id="1" name=""/>
+        <p:cNvGrpSpPr/>
+        <p:nvPr/>
+      </p:nvGrpSpPr>
+      <p:grpSpPr/>
+      <p:sp>
+        <p:nvSpPr>
+          <p:cNvPr id="2" name="Title 1"/>
+          <p:cNvSpPr>
+            <a:spLocks noGrp="1"/>
+          </p:cNvSpPr>
+          <p:nvPr>
+            <p:ph type="title"/>
+          </p:nvPr>
+        </p:nvSpPr>
+        <p:spPr>
+          <a:xfrm>
+            <a:off x="731520" y="502920"/>
+          </a:xfrm>
+        </p:spPr>
+        <p:txBody>
+          <a:bodyPr/>
+          <a:lstStyle/>
+          <a:p>
+            <a:r>
+              <a:rPr sz="2400" b="1">
+                <a:solidFill>
+                  <a:srgbClr val="C7000B"/>
+                </a:solidFill>
+              </a:rPr>
+              <a:t>Referência Rápida — Hotline por Família</a:t>
+            </a:r>
+          </a:p>
+        </p:txBody>
+      </p:sp>
+      <p:graphicFrame>
+        <p:nvGraphicFramePr>
+          <p:cNvPr id="3" name="Table 2"/>
+          <p:cNvGraphicFramePr>
+            <a:graphicFrameLocks noGrp="1"/>
+          </p:cNvGraphicFramePr>
+          <p:nvPr/>
+        </p:nvGraphicFramePr>
+        <p:xfrm>
+          <a:off x="731520" y="1737360"/>
+          <a:ext cx="10698480" cy="2148840"/>
+        </p:xfrm>
+        <a:graphic>
+          <a:graphicData uri="http://schemas.openxmlformats.org/drawingml/2006/table">
+            <a:tbl>
+              <a:tblPr firstRow="1" bandRow="1">
+                <a:tableStyleId>{5C22544A-7EE6-4342-B048-85BDC9FD1C3A}</a:tableStyleId>
+              </a:tblPr>
+              <a:tblGrid>
+                <a:gridCol w="1645920"/>
+                <a:gridCol w="5029200"/>
+                <a:gridCol w="4023360"/>
+              </a:tblGrid>
+              <a:tr h="411480">
+                <a:tc>
+                  <a:txBody>
+                    <a:bodyPr/>
+                    <a:lstStyle/>
+                    <a:p>
+                      <a:pPr algn="ctr"/>
+                      <a:r>
+                        <a:rPr sz="1300" b="1">
+                          <a:solidFill>
+                            <a:srgbClr val="FFFFFF"/>
+                          </a:solidFill>
+                        </a:rPr>
+                        <a:t>Família</a:t>
+                      </a:r>
+                    </a:p>
+                  </a:txBody>
+                  <a:tcPr marL="109728" marR="109728" marT="36576" marB="36576" anchor="ctr">
+                    <a:solidFill>
+                      <a:srgbClr val="C7000B"/>
+                    </a:solidFill>
+                  </a:tcPr>
+                </a:tc>
+                <a:tc>
+                  <a:txBody>
+                    <a:bodyPr/>
+                    <a:lstStyle/>
+                    <a:p>
+                      <a:pPr algn="ctr"/>
+                      <a:r>
+                        <a:rPr sz="1300" b="1">
+                          <a:solidFill>
+                            <a:srgbClr val="FFFFFF"/>
+                          </a:solidFill>
+                        </a:rPr>
+                        <a:t>Primeira Coisa a Verificar</a:t>
+                      </a:r>
+                    </a:p>
+                  </a:txBody>
+                  <a:tcPr marL="109728" marR="109728" marT="36576" marB="36576" anchor="ctr">
+                    <a:solidFill>
+                      <a:srgbClr val="C7000B"/>
+                    </a:solidFill>
+                  </a:tcPr>
+                </a:tc>
+                <a:tc>
+                  <a:txBody>
+                    <a:bodyPr/>
+                    <a:lstStyle/>
+                    <a:p>
+                      <a:pPr algn="ctr"/>
+                      <a:r>
+                        <a:rPr sz="1300" b="1">
+                          <a:solidFill>
+                            <a:srgbClr val="FFFFFF"/>
+                          </a:solidFill>
+                        </a:rPr>
+                        <a:t>Escalar Quando</a:t>
+                      </a:r>
+                    </a:p>
+                  </a:txBody>
+                  <a:tcPr marL="109728" marR="109728" marT="36576" marB="36576" anchor="ctr">
+                    <a:solidFill>
+                      <a:srgbClr val="C7000B"/>
+                    </a:solidFill>
+                  </a:tcPr>
+                </a:tc>
+              </a:tr>
+              <a:tr h="347472">
+                <a:tc>
+                  <a:txBody>
+                    <a:bodyPr/>
+                    <a:lstStyle/>
+                    <a:p>
+                      <a:r>
+                        <a:rPr sz="1100" b="1">
+                          <a:solidFill>
+                            <a:srgbClr val="1F2328"/>
+                          </a:solidFill>
+                        </a:rPr>
+                        <a:t>Computação</a:t>
+                      </a:r>
+                    </a:p>
+                  </a:txBody>
+                  <a:tcPr marL="109728" marR="109728" marT="27432" marB="27432" anchor="ctr">
+                    <a:solidFill>
+                      <a:srgbClr val="F6F8FA"/>
+                    </a:solidFill>
+                  </a:tcPr>
+                </a:tc>
+                <a:tc>
+                  <a:txBody>
+                    <a:bodyPr/>
+                    <a:lstStyle/>
+                    <a:p>
+                      <a:r>
+                        <a:rPr sz="1100">
+                          <a:solidFill>
+                            <a:srgbClr val="1F2328"/>
+                          </a:solidFill>
+                        </a:rPr>
+                        <a:t>Status da VM, quotas, eventos do sistema</a:t>
+                      </a:r>
+                    </a:p>
+                  </a:txBody>
+                  <a:tcPr marL="109728" marR="109728" marT="27432" marB="27432" anchor="ctr">
+                    <a:solidFill>
+                      <a:srgbClr val="F6F8FA"/>
+                    </a:solidFill>
+                  </a:tcPr>
+                </a:tc>
+                <a:tc>
+                  <a:txBody>
+                    <a:bodyPr/>
+                    <a:lstStyle/>
+                    <a:p>
+                      <a:r>
+                        <a:rPr sz="1100">
+                          <a:solidFill>
+                            <a:srgbClr val="1F2328"/>
+                          </a:solidFill>
+                        </a:rPr>
+                        <a:t>Não liga após checagens básicas</a:t>
+                      </a:r>
+                    </a:p>
+                  </a:txBody>
+                  <a:tcPr marL="109728" marR="109728" marT="27432" marB="27432" anchor="ctr">
+                    <a:solidFill>
+                      <a:srgbClr val="F6F8FA"/>
+                    </a:solidFill>
+                  </a:tcPr>
+                </a:tc>
+              </a:tr>
+              <a:tr h="347472">
+                <a:tc>
+                  <a:txBody>
+                    <a:bodyPr/>
+                    <a:lstStyle/>
+                    <a:p>
+                      <a:r>
+                        <a:rPr sz="1100" b="1">
+                          <a:solidFill>
+                            <a:srgbClr val="1F2328"/>
+                          </a:solidFill>
+                        </a:rPr>
+                        <a:t>Armazenamento</a:t>
+                      </a:r>
+                    </a:p>
+                  </a:txBody>
+                  <a:tcPr marL="109728" marR="109728" marT="27432" marB="27432" anchor="ctr">
+                    <a:solidFill>
+                      <a:srgbClr val="FFFFFF"/>
+                    </a:solidFill>
+                  </a:tcPr>
+                </a:tc>
+                <a:tc>
+                  <a:txBody>
+                    <a:bodyPr/>
+                    <a:lstStyle/>
+                    <a:p>
+                      <a:r>
+                        <a:rPr sz="1100">
+                          <a:solidFill>
+                            <a:srgbClr val="1F2328"/>
+                          </a:solidFill>
+                        </a:rPr>
+                        <a:t>Capacidade, IOPS, anexação do disco</a:t>
+                      </a:r>
+                    </a:p>
+                  </a:txBody>
+                  <a:tcPr marL="109728" marR="109728" marT="27432" marB="27432" anchor="ctr">
+                    <a:solidFill>
+                      <a:srgbClr val="FFFFFF"/>
+                    </a:solidFill>
+                  </a:tcPr>
+                </a:tc>
+                <a:tc>
+                  <a:txBody>
+                    <a:bodyPr/>
+                    <a:lstStyle/>
+                    <a:p>
+                      <a:r>
+                        <a:rPr sz="1100">
+                          <a:solidFill>
+                            <a:srgbClr val="1F2328"/>
+                          </a:solidFill>
+                        </a:rPr>
+                        <a:t>Risco de perda de dados</a:t>
+                      </a:r>
+                    </a:p>
+                  </a:txBody>
+                  <a:tcPr marL="109728" marR="109728" marT="27432" marB="27432" anchor="ctr">
+                    <a:solidFill>
+                      <a:srgbClr val="FFFFFF"/>
+                    </a:solidFill>
+                  </a:tcPr>
+                </a:tc>
+              </a:tr>
+              <a:tr h="347472">
+                <a:tc>
+                  <a:txBody>
+                    <a:bodyPr/>
+                    <a:lstStyle/>
+                    <a:p>
+                      <a:r>
+                        <a:rPr sz="1100" b="1">
+                          <a:solidFill>
+                            <a:srgbClr val="1F2328"/>
+                          </a:solidFill>
+                        </a:rPr>
+                        <a:t>Rede</a:t>
+                      </a:r>
+                    </a:p>
+                  </a:txBody>
+                  <a:tcPr marL="109728" marR="109728" marT="27432" marB="27432" anchor="ctr">
+                    <a:solidFill>
+                      <a:srgbClr val="F6F8FA"/>
+                    </a:solidFill>
+                  </a:tcPr>
+                </a:tc>
+                <a:tc>
+                  <a:txBody>
+                    <a:bodyPr/>
+                    <a:lstStyle/>
+                    <a:p>
+                      <a:r>
+                        <a:rPr sz="1100">
+                          <a:solidFill>
+                            <a:srgbClr val="1F2328"/>
+                          </a:solidFill>
+                        </a:rPr>
+                        <a:t>VPC, Security Group, EIP, rotas</a:t>
+                      </a:r>
+                    </a:p>
+                  </a:txBody>
+                  <a:tcPr marL="109728" marR="109728" marT="27432" marB="27432" anchor="ctr">
+                    <a:solidFill>
+                      <a:srgbClr val="F6F8FA"/>
+                    </a:solidFill>
+                  </a:tcPr>
+                </a:tc>
+                <a:tc>
+                  <a:txBody>
+                    <a:bodyPr/>
+                    <a:lstStyle/>
+                    <a:p>
+                      <a:r>
+                        <a:rPr sz="1100">
+                          <a:solidFill>
+                            <a:srgbClr val="1F2328"/>
+                          </a:solidFill>
+                        </a:rPr>
+                        <a:t>Perda total de conectividade</a:t>
+                      </a:r>
+                    </a:p>
+                  </a:txBody>
+                  <a:tcPr marL="109728" marR="109728" marT="27432" marB="27432" anchor="ctr">
+                    <a:solidFill>
+                      <a:srgbClr val="F6F8FA"/>
+                    </a:solidFill>
+                  </a:tcPr>
+                </a:tc>
+              </a:tr>
+              <a:tr h="347472">
+                <a:tc>
+                  <a:txBody>
+                    <a:bodyPr/>
+                    <a:lstStyle/>
+                    <a:p>
+                      <a:r>
+                        <a:rPr sz="1100" b="1">
+                          <a:solidFill>
+                            <a:srgbClr val="1F2328"/>
+                          </a:solidFill>
+                        </a:rPr>
+                        <a:t>Banco de Dados</a:t>
+                      </a:r>
+                    </a:p>
+                  </a:txBody>
+                  <a:tcPr marL="109728" marR="109728" marT="27432" marB="27432" anchor="ctr">
+                    <a:solidFill>
+                      <a:srgbClr val="FFFFFF"/>
+                    </a:solidFill>
+                  </a:tcPr>
+                </a:tc>
+                <a:tc>
+                  <a:txBody>
+                    <a:bodyPr/>
+                    <a:lstStyle/>
+                    <a:p>
+                      <a:r>
+                        <a:rPr sz="1100">
+                          <a:solidFill>
+                            <a:srgbClr val="1F2328"/>
+                          </a:solidFill>
+                        </a:rPr>
+                        <a:t>Slow log, conexões, status HA</a:t>
+                      </a:r>
+                    </a:p>
+                  </a:txBody>
+                  <a:tcPr marL="109728" marR="109728" marT="27432" marB="27432" anchor="ctr">
+                    <a:solidFill>
+                      <a:srgbClr val="FFFFFF"/>
+                    </a:solidFill>
+                  </a:tcPr>
+                </a:tc>
+                <a:tc>
+                  <a:txBody>
+                    <a:bodyPr/>
+                    <a:lstStyle/>
+                    <a:p>
+                      <a:r>
+                        <a:rPr sz="1100">
+                          <a:solidFill>
+                            <a:srgbClr val="1F2328"/>
+                          </a:solidFill>
+                        </a:rPr>
+                        <a:t>Corrupção de dados ou HA failover</a:t>
+                      </a:r>
+                    </a:p>
+                  </a:txBody>
+                  <a:tcPr marL="109728" marR="109728" marT="27432" marB="27432" anchor="ctr">
+                    <a:solidFill>
+                      <a:srgbClr val="FFFFFF"/>
+                    </a:solidFill>
+                  </a:tcPr>
+                </a:tc>
+              </a:tr>
+              <a:tr h="347472">
+                <a:tc>
+                  <a:txBody>
+                    <a:bodyPr/>
+                    <a:lstStyle/>
+                    <a:p>
+                      <a:r>
+                        <a:rPr sz="1100" b="1">
+                          <a:solidFill>
+                            <a:srgbClr val="1F2328"/>
+                          </a:solidFill>
+                        </a:rPr>
+                        <a:t>Segurança</a:t>
+                      </a:r>
+                    </a:p>
+                  </a:txBody>
+                  <a:tcPr marL="109728" marR="109728" marT="27432" marB="27432" anchor="ctr">
+                    <a:solidFill>
+                      <a:srgbClr val="F6F8FA"/>
+                    </a:solidFill>
+                  </a:tcPr>
+                </a:tc>
+                <a:tc>
+                  <a:txBody>
+                    <a:bodyPr/>
+                    <a:lstStyle/>
+                    <a:p>
+                      <a:r>
+                        <a:rPr sz="1100">
+                          <a:solidFill>
+                            <a:srgbClr val="1F2328"/>
+                          </a:solidFill>
+                        </a:rPr>
+                        <a:t>Política IAM, regras WAF, tráfego</a:t>
+                      </a:r>
+                    </a:p>
+                  </a:txBody>
+                  <a:tcPr marL="109728" marR="109728" marT="27432" marB="27432" anchor="ctr">
+                    <a:solidFill>
+                      <a:srgbClr val="F6F8FA"/>
+                    </a:solidFill>
+                  </a:tcPr>
+                </a:tc>
+                <a:tc>
+                  <a:txBody>
+                    <a:bodyPr/>
+                    <a:lstStyle/>
+                    <a:p>
+                      <a:r>
+                        <a:rPr sz="1100">
+                          <a:solidFill>
+                            <a:srgbClr val="1F2328"/>
+                          </a:solidFill>
+                        </a:rPr>
+                        <a:t>Ataque em andamento ou bloqueio total</a:t>
+                      </a:r>
+                    </a:p>
+                  </a:txBody>
+                  <a:tcPr marL="109728" marR="109728" marT="27432" marB="27432" anchor="ctr">
+                    <a:solidFill>
+                      <a:srgbClr val="F6F8FA"/>
+                    </a:solidFill>
+                  </a:tcPr>
+                </a:tc>
+              </a:tr>
+            </a:tbl>
+          </a:graphicData>
+        </a:graphic>
+      </p:graphicFrame>
+      <p:sp>
+        <p:nvSpPr>
+          <p:cNvPr id="4" name="TextBox 3"/>
+          <p:cNvSpPr txBox="1"/>
+          <p:nvPr/>
+        </p:nvSpPr>
+        <p:spPr>
+          <a:xfrm>
+            <a:off x="731520" y="4754880"/>
+            <a:ext cx="10698480" cy="667512"/>
+          </a:xfrm>
+          <a:prstGeom prst="rect">
+            <a:avLst/>
+          </a:prstGeom>
+          <a:noFill/>
+          <a:solidFill>
+            <a:srgbClr val="EDF6ED"/>
+          </a:solidFill>
+        </p:spPr>
+        <p:txBody>
+          <a:bodyPr wrap="square">
+            <a:noAutofit/>
+          </a:bodyPr>
+          <a:lstStyle/>
+          <a:p>
+            <a:r>
+              <a:rPr sz="1400" b="1">
+                <a:solidFill>
+                  <a:srgbClr val="1F2328"/>
+                </a:solidFill>
+              </a:rPr>
+              <a:t>✓  </a:t>
+            </a:r>
+            <a:r>
+              <a:rPr sz="1200" b="0">
+                <a:solidFill>
+                  <a:srgbClr val="1F2328"/>
+                </a:solidFill>
+              </a:rPr>
+              <a:t>Esta tabela é o seu guia de bolso. Antes de escalar qualquer SR, sempre passar pelas verificações da coluna do meio primeiro.</a:t>
+            </a:r>
+          </a:p>
+        </p:txBody>
+      </p:sp>
+    </p:spTree>
+  </p:cSld>
+  <p:clrMapOvr>
+    <a:masterClrMapping/>
+  </p:clrMapOvr>
+</p:sld>
+</file>
+
+<file path=ppt/slides/slide14.xml><?xml version="1.0" encoding="utf-8"?>
+<p:sld xmlns:a="http://schemas.openxmlformats.org/drawingml/2006/main" xmlns:p="http://schemas.openxmlformats.org/presentationml/2006/main" xmlns:r="http://schemas.openxmlformats.org/officeDocument/2006/relationships">
+  <p:cSld>
+    <p:spTree>
+      <p:nvGrpSpPr>
+        <p:cNvPr id="1" name=""/>
+        <p:cNvGrpSpPr/>
+        <p:nvPr/>
+      </p:nvGrpSpPr>
+      <p:grpSpPr/>
+      <p:sp>
+        <p:nvSpPr>
+          <p:cNvPr id="2" name="Title 1"/>
+          <p:cNvSpPr>
+            <a:spLocks noGrp="1"/>
+          </p:cNvSpPr>
+          <p:nvPr>
+            <p:ph type="title"/>
+          </p:nvPr>
+        </p:nvSpPr>
+        <p:spPr>
+          <a:xfrm>
+            <a:off x="731520" y="502920"/>
+          </a:xfrm>
+        </p:spPr>
+        <p:txBody>
+          <a:bodyPr/>
+          <a:lstStyle/>
+          <a:p>
+            <a:r>
+              <a:rPr sz="2400" b="1">
+                <a:solidFill>
+                  <a:srgbClr val="C7000B"/>
+                </a:solidFill>
+              </a:rPr>
+              <a:t>Acronimos Principais</a:t>
+            </a:r>
+          </a:p>
+        </p:txBody>
+      </p:sp>
+      <p:graphicFrame>
+        <p:nvGraphicFramePr>
+          <p:cNvPr id="3" name="Table 2"/>
+          <p:cNvGraphicFramePr>
+            <a:graphicFrameLocks noGrp="1"/>
+          </p:cNvGraphicFramePr>
+          <p:nvPr/>
+        </p:nvGraphicFramePr>
+        <p:xfrm>
+          <a:off x="731520" y="1737360"/>
+          <a:ext cx="10698480" cy="3886200"/>
+        </p:xfrm>
+        <a:graphic>
+          <a:graphicData uri="http://schemas.openxmlformats.org/drawingml/2006/table">
+            <a:tbl>
+              <a:tblPr firstRow="1" bandRow="1">
+                <a:tableStyleId>{5C22544A-7EE6-4342-B048-85BDC9FD1C3A}</a:tableStyleId>
+              </a:tblPr>
+              <a:tblGrid>
+                <a:gridCol w="1371600"/>
+                <a:gridCol w="9326880"/>
+              </a:tblGrid>
+              <a:tr h="411480">
+                <a:tc>
+                  <a:txBody>
+                    <a:bodyPr/>
+                    <a:lstStyle/>
+                    <a:p>
+                      <a:pPr algn="ctr"/>
+                      <a:r>
+                        <a:rPr sz="1300" b="1">
+                          <a:solidFill>
+                            <a:srgbClr val="FFFFFF"/>
+                          </a:solidFill>
+                        </a:rPr>
+                        <a:t>Acronimo</a:t>
+                      </a:r>
+                    </a:p>
+                  </a:txBody>
+                  <a:tcPr marL="109728" marR="109728" marT="36576" marB="36576" anchor="ctr">
+                    <a:solidFill>
+                      <a:srgbClr val="C7000B"/>
+                    </a:solidFill>
+                  </a:tcPr>
+                </a:tc>
+                <a:tc>
+                  <a:txBody>
+                    <a:bodyPr/>
+                    <a:lstStyle/>
+                    <a:p>
+                      <a:pPr algn="ctr"/>
+                      <a:r>
+                        <a:rPr sz="1300" b="1">
+                          <a:solidFill>
+                            <a:srgbClr val="FFFFFF"/>
+                          </a:solidFill>
+                        </a:rPr>
+                        <a:t>Descrição</a:t>
+                      </a:r>
+                    </a:p>
+                  </a:txBody>
+                  <a:tcPr marL="109728" marR="109728" marT="36576" marB="36576" anchor="ctr">
+                    <a:solidFill>
+                      <a:srgbClr val="C7000B"/>
+                    </a:solidFill>
+                  </a:tcPr>
+                </a:tc>
+              </a:tr>
+              <a:tr h="347472">
+                <a:tc>
+                  <a:txBody>
+                    <a:bodyPr/>
+                    <a:lstStyle/>
+                    <a:p>
+                      <a:r>
+                        <a:rPr sz="1100" b="1">
+                          <a:solidFill>
+                            <a:srgbClr val="1F2328"/>
+                          </a:solidFill>
+                        </a:rPr>
+                        <a:t>ECS</a:t>
+                      </a:r>
+                    </a:p>
+                  </a:txBody>
+                  <a:tcPr marL="109728" marR="109728" marT="27432" marB="27432" anchor="ctr">
+                    <a:solidFill>
+                      <a:srgbClr val="F6F8FA"/>
+                    </a:solidFill>
+                  </a:tcPr>
+                </a:tc>
+                <a:tc>
+                  <a:txBody>
+                    <a:bodyPr/>
+                    <a:lstStyle/>
+                    <a:p>
+                      <a:r>
+                        <a:rPr sz="1100">
+                          <a:solidFill>
+                            <a:srgbClr val="1F2328"/>
+                          </a:solidFill>
+                        </a:rPr>
+                        <a:t>Elastic Cloud Server — servidor virtual escalável</a:t>
+                      </a:r>
+                    </a:p>
+                  </a:txBody>
+                  <a:tcPr marL="109728" marR="109728" marT="27432" marB="27432" anchor="ctr">
+                    <a:solidFill>
+                      <a:srgbClr val="F6F8FA"/>
+                    </a:solidFill>
+                  </a:tcPr>
+                </a:tc>
+              </a:tr>
+              <a:tr h="347472">
+                <a:tc>
+                  <a:txBody>
+                    <a:bodyPr/>
+                    <a:lstStyle/>
+                    <a:p>
+                      <a:r>
+                        <a:rPr sz="1100" b="1">
+                          <a:solidFill>
+                            <a:srgbClr val="1F2328"/>
+                          </a:solidFill>
+                        </a:rPr>
+                        <a:t>EVS</a:t>
+                      </a:r>
+                    </a:p>
+                  </a:txBody>
+                  <a:tcPr marL="109728" marR="109728" marT="27432" marB="27432" anchor="ctr">
+                    <a:solidFill>
+                      <a:srgbClr val="FFFFFF"/>
+                    </a:solidFill>
+                  </a:tcPr>
+                </a:tc>
+                <a:tc>
+                  <a:txBody>
+                    <a:bodyPr/>
+                    <a:lstStyle/>
+                    <a:p>
+                      <a:r>
+                        <a:rPr sz="1100">
+                          <a:solidFill>
+                            <a:srgbClr val="1F2328"/>
+                          </a:solidFill>
+                        </a:rPr>
+                        <a:t>Elastic Volume Service — disco de bloco elástico</a:t>
+                      </a:r>
+                    </a:p>
+                  </a:txBody>
+                  <a:tcPr marL="109728" marR="109728" marT="27432" marB="27432" anchor="ctr">
+                    <a:solidFill>
+                      <a:srgbClr val="FFFFFF"/>
+                    </a:solidFill>
+                  </a:tcPr>
+                </a:tc>
+              </a:tr>
+              <a:tr h="347472">
+                <a:tc>
+                  <a:txBody>
+                    <a:bodyPr/>
+                    <a:lstStyle/>
+                    <a:p>
+                      <a:r>
+                        <a:rPr sz="1100" b="1">
+                          <a:solidFill>
+                            <a:srgbClr val="1F2328"/>
+                          </a:solidFill>
+                        </a:rPr>
+                        <a:t>VPC</a:t>
+                      </a:r>
+                    </a:p>
+                  </a:txBody>
+                  <a:tcPr marL="109728" marR="109728" marT="27432" marB="27432" anchor="ctr">
+                    <a:solidFill>
+                      <a:srgbClr val="F6F8FA"/>
+                    </a:solidFill>
+                  </a:tcPr>
+                </a:tc>
+                <a:tc>
+                  <a:txBody>
+                    <a:bodyPr/>
+                    <a:lstStyle/>
+                    <a:p>
+                      <a:r>
+                        <a:rPr sz="1100">
+                          <a:solidFill>
+                            <a:srgbClr val="1F2328"/>
+                          </a:solidFill>
+                        </a:rPr>
+                        <a:t>Virtual Private Cloud — rede virtual isolada</a:t>
+                      </a:r>
+                    </a:p>
+                  </a:txBody>
+                  <a:tcPr marL="109728" marR="109728" marT="27432" marB="27432" anchor="ctr">
+                    <a:solidFill>
+                      <a:srgbClr val="F6F8FA"/>
+                    </a:solidFill>
+                  </a:tcPr>
+                </a:tc>
+              </a:tr>
+              <a:tr h="347472">
+                <a:tc>
+                  <a:txBody>
+                    <a:bodyPr/>
+                    <a:lstStyle/>
+                    <a:p>
+                      <a:r>
+                        <a:rPr sz="1100" b="1">
+                          <a:solidFill>
+                            <a:srgbClr val="1F2328"/>
+                          </a:solidFill>
+                        </a:rPr>
+                        <a:t>ELB</a:t>
+                      </a:r>
+                    </a:p>
+                  </a:txBody>
+                  <a:tcPr marL="109728" marR="109728" marT="27432" marB="27432" anchor="ctr">
+                    <a:solidFill>
+                      <a:srgbClr val="FFFFFF"/>
+                    </a:solidFill>
+                  </a:tcPr>
+                </a:tc>
+                <a:tc>
+                  <a:txBody>
+                    <a:bodyPr/>
+                    <a:lstStyle/>
+                    <a:p>
+                      <a:r>
+                        <a:rPr sz="1100">
+                          <a:solidFill>
+                            <a:srgbClr val="1F2328"/>
+                          </a:solidFill>
+                        </a:rPr>
+                        <a:t>Elastic Load Balance — balanceador de carga</a:t>
+                      </a:r>
+                    </a:p>
+                  </a:txBody>
+                  <a:tcPr marL="109728" marR="109728" marT="27432" marB="27432" anchor="ctr">
+                    <a:solidFill>
+                      <a:srgbClr val="FFFFFF"/>
+                    </a:solidFill>
+                  </a:tcPr>
+                </a:tc>
+              </a:tr>
+              <a:tr h="347472">
+                <a:tc>
+                  <a:txBody>
+                    <a:bodyPr/>
+                    <a:lstStyle/>
+                    <a:p>
+                      <a:r>
+                        <a:rPr sz="1100" b="1">
+                          <a:solidFill>
+                            <a:srgbClr val="1F2328"/>
+                          </a:solidFill>
+                        </a:rPr>
+                        <a:t>RDS</a:t>
+                      </a:r>
+                    </a:p>
+                  </a:txBody>
+                  <a:tcPr marL="109728" marR="109728" marT="27432" marB="27432" anchor="ctr">
+                    <a:solidFill>
+                      <a:srgbClr val="F6F8FA"/>
+                    </a:solidFill>
+                  </a:tcPr>
+                </a:tc>
+                <a:tc>
+                  <a:txBody>
+                    <a:bodyPr/>
+                    <a:lstStyle/>
+                    <a:p>
+                      <a:r>
+                        <a:rPr sz="1100">
+                          <a:solidFill>
+                            <a:srgbClr val="1F2328"/>
+                          </a:solidFill>
+                        </a:rPr>
+                        <a:t>Relational Database Service — BD relacional gerenciado</a:t>
+                      </a:r>
+                    </a:p>
+                  </a:txBody>
+                  <a:tcPr marL="109728" marR="109728" marT="27432" marB="27432" anchor="ctr">
+                    <a:solidFill>
+                      <a:srgbClr val="F6F8FA"/>
+                    </a:solidFill>
+                  </a:tcPr>
+                </a:tc>
+              </a:tr>
+              <a:tr h="347472">
+                <a:tc>
+                  <a:txBody>
+                    <a:bodyPr/>
+                    <a:lstStyle/>
+                    <a:p>
+                      <a:r>
+                        <a:rPr sz="1100" b="1">
+                          <a:solidFill>
+                            <a:srgbClr val="1F2328"/>
+                          </a:solidFill>
+                        </a:rPr>
+                        <a:t>OBS</a:t>
+                      </a:r>
+                    </a:p>
+                  </a:txBody>
+                  <a:tcPr marL="109728" marR="109728" marT="27432" marB="27432" anchor="ctr">
+                    <a:solidFill>
+                      <a:srgbClr val="FFFFFF"/>
+                    </a:solidFill>
+                  </a:tcPr>
+                </a:tc>
+                <a:tc>
+                  <a:txBody>
+                    <a:bodyPr/>
+                    <a:lstStyle/>
+                    <a:p>
+                      <a:r>
+                        <a:rPr sz="1100">
+                          <a:solidFill>
+                            <a:srgbClr val="1F2328"/>
+                          </a:solidFill>
+                        </a:rPr>
+                        <a:t>Object Storage Service — armazenamento de objetos</a:t>
+                      </a:r>
+                    </a:p>
+                  </a:txBody>
+                  <a:tcPr marL="109728" marR="109728" marT="27432" marB="27432" anchor="ctr">
+                    <a:solidFill>
+                      <a:srgbClr val="FFFFFF"/>
+                    </a:solidFill>
+                  </a:tcPr>
+                </a:tc>
+              </a:tr>
+              <a:tr h="347472">
+                <a:tc>
+                  <a:txBody>
+                    <a:bodyPr/>
+                    <a:lstStyle/>
+                    <a:p>
+                      <a:r>
+                        <a:rPr sz="1100" b="1">
+                          <a:solidFill>
+                            <a:srgbClr val="1F2328"/>
+                          </a:solidFill>
+                        </a:rPr>
+                        <a:t>IAM</a:t>
+                      </a:r>
+                    </a:p>
+                  </a:txBody>
+                  <a:tcPr marL="109728" marR="109728" marT="27432" marB="27432" anchor="ctr">
+                    <a:solidFill>
+                      <a:srgbClr val="F6F8FA"/>
+                    </a:solidFill>
+                  </a:tcPr>
+                </a:tc>
+                <a:tc>
+                  <a:txBody>
+                    <a:bodyPr/>
+                    <a:lstStyle/>
+                    <a:p>
+                      <a:r>
+                        <a:rPr sz="1100">
+                          <a:solidFill>
+                            <a:srgbClr val="1F2328"/>
+                          </a:solidFill>
+                        </a:rPr>
+                        <a:t>Identity &amp; Access Management — gestão de identidade</a:t>
+                      </a:r>
+                    </a:p>
+                  </a:txBody>
+                  <a:tcPr marL="109728" marR="109728" marT="27432" marB="27432" anchor="ctr">
+                    <a:solidFill>
+                      <a:srgbClr val="F6F8FA"/>
+                    </a:solidFill>
+                  </a:tcPr>
+                </a:tc>
+              </a:tr>
+              <a:tr h="347472">
+                <a:tc>
+                  <a:txBody>
+                    <a:bodyPr/>
+                    <a:lstStyle/>
+                    <a:p>
+                      <a:r>
+                        <a:rPr sz="1100" b="1">
+                          <a:solidFill>
+                            <a:srgbClr val="1F2328"/>
+                          </a:solidFill>
+                        </a:rPr>
+                        <a:t>SR</a:t>
+                      </a:r>
+                    </a:p>
+                  </a:txBody>
+                  <a:tcPr marL="109728" marR="109728" marT="27432" marB="27432" anchor="ctr">
+                    <a:solidFill>
+                      <a:srgbClr val="FFFFFF"/>
+                    </a:solidFill>
+                  </a:tcPr>
+                </a:tc>
+                <a:tc>
+                  <a:txBody>
+                    <a:bodyPr/>
+                    <a:lstStyle/>
+                    <a:p>
+                      <a:r>
+                        <a:rPr sz="1100">
+                          <a:solidFill>
+                            <a:srgbClr val="1F2328"/>
+                          </a:solidFill>
+                        </a:rPr>
+                        <a:t>Service Request — solicitação de serviço (ticket)</a:t>
+                      </a:r>
+                    </a:p>
+                  </a:txBody>
+                  <a:tcPr marL="109728" marR="109728" marT="27432" marB="27432" anchor="ctr">
+                    <a:solidFill>
+                      <a:srgbClr val="FFFFFF"/>
+                    </a:solidFill>
+                  </a:tcPr>
+                </a:tc>
+              </a:tr>
+              <a:tr h="347472">
+                <a:tc>
+                  <a:txBody>
+                    <a:bodyPr/>
+                    <a:lstStyle/>
+                    <a:p>
+                      <a:r>
+                        <a:rPr sz="1100" b="1">
+                          <a:solidFill>
+                            <a:srgbClr val="1F2328"/>
+                          </a:solidFill>
+                        </a:rPr>
+                        <a:t>ITR</a:t>
+                      </a:r>
+                    </a:p>
+                  </a:txBody>
+                  <a:tcPr marL="109728" marR="109728" marT="27432" marB="27432" anchor="ctr">
+                    <a:solidFill>
+                      <a:srgbClr val="F6F8FA"/>
+                    </a:solidFill>
+                  </a:tcPr>
+                </a:tc>
+                <a:tc>
+                  <a:txBody>
+                    <a:bodyPr/>
+                    <a:lstStyle/>
+                    <a:p>
+                      <a:r>
+                        <a:rPr sz="1100">
+                          <a:solidFill>
+                            <a:srgbClr val="1F2328"/>
+                          </a:solidFill>
+                        </a:rPr>
+                        <a:t>Issue To Resolve — incidente até resolução</a:t>
+                      </a:r>
+                    </a:p>
+                  </a:txBody>
+                  <a:tcPr marL="109728" marR="109728" marT="27432" marB="27432" anchor="ctr">
+                    <a:solidFill>
+                      <a:srgbClr val="F6F8FA"/>
+                    </a:solidFill>
+                  </a:tcPr>
+                </a:tc>
+              </a:tr>
+              <a:tr h="347472">
+                <a:tc>
+                  <a:txBody>
+                    <a:bodyPr/>
+                    <a:lstStyle/>
+                    <a:p>
+                      <a:r>
+                        <a:rPr sz="1100" b="1">
+                          <a:solidFill>
+                            <a:srgbClr val="1F2328"/>
+                          </a:solidFill>
+                        </a:rPr>
+                        <a:t>TAC</a:t>
+                      </a:r>
+                    </a:p>
+                  </a:txBody>
+                  <a:tcPr marL="109728" marR="109728" marT="27432" marB="27432" anchor="ctr">
+                    <a:solidFill>
+                      <a:srgbClr val="FFFFFF"/>
+                    </a:solidFill>
+                  </a:tcPr>
+                </a:tc>
+                <a:tc>
+                  <a:txBody>
+                    <a:bodyPr/>
+                    <a:lstStyle/>
+                    <a:p>
+                      <a:r>
+                        <a:rPr sz="1100">
+                          <a:solidFill>
+                            <a:srgbClr val="1F2328"/>
+                          </a:solidFill>
+                        </a:rPr>
+                        <a:t>Technical Assistance Center — centro de suporte técnico</a:t>
+                      </a:r>
+                    </a:p>
+                  </a:txBody>
+                  <a:tcPr marL="109728" marR="109728" marT="27432" marB="27432" anchor="ctr">
+                    <a:solidFill>
+                      <a:srgbClr val="FFFFFF"/>
+                    </a:solidFill>
+                  </a:tcPr>
+                </a:tc>
+              </a:tr>
+            </a:tbl>
+          </a:graphicData>
+        </a:graphic>
+      </p:graphicFrame>
+    </p:spTree>
+  </p:cSld>
+  <p:clrMapOvr>
+    <a:masterClrMapping/>
+  </p:clrMapOvr>
+</p:sld>
+</file>
+
+<file path=ppt/slides/slide15.xml><?xml version="1.0" encoding="utf-8"?>
+<p:sld xmlns:a="http://schemas.openxmlformats.org/drawingml/2006/main" xmlns:p="http://schemas.openxmlformats.org/presentationml/2006/main" xmlns:r="http://schemas.openxmlformats.org/officeDocument/2006/relationships">
+  <p:cSld>
+    <p:spTree>
+      <p:nvGrpSpPr>
+        <p:cNvPr id="1" name=""/>
+        <p:cNvGrpSpPr/>
+        <p:nvPr/>
+      </p:nvGrpSpPr>
+      <p:grpSpPr/>
+      <p:sp>
+        <p:nvSpPr>
+          <p:cNvPr id="2" name="Title 1"/>
+          <p:cNvSpPr>
+            <a:spLocks noGrp="1"/>
+          </p:cNvSpPr>
+          <p:nvPr>
+            <p:ph type="title"/>
+          </p:nvPr>
+        </p:nvSpPr>
+        <p:spPr>
+          <a:xfrm>
+            <a:off x="731520" y="502920"/>
+          </a:xfrm>
+        </p:spPr>
+        <p:txBody>
+          <a:bodyPr/>
+          <a:lstStyle/>
+          <a:p>
+            <a:r>
+              <a:rPr sz="2400" b="1">
+                <a:solidFill>
+                  <a:srgbClr val="C7000B"/>
+                </a:solidFill>
+              </a:rPr>
+              <a:t>Convenção de Nomenclatura</a:t>
+            </a:r>
+          </a:p>
+        </p:txBody>
+      </p:sp>
+      <p:sp>
+        <p:nvSpPr>
+          <p:cNvPr id="3" name="TextBox 2"/>
+          <p:cNvSpPr txBox="1"/>
+          <p:nvPr/>
+        </p:nvSpPr>
+        <p:spPr>
+          <a:xfrm>
+            <a:off x="731520" y="1554480"/>
+            <a:ext cx="10698480" cy="4114800"/>
+          </a:xfrm>
+          <a:prstGeom prst="rect">
+            <a:avLst/>
+          </a:prstGeom>
+          <a:noFill/>
+        </p:spPr>
+        <p:txBody>
+          <a:bodyPr wrap="square">
+            <a:noAutofit/>
+          </a:bodyPr>
+          <a:lstStyle/>
+          <a:p>
+            <a:pPr algn="l"/>
+            <a:r>
+              <a:rPr sz="1400" b="0">
+                <a:solidFill>
+                  <a:srgbClr val="1F2328"/>
+                </a:solidFill>
+              </a:rPr>
+              <a:t>Regras para nomes de recursos no HCS:</a:t>
+            </a:r>
+          </a:p>
+          <a:p>
+            <a:pPr algn="l">
+              <a:spcBef>
+                <a:spcPts val="400"/>
+              </a:spcBef>
+            </a:pPr>
+            <a:r>
+              <a:rPr sz="1400" b="0">
+                <a:solidFill>
+                  <a:srgbClr val="1F2328"/>
+                </a:solidFill>
+              </a:rPr>
+              <a:t/>
+            </a:r>
+          </a:p>
+          <a:p>
+            <a:pPr algn="l">
+              <a:spcBef>
+                <a:spcPts val="400"/>
+              </a:spcBef>
+            </a:pPr>
+            <a:r>
+              <a:rPr sz="1400" b="0">
+                <a:solidFill>
+                  <a:srgbClr val="1F2328"/>
+                </a:solidFill>
+              </a:rPr>
+              <a:t>  • VMs: [projeto]-[função]-[seq]  (ex: billing-app-01)</a:t>
+            </a:r>
+          </a:p>
+          <a:p>
+            <a:pPr algn="l">
+              <a:spcBef>
+                <a:spcPts val="400"/>
+              </a:spcBef>
+            </a:pPr>
+            <a:r>
+              <a:rPr sz="1400" b="0">
+                <a:solidFill>
+                  <a:srgbClr val="1F2328"/>
+                </a:solidFill>
+              </a:rPr>
+              <a:t>  • Volumes: [vm]-[disk]-[seq]     (ex: billing-app-disk-01)</a:t>
+            </a:r>
+          </a:p>
+          <a:p>
+            <a:pPr algn="l">
+              <a:spcBef>
+                <a:spcPts val="400"/>
+              </a:spcBef>
+            </a:pPr>
+            <a:r>
+              <a:rPr sz="1400" b="0">
+                <a:solidFill>
+                  <a:srgbClr val="1F2328"/>
+                </a:solidFill>
+              </a:rPr>
+              <a:t>  • VPCs: [region]-[env]-vpc       (ex: sa-east-1-prod-vpc)</a:t>
+            </a:r>
+          </a:p>
+          <a:p>
+            <a:pPr algn="l">
+              <a:spcBef>
+                <a:spcPts val="400"/>
+              </a:spcBef>
+            </a:pPr>
+            <a:r>
+              <a:rPr sz="1400" b="0">
+                <a:solidFill>
+                  <a:srgbClr val="1F2328"/>
+                </a:solidFill>
+              </a:rPr>
+              <a:t>  • SRs: SR-[ano][mes][seq]        (ex: SR-202609-00123)</a:t>
+            </a:r>
+          </a:p>
+          <a:p>
+            <a:pPr algn="l">
+              <a:spcBef>
+                <a:spcPts val="400"/>
+              </a:spcBef>
+            </a:pPr>
+            <a:r>
+              <a:rPr sz="1400" b="0">
+                <a:solidFill>
+                  <a:srgbClr val="1F2328"/>
+                </a:solidFill>
+              </a:rPr>
+              <a:t/>
+            </a:r>
+          </a:p>
+          <a:p>
+            <a:pPr algn="l">
+              <a:spcBef>
+                <a:spcPts val="400"/>
+              </a:spcBef>
+            </a:pPr>
+            <a:r>
+              <a:rPr sz="1400" b="0">
+                <a:solidFill>
+                  <a:srgbClr val="1F2328"/>
+                </a:solidFill>
+              </a:rPr>
+              <a:t>Validação: sempre confirmar o nome exato do recurso antes de prosseguir.</a:t>
+            </a:r>
+          </a:p>
+        </p:txBody>
+      </p:sp>
+    </p:spTree>
+  </p:cSld>
+  <p:clrMapOvr>
+    <a:masterClrMapping/>
+  </p:clrMapOvr>
+</p:sld>
+</file>
+
+<file path=ppt/slides/slide16.xml><?xml version="1.0" encoding="utf-8"?>
+<p:sld xmlns:a="http://schemas.openxmlformats.org/drawingml/2006/main" xmlns:p="http://schemas.openxmlformats.org/presentationml/2006/main" xmlns:r="http://schemas.openxmlformats.org/officeDocument/2006/relationships">
+  <p:cSld>
+    <p:spTree>
+      <p:nvGrpSpPr>
+        <p:cNvPr id="1" name=""/>
+        <p:cNvGrpSpPr/>
+        <p:nvPr/>
+      </p:nvGrpSpPr>
+      <p:grpSpPr/>
+      <p:sp>
+        <p:nvSpPr>
+          <p:cNvPr id="2" name="Title 1"/>
+          <p:cNvSpPr>
+            <a:spLocks noGrp="1"/>
+          </p:cNvSpPr>
+          <p:nvPr>
+            <p:ph type="title"/>
+          </p:nvPr>
+        </p:nvSpPr>
+        <p:spPr>
+          <a:xfrm>
+            <a:off x="731520" y="502920"/>
+          </a:xfrm>
+        </p:spPr>
+        <p:txBody>
+          <a:bodyPr/>
+          <a:lstStyle/>
+          <a:p/>
+        </p:txBody>
+      </p:sp>
+      <p:sp>
+        <p:nvSpPr>
+          <p:cNvPr id="3" name="TextBox 2"/>
+          <p:cNvSpPr txBox="1"/>
+          <p:nvPr/>
+        </p:nvSpPr>
+        <p:spPr>
+          <a:xfrm>
+            <a:off x="731520" y="2011680"/>
+            <a:ext cx="10698480" cy="1371600"/>
+          </a:xfrm>
+          <a:prstGeom prst="rect">
+            <a:avLst/>
+          </a:prstGeom>
+          <a:noFill/>
+        </p:spPr>
+        <p:txBody>
+          <a:bodyPr wrap="square">
+            <a:noAutofit/>
+          </a:bodyPr>
+          <a:lstStyle/>
+          <a:p>
+            <a:pPr algn="ctr"/>
+            <a:r>
+              <a:rPr sz="4000" b="1">
+                <a:solidFill>
+                  <a:srgbClr val="C7000B"/>
+                </a:solidFill>
+              </a:rPr>
+              <a:t>Processo de Abertura de SR</a:t>
+            </a:r>
+          </a:p>
+        </p:txBody>
+      </p:sp>
+      <p:sp>
+        <p:nvSpPr>
+          <p:cNvPr id="4" name="TextBox 3"/>
+          <p:cNvSpPr txBox="1"/>
+          <p:nvPr/>
+        </p:nvSpPr>
+        <p:spPr>
+          <a:xfrm>
+            <a:off x="731520" y="3474720"/>
+            <a:ext cx="10698480" cy="914400"/>
+          </a:xfrm>
+          <a:prstGeom prst="rect">
+            <a:avLst/>
+          </a:prstGeom>
+          <a:noFill/>
+        </p:spPr>
+        <p:txBody>
+          <a:bodyPr wrap="square">
+            <a:noAutofit/>
+          </a:bodyPr>
+          <a:lstStyle/>
+          <a:p>
+            <a:pPr algn="ctr"/>
+            <a:r>
+              <a:rPr sz="1800" b="0">
+                <a:solidFill>
+                  <a:srgbClr val="666666"/>
+                </a:solidFill>
+              </a:rPr>
+              <a:t>Do email do cliente ao fechamento</a:t>
+            </a:r>
+          </a:p>
+        </p:txBody>
+      </p:sp>
+    </p:spTree>
+  </p:cSld>
+  <p:clrMapOvr>
+    <a:masterClrMapping/>
+  </p:clrMapOvr>
+</p:sld>
+</file>
+
+<file path=ppt/slides/slide17.xml><?xml version="1.0" encoding="utf-8"?>
+<p:sld xmlns:a="http://schemas.openxmlformats.org/drawingml/2006/main" xmlns:p="http://schemas.openxmlformats.org/presentationml/2006/main" xmlns:r="http://schemas.openxmlformats.org/officeDocument/2006/relationships">
+  <p:cSld>
+    <p:spTree>
+      <p:nvGrpSpPr>
+        <p:cNvPr id="1" name=""/>
+        <p:cNvGrpSpPr/>
+        <p:nvPr/>
+      </p:nvGrpSpPr>
+      <p:grpSpPr/>
+      <p:sp>
+        <p:nvSpPr>
+          <p:cNvPr id="2" name="Title 1"/>
+          <p:cNvSpPr>
+            <a:spLocks noGrp="1"/>
+          </p:cNvSpPr>
+          <p:nvPr>
+            <p:ph type="title"/>
+          </p:nvPr>
+        </p:nvSpPr>
+        <p:spPr>
+          <a:xfrm>
+            <a:off x="731520" y="502920"/>
           </a:xfrm>
         </p:spPr>
         <p:txBody>
@@ -8633,7 +11690,7 @@
         <p:spPr>
           <a:xfrm>
             <a:off x="4114800" y="1645920"/>
-            <a:ext cx="3657600" cy="457200"/>
+            <a:ext cx="3657600" cy="411480"/>
           </a:xfrm>
           <a:prstGeom prst="roundRect">
             <a:avLst/>
@@ -8687,8 +11744,8 @@
         </p:nvSpPr>
         <p:spPr>
           <a:xfrm>
-            <a:off x="5829300" y="2331720"/>
-            <a:ext cx="228600" cy="228600"/>
+            <a:off x="5852160" y="2240280"/>
+            <a:ext cx="182880" cy="182880"/>
           </a:xfrm>
           <a:prstGeom prst="downArrow">
             <a:avLst/>
@@ -8730,8 +11787,8 @@
         </p:nvSpPr>
         <p:spPr>
           <a:xfrm>
-            <a:off x="4114800" y="2560320"/>
-            <a:ext cx="3657600" cy="457200"/>
+            <a:off x="4114800" y="2423160"/>
+            <a:ext cx="3657600" cy="411480"/>
           </a:xfrm>
           <a:prstGeom prst="roundRect">
             <a:avLst/>
@@ -8785,8 +11842,8 @@
         </p:nvSpPr>
         <p:spPr>
           <a:xfrm>
-            <a:off x="5829300" y="3246120"/>
-            <a:ext cx="228600" cy="228600"/>
+            <a:off x="5852160" y="3017520"/>
+            <a:ext cx="182880" cy="182880"/>
           </a:xfrm>
           <a:prstGeom prst="downArrow">
             <a:avLst/>
@@ -8828,8 +11885,8 @@
         </p:nvSpPr>
         <p:spPr>
           <a:xfrm>
-            <a:off x="4114800" y="3474720"/>
-            <a:ext cx="3657600" cy="457200"/>
+            <a:off x="4114800" y="3200400"/>
+            <a:ext cx="3657600" cy="411480"/>
           </a:xfrm>
           <a:prstGeom prst="roundRect">
             <a:avLst/>
@@ -8883,8 +11940,8 @@
         </p:nvSpPr>
         <p:spPr>
           <a:xfrm>
-            <a:off x="5829300" y="4160520"/>
-            <a:ext cx="228600" cy="228600"/>
+            <a:off x="5852160" y="3794760"/>
+            <a:ext cx="182880" cy="182880"/>
           </a:xfrm>
           <a:prstGeom prst="downArrow">
             <a:avLst/>
@@ -8926,8 +11983,8 @@
         </p:nvSpPr>
         <p:spPr>
           <a:xfrm>
-            <a:off x="4114800" y="4389120"/>
-            <a:ext cx="3657600" cy="457200"/>
+            <a:off x="4114800" y="3977640"/>
+            <a:ext cx="3657600" cy="411480"/>
           </a:xfrm>
           <a:prstGeom prst="roundRect">
             <a:avLst/>
@@ -8981,8 +12038,8 @@
         </p:nvSpPr>
         <p:spPr>
           <a:xfrm>
-            <a:off x="5829300" y="5074920"/>
-            <a:ext cx="228600" cy="228600"/>
+            <a:off x="5852160" y="4572000"/>
+            <a:ext cx="182880" cy="182880"/>
           </a:xfrm>
           <a:prstGeom prst="downArrow">
             <a:avLst/>
@@ -9024,8 +12081,8 @@
         </p:nvSpPr>
         <p:spPr>
           <a:xfrm>
-            <a:off x="4114800" y="5303520"/>
-            <a:ext cx="3657600" cy="457200"/>
+            <a:off x="4114800" y="4754880"/>
+            <a:ext cx="3657600" cy="411480"/>
           </a:xfrm>
           <a:prstGeom prst="roundRect">
             <a:avLst/>
@@ -9079,8 +12136,8 @@
         </p:nvSpPr>
         <p:spPr>
           <a:xfrm>
-            <a:off x="5829300" y="5989320"/>
-            <a:ext cx="228600" cy="228600"/>
+            <a:off x="5852160" y="5349240"/>
+            <a:ext cx="182880" cy="182880"/>
           </a:xfrm>
           <a:prstGeom prst="downArrow">
             <a:avLst/>
@@ -9122,8 +12179,8 @@
         </p:nvSpPr>
         <p:spPr>
           <a:xfrm>
-            <a:off x="4114800" y="6217920"/>
-            <a:ext cx="3657600" cy="457200"/>
+            <a:off x="4114800" y="5532120"/>
+            <a:ext cx="3657600" cy="411480"/>
           </a:xfrm>
           <a:prstGeom prst="roundRect">
             <a:avLst/>
@@ -9177,7 +12234,7 @@
 </p:sld>
 </file>
 
-<file path=ppt/slides/slide12.xml><?xml version="1.0" encoding="utf-8"?>
+<file path=ppt/slides/slide18.xml><?xml version="1.0" encoding="utf-8"?>
 <p:sld xmlns:a="http://schemas.openxmlformats.org/drawingml/2006/main" xmlns:p="http://schemas.openxmlformats.org/presentationml/2006/main" xmlns:r="http://schemas.openxmlformats.org/officeDocument/2006/relationships">
   <p:cSld>
     <p:spTree>
@@ -9199,7 +12256,7 @@
         </p:nvSpPr>
         <p:spPr>
           <a:xfrm>
-            <a:off x="0" y="320040"/>
+            <a:off x="731520" y="502920"/>
           </a:xfrm>
         </p:spPr>
         <p:txBody>
@@ -9438,7 +12495,7 @@
 </p:sld>
 </file>
 
-<file path=ppt/slides/slide13.xml><?xml version="1.0" encoding="utf-8"?>
+<file path=ppt/slides/slide19.xml><?xml version="1.0" encoding="utf-8"?>
 <p:sld xmlns:a="http://schemas.openxmlformats.org/drawingml/2006/main" xmlns:p="http://schemas.openxmlformats.org/presentationml/2006/main" xmlns:r="http://schemas.openxmlformats.org/officeDocument/2006/relationships">
   <p:cSld>
     <p:spTree>
@@ -9460,7 +12517,7 @@
         </p:nvSpPr>
         <p:spPr>
           <a:xfrm>
-            <a:off x="0" y="320040"/>
+            <a:off x="731520" y="502920"/>
           </a:xfrm>
         </p:spPr>
         <p:txBody>
@@ -9714,7 +12771,7 @@
 </p:sld>
 </file>
 
-<file path=ppt/slides/slide14.xml><?xml version="1.0" encoding="utf-8"?>
+<file path=ppt/slides/slide2.xml><?xml version="1.0" encoding="utf-8"?>
 <p:sld xmlns:a="http://schemas.openxmlformats.org/drawingml/2006/main" xmlns:p="http://schemas.openxmlformats.org/presentationml/2006/main" xmlns:r="http://schemas.openxmlformats.org/officeDocument/2006/relationships">
   <p:cSld>
     <p:spTree>
@@ -9736,7 +12793,194 @@
         </p:nvSpPr>
         <p:spPr>
           <a:xfrm>
-            <a:off x="0" y="320040"/>
+            <a:off x="731520" y="502920"/>
+          </a:xfrm>
+        </p:spPr>
+        <p:txBody>
+          <a:bodyPr/>
+          <a:lstStyle/>
+          <a:p>
+            <a:r>
+              <a:rPr sz="2400" b="1">
+                <a:solidFill>
+                  <a:srgbClr val="C7000B"/>
+                </a:solidFill>
+              </a:rPr>
+              <a:t>Agenda do Treinamento</a:t>
+            </a:r>
+          </a:p>
+        </p:txBody>
+      </p:sp>
+      <p:sp>
+        <p:nvSpPr>
+          <p:cNvPr id="3" name="TextBox 2"/>
+          <p:cNvSpPr txBox="1"/>
+          <p:nvPr/>
+        </p:nvSpPr>
+        <p:spPr>
+          <a:xfrm>
+            <a:off x="731520" y="1554480"/>
+            <a:ext cx="10698480" cy="4114800"/>
+          </a:xfrm>
+          <a:prstGeom prst="rect">
+            <a:avLst/>
+          </a:prstGeom>
+          <a:noFill/>
+        </p:spPr>
+        <p:txBody>
+          <a:bodyPr wrap="square">
+            <a:noAutofit/>
+          </a:bodyPr>
+          <a:lstStyle/>
+          <a:p>
+            <a:pPr algn="l"/>
+            <a:r>
+              <a:rPr sz="1600" b="0">
+                <a:solidFill>
+                  <a:srgbClr val="1F2328"/>
+                </a:solidFill>
+              </a:rPr>
+              <a:t>1. Arquitetura HCS 8.6.1</a:t>
+            </a:r>
+          </a:p>
+          <a:p>
+            <a:pPr algn="l">
+              <a:spcBef>
+                <a:spcPts val="400"/>
+              </a:spcBef>
+            </a:pPr>
+            <a:r>
+              <a:rPr sz="1600" b="0">
+                <a:solidFill>
+                  <a:srgbClr val="1F2328"/>
+                </a:solidFill>
+              </a:rPr>
+              <a:t>2. Famílias de Serviços e Acronimos</a:t>
+            </a:r>
+          </a:p>
+          <a:p>
+            <a:pPr algn="l">
+              <a:spcBef>
+                <a:spcPts val="400"/>
+              </a:spcBef>
+            </a:pPr>
+            <a:r>
+              <a:rPr sz="1600" b="0">
+                <a:solidFill>
+                  <a:srgbClr val="1F2328"/>
+                </a:solidFill>
+              </a:rPr>
+              <a:t>3. Processo de Abertura de SR</a:t>
+            </a:r>
+          </a:p>
+          <a:p>
+            <a:pPr algn="l">
+              <a:spcBef>
+                <a:spcPts val="400"/>
+              </a:spcBef>
+            </a:pPr>
+            <a:r>
+              <a:rPr sz="1600" b="0">
+                <a:solidFill>
+                  <a:srgbClr val="1F2328"/>
+                </a:solidFill>
+              </a:rPr>
+              <a:t>4. Notificação ao TAC e Template de SR</a:t>
+            </a:r>
+          </a:p>
+          <a:p>
+            <a:pPr algn="l">
+              <a:spcBef>
+                <a:spcPts val="400"/>
+              </a:spcBef>
+            </a:pPr>
+            <a:r>
+              <a:rPr sz="1600" b="0">
+                <a:solidFill>
+                  <a:srgbClr val="1F2328"/>
+                </a:solidFill>
+              </a:rPr>
+              <a:t>5. Processo ITR (Issue To Resolve)</a:t>
+            </a:r>
+          </a:p>
+          <a:p>
+            <a:pPr algn="l">
+              <a:spcBef>
+                <a:spcPts val="400"/>
+              </a:spcBef>
+            </a:pPr>
+            <a:r>
+              <a:rPr sz="1600" b="0">
+                <a:solidFill>
+                  <a:srgbClr val="1F2328"/>
+                </a:solidFill>
+              </a:rPr>
+              <a:t>6. Matriz de Escalação</a:t>
+            </a:r>
+          </a:p>
+          <a:p>
+            <a:pPr algn="l">
+              <a:spcBef>
+                <a:spcPts val="400"/>
+              </a:spcBef>
+            </a:pPr>
+            <a:r>
+              <a:rPr sz="1600" b="0">
+                <a:solidFill>
+                  <a:srgbClr val="1F2328"/>
+                </a:solidFill>
+              </a:rPr>
+              <a:t>7. Operações Comuns de O&amp;M</a:t>
+            </a:r>
+          </a:p>
+          <a:p>
+            <a:pPr algn="l">
+              <a:spcBef>
+                <a:spcPts val="400"/>
+              </a:spcBef>
+            </a:pPr>
+            <a:r>
+              <a:rPr sz="1600" b="0">
+                <a:solidFill>
+                  <a:srgbClr val="1F2328"/>
+                </a:solidFill>
+              </a:rPr>
+              <a:t>8. Melhores Práticas e Checklist</a:t>
+            </a:r>
+          </a:p>
+        </p:txBody>
+      </p:sp>
+    </p:spTree>
+  </p:cSld>
+  <p:clrMapOvr>
+    <a:masterClrMapping/>
+  </p:clrMapOvr>
+</p:sld>
+</file>
+
+<file path=ppt/slides/slide20.xml><?xml version="1.0" encoding="utf-8"?>
+<p:sld xmlns:a="http://schemas.openxmlformats.org/drawingml/2006/main" xmlns:p="http://schemas.openxmlformats.org/presentationml/2006/main" xmlns:r="http://schemas.openxmlformats.org/officeDocument/2006/relationships">
+  <p:cSld>
+    <p:spTree>
+      <p:nvGrpSpPr>
+        <p:cNvPr id="1" name=""/>
+        <p:cNvGrpSpPr/>
+        <p:nvPr/>
+      </p:nvGrpSpPr>
+      <p:grpSpPr/>
+      <p:sp>
+        <p:nvSpPr>
+          <p:cNvPr id="2" name="Title 1"/>
+          <p:cNvSpPr>
+            <a:spLocks noGrp="1"/>
+          </p:cNvSpPr>
+          <p:nvPr>
+            <p:ph type="title"/>
+          </p:nvPr>
+        </p:nvSpPr>
+        <p:spPr>
+          <a:xfrm>
+            <a:off x="731520" y="502920"/>
           </a:xfrm>
         </p:spPr>
         <p:txBody>
@@ -9821,7 +13065,7 @@
 </p:sld>
 </file>
 
-<file path=ppt/slides/slide15.xml><?xml version="1.0" encoding="utf-8"?>
+<file path=ppt/slides/slide21.xml><?xml version="1.0" encoding="utf-8"?>
 <p:sld xmlns:a="http://schemas.openxmlformats.org/drawingml/2006/main" xmlns:p="http://schemas.openxmlformats.org/presentationml/2006/main" xmlns:r="http://schemas.openxmlformats.org/officeDocument/2006/relationships">
   <p:cSld>
     <p:spTree>
@@ -9843,7 +13087,7 @@
         </p:nvSpPr>
         <p:spPr>
           <a:xfrm>
-            <a:off x="0" y="320040"/>
+            <a:off x="731520" y="502920"/>
           </a:xfrm>
         </p:spPr>
         <p:txBody>
@@ -10567,7 +13811,7 @@
 </p:sld>
 </file>
 
-<file path=ppt/slides/slide16.xml><?xml version="1.0" encoding="utf-8"?>
+<file path=ppt/slides/slide22.xml><?xml version="1.0" encoding="utf-8"?>
 <p:sld xmlns:a="http://schemas.openxmlformats.org/drawingml/2006/main" xmlns:p="http://schemas.openxmlformats.org/presentationml/2006/main" xmlns:r="http://schemas.openxmlformats.org/officeDocument/2006/relationships">
   <p:cSld>
     <p:spTree>
@@ -10589,7 +13833,7 @@
         </p:nvSpPr>
         <p:spPr>
           <a:xfrm>
-            <a:off x="0" y="320040"/>
+            <a:off x="731520" y="502920"/>
           </a:xfrm>
         </p:spPr>
         <p:txBody>
@@ -10617,7 +13861,7 @@
         </p:nvGraphicFramePr>
         <p:xfrm>
           <a:off x="731521" y="1737360"/>
-          <a:ext cx="10698478" cy="2011680"/>
+          <a:ext cx="10698478" cy="1801368"/>
         </p:xfrm>
         <a:graphic>
           <a:graphicData uri="http://schemas.openxmlformats.org/drawingml/2006/table">
@@ -10631,7 +13875,7 @@
                 <a:gridCol w="1528354"/>
                 <a:gridCol w="4754879"/>
               </a:tblGrid>
-              <a:tr h="402336">
+              <a:tr h="411480">
                 <a:tc>
                   <a:txBody>
                     <a:bodyPr/>
@@ -10648,7 +13892,7 @@
                       </a:r>
                     </a:p>
                   </a:txBody>
-                  <a:tcPr marL="109728" marR="109728" marT="73152" marB="73152" anchor="ctr">
+                  <a:tcPr marL="109728" marR="109728" marT="36576" marB="36576" anchor="ctr">
                     <a:solidFill>
                       <a:srgbClr val="C7000B"/>
                     </a:solidFill>
@@ -10670,7 +13914,7 @@
                       </a:r>
                     </a:p>
                   </a:txBody>
-                  <a:tcPr marL="109728" marR="109728" marT="73152" marB="73152" anchor="ctr">
+                  <a:tcPr marL="109728" marR="109728" marT="36576" marB="36576" anchor="ctr">
                     <a:solidFill>
                       <a:srgbClr val="C7000B"/>
                     </a:solidFill>
@@ -10692,7 +13936,7 @@
                       </a:r>
                     </a:p>
                   </a:txBody>
-                  <a:tcPr marL="109728" marR="109728" marT="73152" marB="73152" anchor="ctr">
+                  <a:tcPr marL="109728" marR="109728" marT="36576" marB="36576" anchor="ctr">
                     <a:solidFill>
                       <a:srgbClr val="C7000B"/>
                     </a:solidFill>
@@ -10714,14 +13958,14 @@
                       </a:r>
                     </a:p>
                   </a:txBody>
-                  <a:tcPr marL="109728" marR="109728" marT="73152" marB="73152" anchor="ctr">
+                  <a:tcPr marL="109728" marR="109728" marT="36576" marB="36576" anchor="ctr">
                     <a:solidFill>
                       <a:srgbClr val="C7000B"/>
                     </a:solidFill>
                   </a:tcPr>
                 </a:tc>
               </a:tr>
-              <a:tr h="402336">
+              <a:tr h="347472">
                 <a:tc>
                   <a:txBody>
                     <a:bodyPr/>
@@ -10737,7 +13981,7 @@
                       </a:r>
                     </a:p>
                   </a:txBody>
-                  <a:tcPr marL="109728" marR="109728" marT="54864" marB="54864" anchor="ctr">
+                  <a:tcPr marL="109728" marR="109728" marT="27432" marB="27432" anchor="ctr">
                     <a:solidFill>
                       <a:srgbClr val="F6F8FA"/>
                     </a:solidFill>
@@ -10758,7 +14002,7 @@
                       </a:r>
                     </a:p>
                   </a:txBody>
-                  <a:tcPr marL="109728" marR="109728" marT="54864" marB="54864" anchor="ctr">
+                  <a:tcPr marL="109728" marR="109728" marT="27432" marB="27432" anchor="ctr">
                     <a:solidFill>
                       <a:srgbClr val="F6F8FA"/>
                     </a:solidFill>
@@ -10779,7 +14023,7 @@
                       </a:r>
                     </a:p>
                   </a:txBody>
-                  <a:tcPr marL="109728" marR="109728" marT="54864" marB="54864" anchor="ctr">
+                  <a:tcPr marL="109728" marR="109728" marT="27432" marB="27432" anchor="ctr">
                     <a:solidFill>
                       <a:srgbClr val="F6F8FA"/>
                     </a:solidFill>
@@ -10800,14 +14044,14 @@
                       </a:r>
                     </a:p>
                   </a:txBody>
-                  <a:tcPr marL="109728" marR="109728" marT="54864" marB="54864" anchor="ctr">
+                  <a:tcPr marL="109728" marR="109728" marT="27432" marB="27432" anchor="ctr">
                     <a:solidFill>
                       <a:srgbClr val="F6F8FA"/>
                     </a:solidFill>
                   </a:tcPr>
                 </a:tc>
               </a:tr>
-              <a:tr h="402336">
+              <a:tr h="347472">
                 <a:tc>
                   <a:txBody>
                     <a:bodyPr/>
@@ -10823,7 +14067,7 @@
                       </a:r>
                     </a:p>
                   </a:txBody>
-                  <a:tcPr marL="109728" marR="109728" marT="54864" marB="54864" anchor="ctr">
+                  <a:tcPr marL="109728" marR="109728" marT="27432" marB="27432" anchor="ctr">
                     <a:solidFill>
                       <a:srgbClr val="FFFFFF"/>
                     </a:solidFill>
@@ -10844,7 +14088,7 @@
                       </a:r>
                     </a:p>
                   </a:txBody>
-                  <a:tcPr marL="109728" marR="109728" marT="54864" marB="54864" anchor="ctr">
+                  <a:tcPr marL="109728" marR="109728" marT="27432" marB="27432" anchor="ctr">
                     <a:solidFill>
                       <a:srgbClr val="FFFFFF"/>
                     </a:solidFill>
@@ -10865,7 +14109,7 @@
                       </a:r>
                     </a:p>
                   </a:txBody>
-                  <a:tcPr marL="109728" marR="109728" marT="54864" marB="54864" anchor="ctr">
+                  <a:tcPr marL="109728" marR="109728" marT="27432" marB="27432" anchor="ctr">
                     <a:solidFill>
                       <a:srgbClr val="FFFFFF"/>
                     </a:solidFill>
@@ -10886,14 +14130,14 @@
                       </a:r>
                     </a:p>
                   </a:txBody>
-                  <a:tcPr marL="109728" marR="109728" marT="54864" marB="54864" anchor="ctr">
+                  <a:tcPr marL="109728" marR="109728" marT="27432" marB="27432" anchor="ctr">
                     <a:solidFill>
                       <a:srgbClr val="FFFFFF"/>
                     </a:solidFill>
                   </a:tcPr>
                 </a:tc>
               </a:tr>
-              <a:tr h="402336">
+              <a:tr h="347472">
                 <a:tc>
                   <a:txBody>
                     <a:bodyPr/>
@@ -10909,7 +14153,7 @@
                       </a:r>
                     </a:p>
                   </a:txBody>
-                  <a:tcPr marL="109728" marR="109728" marT="54864" marB="54864" anchor="ctr">
+                  <a:tcPr marL="109728" marR="109728" marT="27432" marB="27432" anchor="ctr">
                     <a:solidFill>
                       <a:srgbClr val="F6F8FA"/>
                     </a:solidFill>
@@ -10930,7 +14174,7 @@
                       </a:r>
                     </a:p>
                   </a:txBody>
-                  <a:tcPr marL="109728" marR="109728" marT="54864" marB="54864" anchor="ctr">
+                  <a:tcPr marL="109728" marR="109728" marT="27432" marB="27432" anchor="ctr">
                     <a:solidFill>
                       <a:srgbClr val="F6F8FA"/>
                     </a:solidFill>
@@ -10951,7 +14195,7 @@
                       </a:r>
                     </a:p>
                   </a:txBody>
-                  <a:tcPr marL="109728" marR="109728" marT="54864" marB="54864" anchor="ctr">
+                  <a:tcPr marL="109728" marR="109728" marT="27432" marB="27432" anchor="ctr">
                     <a:solidFill>
                       <a:srgbClr val="F6F8FA"/>
                     </a:solidFill>
@@ -10972,14 +14216,14 @@
                       </a:r>
                     </a:p>
                   </a:txBody>
-                  <a:tcPr marL="109728" marR="109728" marT="54864" marB="54864" anchor="ctr">
+                  <a:tcPr marL="109728" marR="109728" marT="27432" marB="27432" anchor="ctr">
                     <a:solidFill>
                       <a:srgbClr val="F6F8FA"/>
                     </a:solidFill>
                   </a:tcPr>
                 </a:tc>
               </a:tr>
-              <a:tr h="402336">
+              <a:tr h="347472">
                 <a:tc>
                   <a:txBody>
                     <a:bodyPr/>
@@ -10995,7 +14239,7 @@
                       </a:r>
                     </a:p>
                   </a:txBody>
-                  <a:tcPr marL="109728" marR="109728" marT="54864" marB="54864" anchor="ctr">
+                  <a:tcPr marL="109728" marR="109728" marT="27432" marB="27432" anchor="ctr">
                     <a:solidFill>
                       <a:srgbClr val="FFFFFF"/>
                     </a:solidFill>
@@ -11016,7 +14260,7 @@
                       </a:r>
                     </a:p>
                   </a:txBody>
-                  <a:tcPr marL="109728" marR="109728" marT="54864" marB="54864" anchor="ctr">
+                  <a:tcPr marL="109728" marR="109728" marT="27432" marB="27432" anchor="ctr">
                     <a:solidFill>
                       <a:srgbClr val="FFFFFF"/>
                     </a:solidFill>
@@ -11037,7 +14281,7 @@
                       </a:r>
                     </a:p>
                   </a:txBody>
-                  <a:tcPr marL="109728" marR="109728" marT="54864" marB="54864" anchor="ctr">
+                  <a:tcPr marL="109728" marR="109728" marT="27432" marB="27432" anchor="ctr">
                     <a:solidFill>
                       <a:srgbClr val="FFFFFF"/>
                     </a:solidFill>
@@ -11058,7 +14302,7 @@
                       </a:r>
                     </a:p>
                   </a:txBody>
-                  <a:tcPr marL="109728" marR="109728" marT="54864" marB="54864" anchor="ctr">
+                  <a:tcPr marL="109728" marR="109728" marT="27432" marB="27432" anchor="ctr">
                     <a:solidFill>
                       <a:srgbClr val="FFFFFF"/>
                     </a:solidFill>
@@ -11109,1702 +14353,6 @@
                 </a:solidFill>
               </a:rPr>
               <a:t>S1 (crítico): escalar imediatamente para L2 ao abrir o SR.</a:t>
-            </a:r>
-          </a:p>
-        </p:txBody>
-      </p:sp>
-    </p:spTree>
-  </p:cSld>
-  <p:clrMapOvr>
-    <a:masterClrMapping/>
-  </p:clrMapOvr>
-</p:sld>
-</file>
-
-<file path=ppt/slides/slide17.xml><?xml version="1.0" encoding="utf-8"?>
-<p:sld xmlns:a="http://schemas.openxmlformats.org/drawingml/2006/main" xmlns:p="http://schemas.openxmlformats.org/presentationml/2006/main" xmlns:r="http://schemas.openxmlformats.org/officeDocument/2006/relationships">
-  <p:cSld>
-    <p:spTree>
-      <p:nvGrpSpPr>
-        <p:cNvPr id="1" name=""/>
-        <p:cNvGrpSpPr/>
-        <p:nvPr/>
-      </p:nvGrpSpPr>
-      <p:grpSpPr/>
-      <p:sp>
-        <p:nvSpPr>
-          <p:cNvPr id="2" name="Title 1"/>
-          <p:cNvSpPr>
-            <a:spLocks noGrp="1"/>
-          </p:cNvSpPr>
-          <p:nvPr>
-            <p:ph type="title"/>
-          </p:nvPr>
-        </p:nvSpPr>
-        <p:spPr>
-          <a:xfrm>
-            <a:off x="0" y="320040"/>
-          </a:xfrm>
-        </p:spPr>
-        <p:txBody>
-          <a:bodyPr/>
-          <a:lstStyle/>
-          <a:p/>
-        </p:txBody>
-      </p:sp>
-      <p:sp>
-        <p:nvSpPr>
-          <p:cNvPr id="3" name="TextBox 2"/>
-          <p:cNvSpPr txBox="1"/>
-          <p:nvPr/>
-        </p:nvSpPr>
-        <p:spPr>
-          <a:xfrm>
-            <a:off x="731520" y="2011680"/>
-            <a:ext cx="10698480" cy="1371600"/>
-          </a:xfrm>
-          <a:prstGeom prst="rect">
-            <a:avLst/>
-          </a:prstGeom>
-          <a:noFill/>
-        </p:spPr>
-        <p:txBody>
-          <a:bodyPr wrap="square">
-            <a:noAutofit/>
-          </a:bodyPr>
-          <a:lstStyle/>
-          <a:p>
-            <a:pPr algn="ctr"/>
-            <a:r>
-              <a:rPr sz="4000" b="1">
-                <a:solidFill>
-                  <a:srgbClr val="C7000B"/>
-                </a:solidFill>
-              </a:rPr>
-              <a:t>Operações Comuns de O&amp;M</a:t>
-            </a:r>
-          </a:p>
-        </p:txBody>
-      </p:sp>
-      <p:sp>
-        <p:nvSpPr>
-          <p:cNvPr id="4" name="TextBox 3"/>
-          <p:cNvSpPr txBox="1"/>
-          <p:nvPr/>
-        </p:nvSpPr>
-        <p:spPr>
-          <a:xfrm>
-            <a:off x="731520" y="3474720"/>
-            <a:ext cx="10698480" cy="914400"/>
-          </a:xfrm>
-          <a:prstGeom prst="rect">
-            <a:avLst/>
-          </a:prstGeom>
-          <a:noFill/>
-        </p:spPr>
-        <p:txBody>
-          <a:bodyPr wrap="square">
-            <a:noAutofit/>
-          </a:bodyPr>
-          <a:lstStyle/>
-          <a:p>
-            <a:pPr algn="ctr"/>
-            <a:r>
-              <a:rPr sz="1800" b="0">
-                <a:solidFill>
-                  <a:srgbClr val="666666"/>
-                </a:solidFill>
-              </a:rPr>
-              <a:t>Monitoramento, problemas e soluções</a:t>
-            </a:r>
-          </a:p>
-        </p:txBody>
-      </p:sp>
-    </p:spTree>
-  </p:cSld>
-  <p:clrMapOvr>
-    <a:masterClrMapping/>
-  </p:clrMapOvr>
-</p:sld>
-</file>
-
-<file path=ppt/slides/slide18.xml><?xml version="1.0" encoding="utf-8"?>
-<p:sld xmlns:a="http://schemas.openxmlformats.org/drawingml/2006/main" xmlns:p="http://schemas.openxmlformats.org/presentationml/2006/main" xmlns:r="http://schemas.openxmlformats.org/officeDocument/2006/relationships">
-  <p:cSld>
-    <p:spTree>
-      <p:nvGrpSpPr>
-        <p:cNvPr id="1" name=""/>
-        <p:cNvGrpSpPr/>
-        <p:nvPr/>
-      </p:nvGrpSpPr>
-      <p:grpSpPr/>
-      <p:sp>
-        <p:nvSpPr>
-          <p:cNvPr id="2" name="Title 1"/>
-          <p:cNvSpPr>
-            <a:spLocks noGrp="1"/>
-          </p:cNvSpPr>
-          <p:nvPr>
-            <p:ph type="title"/>
-          </p:nvPr>
-        </p:nvSpPr>
-        <p:spPr>
-          <a:xfrm>
-            <a:off x="0" y="320040"/>
-          </a:xfrm>
-        </p:spPr>
-        <p:txBody>
-          <a:bodyPr/>
-          <a:lstStyle/>
-          <a:p>
-            <a:r>
-              <a:rPr sz="2400" b="1">
-                <a:solidFill>
-                  <a:srgbClr val="C7000B"/>
-                </a:solidFill>
-              </a:rPr>
-              <a:t>Monitoramento e Alertas</a:t>
-            </a:r>
-          </a:p>
-        </p:txBody>
-      </p:sp>
-      <p:sp>
-        <p:nvSpPr>
-          <p:cNvPr id="3" name="TextBox 2"/>
-          <p:cNvSpPr txBox="1"/>
-          <p:nvPr/>
-        </p:nvSpPr>
-        <p:spPr>
-          <a:xfrm>
-            <a:off x="731520" y="1554480"/>
-            <a:ext cx="10698480" cy="4114800"/>
-          </a:xfrm>
-          <a:prstGeom prst="rect">
-            <a:avLst/>
-          </a:prstGeom>
-          <a:noFill/>
-        </p:spPr>
-        <p:txBody>
-          <a:bodyPr wrap="square">
-            <a:noAutofit/>
-          </a:bodyPr>
-          <a:lstStyle/>
-          <a:p>
-            <a:pPr algn="l"/>
-            <a:r>
-              <a:rPr sz="1300" b="0">
-                <a:solidFill>
-                  <a:srgbClr val="1F2328"/>
-                </a:solidFill>
-              </a:rPr>
-              <a:t>Ferramentas de monitoramento HCS:</a:t>
-            </a:r>
-          </a:p>
-          <a:p>
-            <a:pPr algn="l">
-              <a:spcBef>
-                <a:spcPts val="400"/>
-              </a:spcBef>
-            </a:pPr>
-            <a:r>
-              <a:rPr sz="1300" b="0">
-                <a:solidFill>
-                  <a:srgbClr val="1F2328"/>
-                </a:solidFill>
-              </a:rPr>
-              <a:t/>
-            </a:r>
-          </a:p>
-          <a:p>
-            <a:pPr algn="l">
-              <a:spcBef>
-                <a:spcPts val="400"/>
-              </a:spcBef>
-            </a:pPr>
-            <a:r>
-              <a:rPr sz="1300" b="0">
-                <a:solidFill>
-                  <a:srgbClr val="1F2328"/>
-                </a:solidFill>
-              </a:rPr>
-              <a:t>  • ManageOne Operation — dashboards de saúde</a:t>
-            </a:r>
-          </a:p>
-          <a:p>
-            <a:pPr algn="l">
-              <a:spcBef>
-                <a:spcPts val="400"/>
-              </a:spcBef>
-            </a:pPr>
-            <a:r>
-              <a:rPr sz="1300" b="0">
-                <a:solidFill>
-                  <a:srgbClr val="1F2328"/>
-                </a:solidFill>
-              </a:rPr>
-              <a:t>  • AOM (Application Operations Management) — métricas de app</a:t>
-            </a:r>
-          </a:p>
-          <a:p>
-            <a:pPr algn="l">
-              <a:spcBef>
-                <a:spcPts val="400"/>
-              </a:spcBef>
-            </a:pPr>
-            <a:r>
-              <a:rPr sz="1300" b="0">
-                <a:solidFill>
-                  <a:srgbClr val="1F2328"/>
-                </a:solidFill>
-              </a:rPr>
-              <a:t>  • APM (Application Performance Monitoring) — traces</a:t>
-            </a:r>
-          </a:p>
-          <a:p>
-            <a:pPr algn="l">
-              <a:spcBef>
-                <a:spcPts val="400"/>
-              </a:spcBef>
-            </a:pPr>
-            <a:r>
-              <a:rPr sz="1300" b="0">
-                <a:solidFill>
-                  <a:srgbClr val="1F2328"/>
-                </a:solidFill>
-              </a:rPr>
-              <a:t>  • CloudEye — monitoramento de infra</a:t>
-            </a:r>
-          </a:p>
-          <a:p>
-            <a:pPr algn="l">
-              <a:spcBef>
-                <a:spcPts val="400"/>
-              </a:spcBef>
-            </a:pPr>
-            <a:r>
-              <a:rPr sz="1300" b="0">
-                <a:solidFill>
-                  <a:srgbClr val="1F2328"/>
-                </a:solidFill>
-              </a:rPr>
-              <a:t/>
-            </a:r>
-          </a:p>
-          <a:p>
-            <a:pPr algn="l">
-              <a:spcBef>
-                <a:spcPts val="400"/>
-              </a:spcBef>
-            </a:pPr>
-            <a:r>
-              <a:rPr sz="1300" b="0">
-                <a:solidFill>
-                  <a:srgbClr val="1F2328"/>
-                </a:solidFill>
-              </a:rPr>
-              <a:t>Alertass comuns:</a:t>
-            </a:r>
-          </a:p>
-          <a:p>
-            <a:pPr algn="l">
-              <a:spcBef>
-                <a:spcPts val="400"/>
-              </a:spcBef>
-            </a:pPr>
-            <a:r>
-              <a:rPr sz="1300" b="0">
-                <a:solidFill>
-                  <a:srgbClr val="1F2328"/>
-                </a:solidFill>
-              </a:rPr>
-              <a:t>  • CPU &gt; 80% por 5 min → verificar cargas</a:t>
-            </a:r>
-          </a:p>
-          <a:p>
-            <a:pPr algn="l">
-              <a:spcBef>
-                <a:spcPts val="400"/>
-              </a:spcBef>
-            </a:pPr>
-            <a:r>
-              <a:rPr sz="1300" b="0">
-                <a:solidFill>
-                  <a:srgbClr val="1F2328"/>
-                </a:solidFill>
-              </a:rPr>
-              <a:t>  • Disco &gt; 90% → verificar logs e snapshots</a:t>
-            </a:r>
-          </a:p>
-          <a:p>
-            <a:pPr algn="l">
-              <a:spcBef>
-                <a:spcPts val="400"/>
-              </a:spcBef>
-            </a:pPr>
-            <a:r>
-              <a:rPr sz="1300" b="0">
-                <a:solidFill>
-                  <a:srgbClr val="1F2328"/>
-                </a:solidFill>
-              </a:rPr>
-              <a:t>  • Memória &gt; 85% → verificar vazamentos</a:t>
-            </a:r>
-          </a:p>
-          <a:p>
-            <a:pPr algn="l">
-              <a:spcBef>
-                <a:spcPts val="400"/>
-              </a:spcBef>
-            </a:pPr>
-            <a:r>
-              <a:rPr sz="1300" b="0">
-                <a:solidFill>
-                  <a:srgbClr val="1F2328"/>
-                </a:solidFill>
-              </a:rPr>
-              <a:t>  • Latência de rede &gt; 100ms → verificar VPC/ELB</a:t>
-            </a:r>
-          </a:p>
-        </p:txBody>
-      </p:sp>
-    </p:spTree>
-  </p:cSld>
-  <p:clrMapOvr>
-    <a:masterClrMapping/>
-  </p:clrMapOvr>
-</p:sld>
-</file>
-
-<file path=ppt/slides/slide19.xml><?xml version="1.0" encoding="utf-8"?>
-<p:sld xmlns:a="http://schemas.openxmlformats.org/drawingml/2006/main" xmlns:p="http://schemas.openxmlformats.org/presentationml/2006/main" xmlns:r="http://schemas.openxmlformats.org/officeDocument/2006/relationships">
-  <p:cSld>
-    <p:spTree>
-      <p:nvGrpSpPr>
-        <p:cNvPr id="1" name=""/>
-        <p:cNvGrpSpPr/>
-        <p:nvPr/>
-      </p:nvGrpSpPr>
-      <p:grpSpPr/>
-      <p:sp>
-        <p:nvSpPr>
-          <p:cNvPr id="2" name="Title 1"/>
-          <p:cNvSpPr>
-            <a:spLocks noGrp="1"/>
-          </p:cNvSpPr>
-          <p:nvPr>
-            <p:ph type="title"/>
-          </p:nvPr>
-        </p:nvSpPr>
-        <p:spPr>
-          <a:xfrm>
-            <a:off x="0" y="320040"/>
-          </a:xfrm>
-        </p:spPr>
-        <p:txBody>
-          <a:bodyPr/>
-          <a:lstStyle/>
-          <a:p>
-            <a:r>
-              <a:rPr sz="2400" b="1">
-                <a:solidFill>
-                  <a:srgbClr val="C7000B"/>
-                </a:solidFill>
-              </a:rPr>
-              <a:t>Problemas Comuns e Soluções Rápidas</a:t>
-            </a:r>
-          </a:p>
-        </p:txBody>
-      </p:sp>
-      <p:graphicFrame>
-        <p:nvGraphicFramePr>
-          <p:cNvPr id="3" name="Table 2"/>
-          <p:cNvGraphicFramePr>
-            <a:graphicFrameLocks noGrp="1"/>
-          </p:cNvGraphicFramePr>
-          <p:nvPr/>
-        </p:nvGraphicFramePr>
-        <p:xfrm>
-          <a:off x="731520" y="1737360"/>
-          <a:ext cx="10698480" cy="2743200"/>
-        </p:xfrm>
-        <a:graphic>
-          <a:graphicData uri="http://schemas.openxmlformats.org/drawingml/2006/table">
-            <a:tbl>
-              <a:tblPr firstRow="1" bandRow="1">
-                <a:tableStyleId>{5C22544A-7EE6-4342-B048-85BDC9FD1C3A}</a:tableStyleId>
-              </a:tblPr>
-              <a:tblGrid>
-                <a:gridCol w="2674620"/>
-                <a:gridCol w="2674620"/>
-                <a:gridCol w="5349240"/>
-              </a:tblGrid>
-              <a:tr h="391885">
-                <a:tc>
-                  <a:txBody>
-                    <a:bodyPr/>
-                    <a:lstStyle/>
-                    <a:p>
-                      <a:pPr algn="ctr"/>
-                      <a:r>
-                        <a:rPr sz="1300" b="1">
-                          <a:solidFill>
-                            <a:srgbClr val="FFFFFF"/>
-                          </a:solidFill>
-                        </a:rPr>
-                        <a:t>Problema</a:t>
-                      </a:r>
-                    </a:p>
-                  </a:txBody>
-                  <a:tcPr marL="109728" marR="109728" marT="73152" marB="73152" anchor="ctr">
-                    <a:solidFill>
-                      <a:srgbClr val="C7000B"/>
-                    </a:solidFill>
-                  </a:tcPr>
-                </a:tc>
-                <a:tc>
-                  <a:txBody>
-                    <a:bodyPr/>
-                    <a:lstStyle/>
-                    <a:p>
-                      <a:pPr algn="ctr"/>
-                      <a:r>
-                        <a:rPr sz="1300" b="1">
-                          <a:solidFill>
-                            <a:srgbClr val="FFFFFF"/>
-                          </a:solidFill>
-                        </a:rPr>
-                        <a:t>Sintoma</a:t>
-                      </a:r>
-                    </a:p>
-                  </a:txBody>
-                  <a:tcPr marL="109728" marR="109728" marT="73152" marB="73152" anchor="ctr">
-                    <a:solidFill>
-                      <a:srgbClr val="C7000B"/>
-                    </a:solidFill>
-                  </a:tcPr>
-                </a:tc>
-                <a:tc>
-                  <a:txBody>
-                    <a:bodyPr/>
-                    <a:lstStyle/>
-                    <a:p>
-                      <a:pPr algn="ctr"/>
-                      <a:r>
-                        <a:rPr sz="1300" b="1">
-                          <a:solidFill>
-                            <a:srgbClr val="FFFFFF"/>
-                          </a:solidFill>
-                        </a:rPr>
-                        <a:t>Ação Rápida</a:t>
-                      </a:r>
-                    </a:p>
-                  </a:txBody>
-                  <a:tcPr marL="109728" marR="109728" marT="73152" marB="73152" anchor="ctr">
-                    <a:solidFill>
-                      <a:srgbClr val="C7000B"/>
-                    </a:solidFill>
-                  </a:tcPr>
-                </a:tc>
-              </a:tr>
-              <a:tr h="391885">
-                <a:tc>
-                  <a:txBody>
-                    <a:bodyPr/>
-                    <a:lstStyle/>
-                    <a:p>
-                      <a:r>
-                        <a:rPr sz="1100" b="1">
-                          <a:solidFill>
-                            <a:srgbClr val="1F2328"/>
-                          </a:solidFill>
-                        </a:rPr>
-                        <a:t>VM não liga</a:t>
-                      </a:r>
-                    </a:p>
-                  </a:txBody>
-                  <a:tcPr marL="109728" marR="109728" marT="54864" marB="54864" anchor="ctr">
-                    <a:solidFill>
-                      <a:srgbClr val="F6F8FA"/>
-                    </a:solidFill>
-                  </a:tcPr>
-                </a:tc>
-                <a:tc>
-                  <a:txBody>
-                    <a:bodyPr/>
-                    <a:lstStyle/>
-                    <a:p>
-                      <a:r>
-                        <a:rPr sz="1100">
-                          <a:solidFill>
-                            <a:srgbClr val="1F2328"/>
-                          </a:solidFill>
-                        </a:rPr>
-                        <a:t>Status: ERROR</a:t>
-                      </a:r>
-                    </a:p>
-                  </a:txBody>
-                  <a:tcPr marL="109728" marR="109728" marT="54864" marB="54864" anchor="ctr">
-                    <a:solidFill>
-                      <a:srgbClr val="F6F8FA"/>
-                    </a:solidFill>
-                  </a:tcPr>
-                </a:tc>
-                <a:tc>
-                  <a:txBody>
-                    <a:bodyPr/>
-                    <a:lstStyle/>
-                    <a:p>
-                      <a:r>
-                        <a:rPr sz="1100">
-                          <a:solidFill>
-                            <a:srgbClr val="1F2328"/>
-                          </a:solidFill>
-                        </a:rPr>
-                        <a:t>Verificar quotas, disco, rede</a:t>
-                      </a:r>
-                    </a:p>
-                  </a:txBody>
-                  <a:tcPr marL="109728" marR="109728" marT="54864" marB="54864" anchor="ctr">
-                    <a:solidFill>
-                      <a:srgbClr val="F6F8FA"/>
-                    </a:solidFill>
-                  </a:tcPr>
-                </a:tc>
-              </a:tr>
-              <a:tr h="391885">
-                <a:tc>
-                  <a:txBody>
-                    <a:bodyPr/>
-                    <a:lstStyle/>
-                    <a:p>
-                      <a:r>
-                        <a:rPr sz="1100" b="1">
-                          <a:solidFill>
-                            <a:srgbClr val="1F2328"/>
-                          </a:solidFill>
-                        </a:rPr>
-                        <a:t>Disco cheio</a:t>
-                      </a:r>
-                    </a:p>
-                  </a:txBody>
-                  <a:tcPr marL="109728" marR="109728" marT="54864" marB="54864" anchor="ctr">
-                    <a:solidFill>
-                      <a:srgbClr val="FFFFFF"/>
-                    </a:solidFill>
-                  </a:tcPr>
-                </a:tc>
-                <a:tc>
-                  <a:txBody>
-                    <a:bodyPr/>
-                    <a:lstStyle/>
-                    <a:p>
-                      <a:r>
-                        <a:rPr sz="1100">
-                          <a:solidFill>
-                            <a:srgbClr val="1F2328"/>
-                          </a:solidFill>
-                        </a:rPr>
-                        <a:t>Alerta &gt; 90%</a:t>
-                      </a:r>
-                    </a:p>
-                  </a:txBody>
-                  <a:tcPr marL="109728" marR="109728" marT="54864" marB="54864" anchor="ctr">
-                    <a:solidFill>
-                      <a:srgbClr val="FFFFFF"/>
-                    </a:solidFill>
-                  </a:tcPr>
-                </a:tc>
-                <a:tc>
-                  <a:txBody>
-                    <a:bodyPr/>
-                    <a:lstStyle/>
-                    <a:p>
-                      <a:r>
-                        <a:rPr sz="1100">
-                          <a:solidFill>
-                            <a:srgbClr val="1F2328"/>
-                          </a:solidFill>
-                        </a:rPr>
-                        <a:t>Limpar logs, expandir EVS</a:t>
-                      </a:r>
-                    </a:p>
-                  </a:txBody>
-                  <a:tcPr marL="109728" marR="109728" marT="54864" marB="54864" anchor="ctr">
-                    <a:solidFill>
-                      <a:srgbClr val="FFFFFF"/>
-                    </a:solidFill>
-                  </a:tcPr>
-                </a:tc>
-              </a:tr>
-              <a:tr h="391885">
-                <a:tc>
-                  <a:txBody>
-                    <a:bodyPr/>
-                    <a:lstStyle/>
-                    <a:p>
-                      <a:r>
-                        <a:rPr sz="1100" b="1">
-                          <a:solidFill>
-                            <a:srgbClr val="1F2328"/>
-                          </a:solidFill>
-                        </a:rPr>
-                        <a:t>Sem rede</a:t>
-                      </a:r>
-                    </a:p>
-                  </a:txBody>
-                  <a:tcPr marL="109728" marR="109728" marT="54864" marB="54864" anchor="ctr">
-                    <a:solidFill>
-                      <a:srgbClr val="F6F8FA"/>
-                    </a:solidFill>
-                  </a:tcPr>
-                </a:tc>
-                <a:tc>
-                  <a:txBody>
-                    <a:bodyPr/>
-                    <a:lstStyle/>
-                    <a:p>
-                      <a:r>
-                        <a:rPr sz="1100">
-                          <a:solidFill>
-                            <a:srgbClr val="1F2328"/>
-                          </a:solidFill>
-                        </a:rPr>
-                        <a:t>Ping falha</a:t>
-                      </a:r>
-                    </a:p>
-                  </a:txBody>
-                  <a:tcPr marL="109728" marR="109728" marT="54864" marB="54864" anchor="ctr">
-                    <a:solidFill>
-                      <a:srgbClr val="F6F8FA"/>
-                    </a:solidFill>
-                  </a:tcPr>
-                </a:tc>
-                <a:tc>
-                  <a:txBody>
-                    <a:bodyPr/>
-                    <a:lstStyle/>
-                    <a:p>
-                      <a:r>
-                        <a:rPr sz="1100">
-                          <a:solidFill>
-                            <a:srgbClr val="1F2328"/>
-                          </a:solidFill>
-                        </a:rPr>
-                        <a:t>Verificar VPC, EIP, SG</a:t>
-                      </a:r>
-                    </a:p>
-                  </a:txBody>
-                  <a:tcPr marL="109728" marR="109728" marT="54864" marB="54864" anchor="ctr">
-                    <a:solidFill>
-                      <a:srgbClr val="F6F8FA"/>
-                    </a:solidFill>
-                  </a:tcPr>
-                </a:tc>
-              </a:tr>
-              <a:tr h="391885">
-                <a:tc>
-                  <a:txBody>
-                    <a:bodyPr/>
-                    <a:lstStyle/>
-                    <a:p>
-                      <a:r>
-                        <a:rPr sz="1100" b="1">
-                          <a:solidFill>
-                            <a:srgbClr val="1F2328"/>
-                          </a:solidFill>
-                        </a:rPr>
-                        <a:t>ELB unhealthy</a:t>
-                      </a:r>
-                    </a:p>
-                  </a:txBody>
-                  <a:tcPr marL="109728" marR="109728" marT="54864" marB="54864" anchor="ctr">
-                    <a:solidFill>
-                      <a:srgbClr val="FFFFFF"/>
-                    </a:solidFill>
-                  </a:tcPr>
-                </a:tc>
-                <a:tc>
-                  <a:txBody>
-                    <a:bodyPr/>
-                    <a:lstStyle/>
-                    <a:p>
-                      <a:r>
-                        <a:rPr sz="1100">
-                          <a:solidFill>
-                            <a:srgbClr val="1F2328"/>
-                          </a:solidFill>
-                        </a:rPr>
-                        <a:t>Backend down</a:t>
-                      </a:r>
-                    </a:p>
-                  </a:txBody>
-                  <a:tcPr marL="109728" marR="109728" marT="54864" marB="54864" anchor="ctr">
-                    <a:solidFill>
-                      <a:srgbClr val="FFFFFF"/>
-                    </a:solidFill>
-                  </a:tcPr>
-                </a:tc>
-                <a:tc>
-                  <a:txBody>
-                    <a:bodyPr/>
-                    <a:lstStyle/>
-                    <a:p>
-                      <a:r>
-                        <a:rPr sz="1100">
-                          <a:solidFill>
-                            <a:srgbClr val="1F2328"/>
-                          </a:solidFill>
-                        </a:rPr>
-                        <a:t>Verificar health check, porta</a:t>
-                      </a:r>
-                    </a:p>
-                  </a:txBody>
-                  <a:tcPr marL="109728" marR="109728" marT="54864" marB="54864" anchor="ctr">
-                    <a:solidFill>
-                      <a:srgbClr val="FFFFFF"/>
-                    </a:solidFill>
-                  </a:tcPr>
-                </a:tc>
-              </a:tr>
-              <a:tr h="391885">
-                <a:tc>
-                  <a:txBody>
-                    <a:bodyPr/>
-                    <a:lstStyle/>
-                    <a:p>
-                      <a:r>
-                        <a:rPr sz="1100" b="1">
-                          <a:solidFill>
-                            <a:srgbClr val="1F2328"/>
-                          </a:solidFill>
-                        </a:rPr>
-                        <a:t>RDS lento</a:t>
-                      </a:r>
-                    </a:p>
-                  </a:txBody>
-                  <a:tcPr marL="109728" marR="109728" marT="54864" marB="54864" anchor="ctr">
-                    <a:solidFill>
-                      <a:srgbClr val="F6F8FA"/>
-                    </a:solidFill>
-                  </a:tcPr>
-                </a:tc>
-                <a:tc>
-                  <a:txBody>
-                    <a:bodyPr/>
-                    <a:lstStyle/>
-                    <a:p>
-                      <a:r>
-                        <a:rPr sz="1100">
-                          <a:solidFill>
-                            <a:srgbClr val="1F2328"/>
-                          </a:solidFill>
-                        </a:rPr>
-                        <a:t>Query timeout</a:t>
-                      </a:r>
-                    </a:p>
-                  </a:txBody>
-                  <a:tcPr marL="109728" marR="109728" marT="54864" marB="54864" anchor="ctr">
-                    <a:solidFill>
-                      <a:srgbClr val="F6F8FA"/>
-                    </a:solidFill>
-                  </a:tcPr>
-                </a:tc>
-                <a:tc>
-                  <a:txBody>
-                    <a:bodyPr/>
-                    <a:lstStyle/>
-                    <a:p>
-                      <a:r>
-                        <a:rPr sz="1100">
-                          <a:solidFill>
-                            <a:srgbClr val="1F2328"/>
-                          </a:solidFill>
-                        </a:rPr>
-                        <a:t>Verificar slow log, índices</a:t>
-                      </a:r>
-                    </a:p>
-                  </a:txBody>
-                  <a:tcPr marL="109728" marR="109728" marT="54864" marB="54864" anchor="ctr">
-                    <a:solidFill>
-                      <a:srgbClr val="F6F8FA"/>
-                    </a:solidFill>
-                  </a:tcPr>
-                </a:tc>
-              </a:tr>
-              <a:tr h="391890">
-                <a:tc>
-                  <a:txBody>
-                    <a:bodyPr/>
-                    <a:lstStyle/>
-                    <a:p>
-                      <a:r>
-                        <a:rPr sz="1100" b="1">
-                          <a:solidFill>
-                            <a:srgbClr val="1F2328"/>
-                          </a:solidFill>
-                        </a:rPr>
-                        <a:t>OBS 403</a:t>
-                      </a:r>
-                    </a:p>
-                  </a:txBody>
-                  <a:tcPr marL="109728" marR="109728" marT="54864" marB="54864" anchor="ctr">
-                    <a:solidFill>
-                      <a:srgbClr val="FFFFFF"/>
-                    </a:solidFill>
-                  </a:tcPr>
-                </a:tc>
-                <a:tc>
-                  <a:txBody>
-                    <a:bodyPr/>
-                    <a:lstStyle/>
-                    <a:p>
-                      <a:r>
-                        <a:rPr sz="1100">
-                          <a:solidFill>
-                            <a:srgbClr val="1F2328"/>
-                          </a:solidFill>
-                        </a:rPr>
-                        <a:t>Access denied</a:t>
-                      </a:r>
-                    </a:p>
-                  </a:txBody>
-                  <a:tcPr marL="109728" marR="109728" marT="54864" marB="54864" anchor="ctr">
-                    <a:solidFill>
-                      <a:srgbClr val="FFFFFF"/>
-                    </a:solidFill>
-                  </a:tcPr>
-                </a:tc>
-                <a:tc>
-                  <a:txBody>
-                    <a:bodyPr/>
-                    <a:lstStyle/>
-                    <a:p>
-                      <a:r>
-                        <a:rPr sz="1100">
-                          <a:solidFill>
-                            <a:srgbClr val="1F2328"/>
-                          </a:solidFill>
-                        </a:rPr>
-                        <a:t>Verificar AK/SK, policy IAM</a:t>
-                      </a:r>
-                    </a:p>
-                  </a:txBody>
-                  <a:tcPr marL="109728" marR="109728" marT="54864" marB="54864" anchor="ctr">
-                    <a:solidFill>
-                      <a:srgbClr val="FFFFFF"/>
-                    </a:solidFill>
-                  </a:tcPr>
-                </a:tc>
-              </a:tr>
-            </a:tbl>
-          </a:graphicData>
-        </a:graphic>
-      </p:graphicFrame>
-    </p:spTree>
-  </p:cSld>
-  <p:clrMapOvr>
-    <a:masterClrMapping/>
-  </p:clrMapOvr>
-</p:sld>
-</file>
-
-<file path=ppt/slides/slide2.xml><?xml version="1.0" encoding="utf-8"?>
-<p:sld xmlns:a="http://schemas.openxmlformats.org/drawingml/2006/main" xmlns:p="http://schemas.openxmlformats.org/presentationml/2006/main" xmlns:r="http://schemas.openxmlformats.org/officeDocument/2006/relationships">
-  <p:cSld>
-    <p:spTree>
-      <p:nvGrpSpPr>
-        <p:cNvPr id="1" name=""/>
-        <p:cNvGrpSpPr/>
-        <p:nvPr/>
-      </p:nvGrpSpPr>
-      <p:grpSpPr/>
-      <p:sp>
-        <p:nvSpPr>
-          <p:cNvPr id="2" name="Title 1"/>
-          <p:cNvSpPr>
-            <a:spLocks noGrp="1"/>
-          </p:cNvSpPr>
-          <p:nvPr>
-            <p:ph type="title"/>
-          </p:nvPr>
-        </p:nvSpPr>
-        <p:spPr>
-          <a:xfrm>
-            <a:off x="0" y="320040"/>
-          </a:xfrm>
-        </p:spPr>
-        <p:txBody>
-          <a:bodyPr/>
-          <a:lstStyle/>
-          <a:p>
-            <a:r>
-              <a:rPr sz="2400" b="1">
-                <a:solidFill>
-                  <a:srgbClr val="C7000B"/>
-                </a:solidFill>
-              </a:rPr>
-              <a:t>Agenda do Treinamento</a:t>
-            </a:r>
-          </a:p>
-        </p:txBody>
-      </p:sp>
-      <p:sp>
-        <p:nvSpPr>
-          <p:cNvPr id="3" name="TextBox 2"/>
-          <p:cNvSpPr txBox="1"/>
-          <p:nvPr/>
-        </p:nvSpPr>
-        <p:spPr>
-          <a:xfrm>
-            <a:off x="731520" y="1554480"/>
-            <a:ext cx="10698480" cy="4114800"/>
-          </a:xfrm>
-          <a:prstGeom prst="rect">
-            <a:avLst/>
-          </a:prstGeom>
-          <a:noFill/>
-        </p:spPr>
-        <p:txBody>
-          <a:bodyPr wrap="square">
-            <a:noAutofit/>
-          </a:bodyPr>
-          <a:lstStyle/>
-          <a:p>
-            <a:pPr algn="l"/>
-            <a:r>
-              <a:rPr sz="1600" b="0">
-                <a:solidFill>
-                  <a:srgbClr val="1F2328"/>
-                </a:solidFill>
-              </a:rPr>
-              <a:t>1. Arquitetura HCS 8.6.1</a:t>
-            </a:r>
-          </a:p>
-          <a:p>
-            <a:pPr algn="l">
-              <a:spcBef>
-                <a:spcPts val="400"/>
-              </a:spcBef>
-            </a:pPr>
-            <a:r>
-              <a:rPr sz="1600" b="0">
-                <a:solidFill>
-                  <a:srgbClr val="1F2328"/>
-                </a:solidFill>
-              </a:rPr>
-              <a:t>2. Famílias de Serviços e Acronimos</a:t>
-            </a:r>
-          </a:p>
-          <a:p>
-            <a:pPr algn="l">
-              <a:spcBef>
-                <a:spcPts val="400"/>
-              </a:spcBef>
-            </a:pPr>
-            <a:r>
-              <a:rPr sz="1600" b="0">
-                <a:solidFill>
-                  <a:srgbClr val="1F2328"/>
-                </a:solidFill>
-              </a:rPr>
-              <a:t>3. Processo de Abertura de SR</a:t>
-            </a:r>
-          </a:p>
-          <a:p>
-            <a:pPr algn="l">
-              <a:spcBef>
-                <a:spcPts val="400"/>
-              </a:spcBef>
-            </a:pPr>
-            <a:r>
-              <a:rPr sz="1600" b="0">
-                <a:solidFill>
-                  <a:srgbClr val="1F2328"/>
-                </a:solidFill>
-              </a:rPr>
-              <a:t>4. Notificação ao TAC e Template de SR</a:t>
-            </a:r>
-          </a:p>
-          <a:p>
-            <a:pPr algn="l">
-              <a:spcBef>
-                <a:spcPts val="400"/>
-              </a:spcBef>
-            </a:pPr>
-            <a:r>
-              <a:rPr sz="1600" b="0">
-                <a:solidFill>
-                  <a:srgbClr val="1F2328"/>
-                </a:solidFill>
-              </a:rPr>
-              <a:t>5. Processo ITR (Issue To Resolve)</a:t>
-            </a:r>
-          </a:p>
-          <a:p>
-            <a:pPr algn="l">
-              <a:spcBef>
-                <a:spcPts val="400"/>
-              </a:spcBef>
-            </a:pPr>
-            <a:r>
-              <a:rPr sz="1600" b="0">
-                <a:solidFill>
-                  <a:srgbClr val="1F2328"/>
-                </a:solidFill>
-              </a:rPr>
-              <a:t>6. Matriz de Escalação</a:t>
-            </a:r>
-          </a:p>
-          <a:p>
-            <a:pPr algn="l">
-              <a:spcBef>
-                <a:spcPts val="400"/>
-              </a:spcBef>
-            </a:pPr>
-            <a:r>
-              <a:rPr sz="1600" b="0">
-                <a:solidFill>
-                  <a:srgbClr val="1F2328"/>
-                </a:solidFill>
-              </a:rPr>
-              <a:t>7. Operações Comuns de O&amp;M</a:t>
-            </a:r>
-          </a:p>
-          <a:p>
-            <a:pPr algn="l">
-              <a:spcBef>
-                <a:spcPts val="400"/>
-              </a:spcBef>
-            </a:pPr>
-            <a:r>
-              <a:rPr sz="1600" b="0">
-                <a:solidFill>
-                  <a:srgbClr val="1F2328"/>
-                </a:solidFill>
-              </a:rPr>
-              <a:t>8. Melhores Práticas e Checklist</a:t>
-            </a:r>
-          </a:p>
-        </p:txBody>
-      </p:sp>
-    </p:spTree>
-  </p:cSld>
-  <p:clrMapOvr>
-    <a:masterClrMapping/>
-  </p:clrMapOvr>
-</p:sld>
-</file>
-
-<file path=ppt/slides/slide20.xml><?xml version="1.0" encoding="utf-8"?>
-<p:sld xmlns:a="http://schemas.openxmlformats.org/drawingml/2006/main" xmlns:p="http://schemas.openxmlformats.org/presentationml/2006/main" xmlns:r="http://schemas.openxmlformats.org/officeDocument/2006/relationships">
-  <p:cSld>
-    <p:spTree>
-      <p:nvGrpSpPr>
-        <p:cNvPr id="1" name=""/>
-        <p:cNvGrpSpPr/>
-        <p:nvPr/>
-      </p:nvGrpSpPr>
-      <p:grpSpPr/>
-      <p:sp>
-        <p:nvSpPr>
-          <p:cNvPr id="2" name="Title 1"/>
-          <p:cNvSpPr>
-            <a:spLocks noGrp="1"/>
-          </p:cNvSpPr>
-          <p:nvPr>
-            <p:ph type="title"/>
-          </p:nvPr>
-        </p:nvSpPr>
-        <p:spPr>
-          <a:xfrm>
-            <a:off x="0" y="320040"/>
-          </a:xfrm>
-        </p:spPr>
-        <p:txBody>
-          <a:bodyPr/>
-          <a:lstStyle/>
-          <a:p/>
-        </p:txBody>
-      </p:sp>
-      <p:sp>
-        <p:nvSpPr>
-          <p:cNvPr id="3" name="TextBox 2"/>
-          <p:cNvSpPr txBox="1"/>
-          <p:nvPr/>
-        </p:nvSpPr>
-        <p:spPr>
-          <a:xfrm>
-            <a:off x="731520" y="2011680"/>
-            <a:ext cx="10698480" cy="1371600"/>
-          </a:xfrm>
-          <a:prstGeom prst="rect">
-            <a:avLst/>
-          </a:prstGeom>
-          <a:noFill/>
-        </p:spPr>
-        <p:txBody>
-          <a:bodyPr wrap="square">
-            <a:noAutofit/>
-          </a:bodyPr>
-          <a:lstStyle/>
-          <a:p>
-            <a:pPr algn="ctr"/>
-            <a:r>
-              <a:rPr sz="4000" b="1">
-                <a:solidFill>
-                  <a:srgbClr val="C7000B"/>
-                </a:solidFill>
-              </a:rPr>
-              <a:t>Melhores Práticas</a:t>
-            </a:r>
-          </a:p>
-        </p:txBody>
-      </p:sp>
-      <p:sp>
-        <p:nvSpPr>
-          <p:cNvPr id="4" name="TextBox 3"/>
-          <p:cNvSpPr txBox="1"/>
-          <p:nvPr/>
-        </p:nvSpPr>
-        <p:spPr>
-          <a:xfrm>
-            <a:off x="731520" y="3474720"/>
-            <a:ext cx="10698480" cy="914400"/>
-          </a:xfrm>
-          <a:prstGeom prst="rect">
-            <a:avLst/>
-          </a:prstGeom>
-          <a:noFill/>
-        </p:spPr>
-        <p:txBody>
-          <a:bodyPr wrap="square">
-            <a:noAutofit/>
-          </a:bodyPr>
-          <a:lstStyle/>
-          <a:p>
-            <a:pPr algn="ctr"/>
-            <a:r>
-              <a:rPr sz="1800" b="0">
-                <a:solidFill>
-                  <a:srgbClr val="666666"/>
-                </a:solidFill>
-              </a:rPr>
-              <a:t>Checklist e recursos</a:t>
-            </a:r>
-          </a:p>
-        </p:txBody>
-      </p:sp>
-    </p:spTree>
-  </p:cSld>
-  <p:clrMapOvr>
-    <a:masterClrMapping/>
-  </p:clrMapOvr>
-</p:sld>
-</file>
-
-<file path=ppt/slides/slide21.xml><?xml version="1.0" encoding="utf-8"?>
-<p:sld xmlns:a="http://schemas.openxmlformats.org/drawingml/2006/main" xmlns:p="http://schemas.openxmlformats.org/presentationml/2006/main" xmlns:r="http://schemas.openxmlformats.org/officeDocument/2006/relationships">
-  <p:cSld>
-    <p:spTree>
-      <p:nvGrpSpPr>
-        <p:cNvPr id="1" name=""/>
-        <p:cNvGrpSpPr/>
-        <p:nvPr/>
-      </p:nvGrpSpPr>
-      <p:grpSpPr/>
-      <p:sp>
-        <p:nvSpPr>
-          <p:cNvPr id="2" name="Title 1"/>
-          <p:cNvSpPr>
-            <a:spLocks noGrp="1"/>
-          </p:cNvSpPr>
-          <p:nvPr>
-            <p:ph type="title"/>
-          </p:nvPr>
-        </p:nvSpPr>
-        <p:spPr>
-          <a:xfrm>
-            <a:off x="0" y="320040"/>
-          </a:xfrm>
-        </p:spPr>
-        <p:txBody>
-          <a:bodyPr/>
-          <a:lstStyle/>
-          <a:p>
-            <a:r>
-              <a:rPr sz="2400" b="1">
-                <a:solidFill>
-                  <a:srgbClr val="C7000B"/>
-                </a:solidFill>
-              </a:rPr>
-              <a:t>O Que Fazer e O Que Não Fazer</a:t>
-            </a:r>
-          </a:p>
-        </p:txBody>
-      </p:sp>
-      <p:sp>
-        <p:nvSpPr>
-          <p:cNvPr id="3" name="TextBox 2"/>
-          <p:cNvSpPr txBox="1"/>
-          <p:nvPr/>
-        </p:nvSpPr>
-        <p:spPr>
-          <a:xfrm>
-            <a:off x="731520" y="1645920"/>
-            <a:ext cx="10698480" cy="448056"/>
-          </a:xfrm>
-          <a:prstGeom prst="rect">
-            <a:avLst/>
-          </a:prstGeom>
-          <a:noFill/>
-          <a:solidFill>
-            <a:srgbClr val="FDF8EE"/>
-          </a:solidFill>
-        </p:spPr>
-        <p:txBody>
-          <a:bodyPr wrap="square">
-            <a:noAutofit/>
-          </a:bodyPr>
-          <a:lstStyle/>
-          <a:p>
-            <a:r>
-              <a:rPr sz="1400" b="1">
-                <a:solidFill>
-                  <a:srgbClr val="1F2328"/>
-                </a:solidFill>
-              </a:rPr>
-              <a:t>⚠  </a:t>
-            </a:r>
-            <a:r>
-              <a:rPr sz="1200" b="0">
-                <a:solidFill>
-                  <a:srgbClr val="1F2328"/>
-                </a:solidFill>
-              </a:rPr>
-              <a:t>Nunca solicitar ou aceitar credenciais do cliente. Oriente ao autoatendimento.</a:t>
-            </a:r>
-          </a:p>
-        </p:txBody>
-      </p:sp>
-      <p:sp>
-        <p:nvSpPr>
-          <p:cNvPr id="4" name="TextBox 3"/>
-          <p:cNvSpPr txBox="1"/>
-          <p:nvPr/>
-        </p:nvSpPr>
-        <p:spPr>
-          <a:xfrm>
-            <a:off x="731520" y="2468880"/>
-            <a:ext cx="10698480" cy="448056"/>
-          </a:xfrm>
-          <a:prstGeom prst="rect">
-            <a:avLst/>
-          </a:prstGeom>
-          <a:noFill/>
-          <a:solidFill>
-            <a:srgbClr val="EDF6ED"/>
-          </a:solidFill>
-        </p:spPr>
-        <p:txBody>
-          <a:bodyPr wrap="square">
-            <a:noAutofit/>
-          </a:bodyPr>
-          <a:lstStyle/>
-          <a:p>
-            <a:r>
-              <a:rPr sz="1400" b="1">
-                <a:solidFill>
-                  <a:srgbClr val="1F2328"/>
-                </a:solidFill>
-              </a:rPr>
-              <a:t>✓  </a:t>
-            </a:r>
-            <a:r>
-              <a:rPr sz="1200" b="0">
-                <a:solidFill>
-                  <a:srgbClr val="1F2328"/>
-                </a:solidFill>
-              </a:rPr>
-              <a:t>Sempre confirmar o nome exato do serviço e recurso antes de prosseguir.</a:t>
-            </a:r>
-          </a:p>
-        </p:txBody>
-      </p:sp>
-      <p:sp>
-        <p:nvSpPr>
-          <p:cNvPr id="5" name="TextBox 4"/>
-          <p:cNvSpPr txBox="1"/>
-          <p:nvPr/>
-        </p:nvSpPr>
-        <p:spPr>
-          <a:xfrm>
-            <a:off x="731520" y="3291839"/>
-            <a:ext cx="10698480" cy="448056"/>
-          </a:xfrm>
-          <a:prstGeom prst="rect">
-            <a:avLst/>
-          </a:prstGeom>
-          <a:noFill/>
-          <a:solidFill>
-            <a:srgbClr val="EDF3F9"/>
-          </a:solidFill>
-        </p:spPr>
-        <p:txBody>
-          <a:bodyPr wrap="square">
-            <a:noAutofit/>
-          </a:bodyPr>
-          <a:lstStyle/>
-          <a:p>
-            <a:r>
-              <a:rPr sz="1400" b="1">
-                <a:solidFill>
-                  <a:srgbClr val="1F2328"/>
-                </a:solidFill>
-              </a:rPr>
-              <a:t>ℹ  </a:t>
-            </a:r>
-            <a:r>
-              <a:rPr sz="1200" b="0">
-                <a:solidFill>
-                  <a:srgbClr val="1F2328"/>
-                </a:solidFill>
-              </a:rPr>
-              <a:t>Documentar cada passo do troubleshooting no SR para rastreabilidade.</a:t>
-            </a:r>
-          </a:p>
-        </p:txBody>
-      </p:sp>
-      <p:sp>
-        <p:nvSpPr>
-          <p:cNvPr id="6" name="TextBox 5"/>
-          <p:cNvSpPr txBox="1"/>
-          <p:nvPr/>
-        </p:nvSpPr>
-        <p:spPr>
-          <a:xfrm>
-            <a:off x="731520" y="4114800"/>
-            <a:ext cx="10698480" cy="448056"/>
-          </a:xfrm>
-          <a:prstGeom prst="rect">
-            <a:avLst/>
-          </a:prstGeom>
-          <a:noFill/>
-          <a:solidFill>
-            <a:srgbClr val="FDF8EE"/>
-          </a:solidFill>
-        </p:spPr>
-        <p:txBody>
-          <a:bodyPr wrap="square">
-            <a:noAutofit/>
-          </a:bodyPr>
-          <a:lstStyle/>
-          <a:p>
-            <a:r>
-              <a:rPr sz="1400" b="1">
-                <a:solidFill>
-                  <a:srgbClr val="1F2328"/>
-                </a:solidFill>
-              </a:rPr>
-              <a:t>⚠  </a:t>
-            </a:r>
-            <a:r>
-              <a:rPr sz="1200" b="0">
-                <a:solidFill>
-                  <a:srgbClr val="1F2328"/>
-                </a:solidFill>
-              </a:rPr>
-              <a:t>Não aplicar workaround em produção sem janela de manutenção aprovada.</a:t>
-            </a:r>
-          </a:p>
-        </p:txBody>
-      </p:sp>
-      <p:sp>
-        <p:nvSpPr>
-          <p:cNvPr id="7" name="TextBox 6"/>
-          <p:cNvSpPr txBox="1"/>
-          <p:nvPr/>
-        </p:nvSpPr>
-        <p:spPr>
-          <a:xfrm>
-            <a:off x="731520" y="4937760"/>
-            <a:ext cx="10698480" cy="448056"/>
-          </a:xfrm>
-          <a:prstGeom prst="rect">
-            <a:avLst/>
-          </a:prstGeom>
-          <a:noFill/>
-          <a:solidFill>
-            <a:srgbClr val="EDF6ED"/>
-          </a:solidFill>
-        </p:spPr>
-        <p:txBody>
-          <a:bodyPr wrap="square">
-            <a:noAutofit/>
-          </a:bodyPr>
-          <a:lstStyle/>
-          <a:p>
-            <a:r>
-              <a:rPr sz="1400" b="1">
-                <a:solidFill>
-                  <a:srgbClr val="1F2328"/>
-                </a:solidFill>
-              </a:rPr>
-              <a:t>✓  </a:t>
-            </a:r>
-            <a:r>
-              <a:rPr sz="1200" b="0">
-                <a:solidFill>
-                  <a:srgbClr val="1F2328"/>
-                </a:solidFill>
-              </a:rPr>
-              <a:t>Usar o template de SR oficial ao notificar o TAC Team.</a:t>
-            </a:r>
-          </a:p>
-        </p:txBody>
-      </p:sp>
-    </p:spTree>
-  </p:cSld>
-  <p:clrMapOvr>
-    <a:masterClrMapping/>
-  </p:clrMapOvr>
-</p:sld>
-</file>
-
-<file path=ppt/slides/slide22.xml><?xml version="1.0" encoding="utf-8"?>
-<p:sld xmlns:a="http://schemas.openxmlformats.org/drawingml/2006/main" xmlns:p="http://schemas.openxmlformats.org/presentationml/2006/main" xmlns:r="http://schemas.openxmlformats.org/officeDocument/2006/relationships">
-  <p:cSld>
-    <p:spTree>
-      <p:nvGrpSpPr>
-        <p:cNvPr id="1" name=""/>
-        <p:cNvGrpSpPr/>
-        <p:nvPr/>
-      </p:nvGrpSpPr>
-      <p:grpSpPr/>
-      <p:sp>
-        <p:nvSpPr>
-          <p:cNvPr id="2" name="Title 1"/>
-          <p:cNvSpPr>
-            <a:spLocks noGrp="1"/>
-          </p:cNvSpPr>
-          <p:nvPr>
-            <p:ph type="title"/>
-          </p:nvPr>
-        </p:nvSpPr>
-        <p:spPr>
-          <a:xfrm>
-            <a:off x="0" y="320040"/>
-          </a:xfrm>
-        </p:spPr>
-        <p:txBody>
-          <a:bodyPr/>
-          <a:lstStyle/>
-          <a:p>
-            <a:r>
-              <a:rPr sz="2400" b="1">
-                <a:solidFill>
-                  <a:srgbClr val="C7000B"/>
-                </a:solidFill>
-              </a:rPr>
-              <a:t>Recursos de Autoatendimento</a:t>
-            </a:r>
-          </a:p>
-        </p:txBody>
-      </p:sp>
-      <p:sp>
-        <p:nvSpPr>
-          <p:cNvPr id="3" name="TextBox 2"/>
-          <p:cNvSpPr txBox="1"/>
-          <p:nvPr/>
-        </p:nvSpPr>
-        <p:spPr>
-          <a:xfrm>
-            <a:off x="731520" y="1554480"/>
-            <a:ext cx="10698480" cy="4114800"/>
-          </a:xfrm>
-          <a:prstGeom prst="rect">
-            <a:avLst/>
-          </a:prstGeom>
-          <a:noFill/>
-        </p:spPr>
-        <p:txBody>
-          <a:bodyPr wrap="square">
-            <a:noAutofit/>
-          </a:bodyPr>
-          <a:lstStyle/>
-          <a:p>
-            <a:pPr algn="l"/>
-            <a:r>
-              <a:rPr sz="1400" b="0">
-                <a:solidFill>
-                  <a:srgbClr val="1F2328"/>
-                </a:solidFill>
-              </a:rPr>
-              <a:t>Direcionar clientes para:</a:t>
-            </a:r>
-          </a:p>
-          <a:p>
-            <a:pPr algn="l">
-              <a:spcBef>
-                <a:spcPts val="400"/>
-              </a:spcBef>
-            </a:pPr>
-            <a:r>
-              <a:rPr sz="1400" b="0">
-                <a:solidFill>
-                  <a:srgbClr val="1F2328"/>
-                </a:solidFill>
-              </a:rPr>
-              <a:t/>
-            </a:r>
-          </a:p>
-          <a:p>
-            <a:pPr algn="l">
-              <a:spcBef>
-                <a:spcPts val="400"/>
-              </a:spcBef>
-            </a:pPr>
-            <a:r>
-              <a:rPr sz="1400" b="0">
-                <a:solidFill>
-                  <a:srgbClr val="1F2328"/>
-                </a:solidFill>
-              </a:rPr>
-              <a:t>  • ServiceCenter — portal de autoserviço</a:t>
-            </a:r>
-          </a:p>
-          <a:p>
-            <a:pPr algn="l">
-              <a:spcBef>
-                <a:spcPts val="400"/>
-              </a:spcBef>
-            </a:pPr>
-            <a:r>
-              <a:rPr sz="1400" b="0">
-                <a:solidFill>
-                  <a:srgbClr val="1F2328"/>
-                </a:solidFill>
-              </a:rPr>
-              <a:t>  • Documentação HCS — docs.huaweicloud.com</a:t>
-            </a:r>
-          </a:p>
-          <a:p>
-            <a:pPr algn="l">
-              <a:spcBef>
-                <a:spcPts val="400"/>
-              </a:spcBef>
-            </a:pPr>
-            <a:r>
-              <a:rPr sz="1400" b="0">
-                <a:solidFill>
-                  <a:srgbClr val="1F2328"/>
-                </a:solidFill>
-              </a:rPr>
-              <a:t>  • Knowledge Base — artigos de troubleshooting</a:t>
-            </a:r>
-          </a:p>
-          <a:p>
-            <a:pPr algn="l">
-              <a:spcBef>
-                <a:spcPts val="400"/>
-              </a:spcBef>
-            </a:pPr>
-            <a:r>
-              <a:rPr sz="1400" b="0">
-                <a:solidFill>
-                  <a:srgbClr val="1F2328"/>
-                </a:solidFill>
-              </a:rPr>
-              <a:t>  • Status Page — status dos serviços</a:t>
-            </a:r>
-          </a:p>
-          <a:p>
-            <a:pPr algn="l">
-              <a:spcBef>
-                <a:spcPts val="400"/>
-              </a:spcBef>
-            </a:pPr>
-            <a:r>
-              <a:rPr sz="1400" b="0">
-                <a:solidFill>
-                  <a:srgbClr val="1F2328"/>
-                </a:solidFill>
-              </a:rPr>
-              <a:t>  • Forum — comunidade técnica</a:t>
-            </a:r>
-          </a:p>
-          <a:p>
-            <a:pPr algn="l">
-              <a:spcBef>
-                <a:spcPts val="400"/>
-              </a:spcBef>
-            </a:pPr>
-            <a:r>
-              <a:rPr sz="1400" b="0">
-                <a:solidFill>
-                  <a:srgbClr val="1F2328"/>
-                </a:solidFill>
-              </a:rPr>
-              <a:t/>
-            </a:r>
-          </a:p>
-          <a:p>
-            <a:pPr algn="l">
-              <a:spcBef>
-                <a:spcPts val="400"/>
-              </a:spcBef>
-            </a:pPr>
-            <a:r>
-              <a:rPr sz="1400" b="0">
-                <a:solidFill>
-                  <a:srgbClr val="1F2328"/>
-                </a:solidFill>
-              </a:rPr>
-              <a:t>Benefícios:</a:t>
-            </a:r>
-          </a:p>
-          <a:p>
-            <a:pPr algn="l">
-              <a:spcBef>
-                <a:spcPts val="400"/>
-              </a:spcBef>
-            </a:pPr>
-            <a:r>
-              <a:rPr sz="1400" b="0">
-                <a:solidFill>
-                  <a:srgbClr val="1F2328"/>
-                </a:solidFill>
-              </a:rPr>
-              <a:t>  • Reduz volume de SRs de baixa severidade</a:t>
-            </a:r>
-          </a:p>
-          <a:p>
-            <a:pPr algn="l">
-              <a:spcBef>
-                <a:spcPts val="400"/>
-              </a:spcBef>
-            </a:pPr>
-            <a:r>
-              <a:rPr sz="1400" b="0">
-                <a:solidFill>
-                  <a:srgbClr val="1F2328"/>
-                </a:solidFill>
-              </a:rPr>
-              <a:t>  • Cliente resolve mais rápido</a:t>
-            </a:r>
-          </a:p>
-          <a:p>
-            <a:pPr algn="l">
-              <a:spcBef>
-                <a:spcPts val="400"/>
-              </a:spcBef>
-            </a:pPr>
-            <a:r>
-              <a:rPr sz="1400" b="0">
-                <a:solidFill>
-                  <a:srgbClr val="1F2328"/>
-                </a:solidFill>
-              </a:rPr>
-              <a:t>  • Hotline foca em S1/S2</a:t>
             </a:r>
           </a:p>
         </p:txBody>
@@ -12839,22 +14387,13 @@
         </p:nvSpPr>
         <p:spPr>
           <a:xfrm>
-            <a:off x="0" y="320040"/>
+            <a:off x="731520" y="502920"/>
           </a:xfrm>
         </p:spPr>
         <p:txBody>
           <a:bodyPr/>
           <a:lstStyle/>
-          <a:p>
-            <a:r>
-              <a:rPr sz="2400" b="1">
-                <a:solidFill>
-                  <a:srgbClr val="C7000B"/>
-                </a:solidFill>
-              </a:rPr>
-              <a:t>Checklist de Validação do SR</a:t>
-            </a:r>
-          </a:p>
+          <a:p/>
         </p:txBody>
       </p:sp>
       <p:sp>
@@ -12865,8 +14404,8 @@
         </p:nvSpPr>
         <p:spPr>
           <a:xfrm>
-            <a:off x="731520" y="1554480"/>
-            <a:ext cx="10698480" cy="4114800"/>
+            <a:off x="731520" y="2011680"/>
+            <a:ext cx="10698480" cy="1371600"/>
           </a:xfrm>
           <a:prstGeom prst="rect">
             <a:avLst/>
@@ -12879,164 +14418,48 @@
           </a:bodyPr>
           <a:lstStyle/>
           <a:p>
-            <a:pPr algn="l"/>
+            <a:pPr algn="ctr"/>
             <a:r>
-              <a:rPr sz="1400" b="0">
-                <a:solidFill>
-                  <a:srgbClr val="1F2328"/>
-                </a:solidFill>
-              </a:rPr>
-              <a:t>Antes de fechar qualquer SR, validar:</a:t>
+              <a:rPr sz="4000" b="1">
+                <a:solidFill>
+                  <a:srgbClr val="C7000B"/>
+                </a:solidFill>
+              </a:rPr>
+              <a:t>Operações Comuns de O&amp;M</a:t>
             </a:r>
           </a:p>
+        </p:txBody>
+      </p:sp>
+      <p:sp>
+        <p:nvSpPr>
+          <p:cNvPr id="4" name="TextBox 3"/>
+          <p:cNvSpPr txBox="1"/>
+          <p:nvPr/>
+        </p:nvSpPr>
+        <p:spPr>
+          <a:xfrm>
+            <a:off x="731520" y="3474720"/>
+            <a:ext cx="10698480" cy="914400"/>
+          </a:xfrm>
+          <a:prstGeom prst="rect">
+            <a:avLst/>
+          </a:prstGeom>
+          <a:noFill/>
+        </p:spPr>
+        <p:txBody>
+          <a:bodyPr wrap="square">
+            <a:noAutofit/>
+          </a:bodyPr>
+          <a:lstStyle/>
           <a:p>
-            <a:pPr algn="l">
-              <a:spcBef>
-                <a:spcPts val="400"/>
-              </a:spcBef>
-            </a:pPr>
+            <a:pPr algn="ctr"/>
             <a:r>
-              <a:rPr sz="1400" b="0">
-                <a:solidFill>
-                  <a:srgbClr val="1F2328"/>
-                </a:solidFill>
-              </a:rPr>
-              <a:t/>
-            </a:r>
-          </a:p>
-          <a:p>
-            <a:pPr algn="l">
-              <a:spcBef>
-                <a:spcPts val="400"/>
-              </a:spcBef>
-            </a:pPr>
-            <a:r>
-              <a:rPr sz="1400" b="0">
-                <a:solidFill>
-                  <a:srgbClr val="1F2328"/>
-                </a:solidFill>
-              </a:rPr>
-              <a:t>  [ ] Identidade do solicitante confirmada</a:t>
-            </a:r>
-          </a:p>
-          <a:p>
-            <a:pPr algn="l">
-              <a:spcBef>
-                <a:spcPts val="400"/>
-              </a:spcBef>
-            </a:pPr>
-            <a:r>
-              <a:rPr sz="1400" b="0">
-                <a:solidFill>
-                  <a:srgbClr val="1F2328"/>
-                </a:solidFill>
-              </a:rPr>
-              <a:t>  [ ] Nome oficial do serviço identificado</a:t>
-            </a:r>
-          </a:p>
-          <a:p>
-            <a:pPr algn="l">
-              <a:spcBef>
-                <a:spcPts val="400"/>
-              </a:spcBef>
-            </a:pPr>
-            <a:r>
-              <a:rPr sz="1400" b="0">
-                <a:solidFill>
-                  <a:srgbClr val="1F2328"/>
-                </a:solidFill>
-              </a:rPr>
-              <a:t>  [ ] Severidade classificada corretamente</a:t>
-            </a:r>
-          </a:p>
-          <a:p>
-            <a:pPr algn="l">
-              <a:spcBef>
-                <a:spcPts val="400"/>
-              </a:spcBef>
-            </a:pPr>
-            <a:r>
-              <a:rPr sz="1400" b="0">
-                <a:solidFill>
-                  <a:srgbClr val="1F2328"/>
-                </a:solidFill>
-              </a:rPr>
-              <a:t>  [ ] TAC Team notificado com template</a:t>
-            </a:r>
-          </a:p>
-          <a:p>
-            <a:pPr algn="l">
-              <a:spcBef>
-                <a:spcPts val="400"/>
-              </a:spcBef>
-            </a:pPr>
-            <a:r>
-              <a:rPr sz="1400" b="0">
-                <a:solidFill>
-                  <a:srgbClr val="1F2328"/>
-                </a:solidFill>
-              </a:rPr>
-              <a:t>  [ ] Diagnóstico documentado no SR</a:t>
-            </a:r>
-          </a:p>
-          <a:p>
-            <a:pPr algn="l">
-              <a:spcBef>
-                <a:spcPts val="400"/>
-              </a:spcBef>
-            </a:pPr>
-            <a:r>
-              <a:rPr sz="1400" b="0">
-                <a:solidFill>
-                  <a:srgbClr val="1F2328"/>
-                </a:solidFill>
-              </a:rPr>
-              <a:t>  [ ] Solução aplicada e verificada</a:t>
-            </a:r>
-          </a:p>
-          <a:p>
-            <a:pPr algn="l">
-              <a:spcBef>
-                <a:spcPts val="400"/>
-              </a:spcBef>
-            </a:pPr>
-            <a:r>
-              <a:rPr sz="1400" b="0">
-                <a:solidFill>
-                  <a:srgbClr val="1F2328"/>
-                </a:solidFill>
-              </a:rPr>
-              <a:t>  [ ] Cliente confirmou a resolução</a:t>
-            </a:r>
-          </a:p>
-          <a:p>
-            <a:pPr algn="l">
-              <a:spcBef>
-                <a:spcPts val="400"/>
-              </a:spcBef>
-            </a:pPr>
-            <a:r>
-              <a:rPr sz="1400" b="0">
-                <a:solidFill>
-                  <a:srgbClr val="1F2328"/>
-                </a:solidFill>
-              </a:rPr>
-              <a:t>  [ ] SR fechado com resolução documentada</a:t>
-            </a:r>
-          </a:p>
-          <a:p>
-            <a:pPr algn="l">
-              <a:spcBef>
-                <a:spcPts val="400"/>
-              </a:spcBef>
-            </a:pPr>
-            <a:r>
-              <a:rPr sz="1400" b="0">
-                <a:solidFill>
-                  <a:srgbClr val="1F2328"/>
-                </a:solidFill>
-              </a:rPr>
-              <a:t>  [ ] Lições aprendidas registradas (se aplicável)</a:t>
+              <a:rPr sz="1800" b="0">
+                <a:solidFill>
+                  <a:srgbClr val="666666"/>
+                </a:solidFill>
+              </a:rPr>
+              <a:t>Monitoramento, problemas e soluções</a:t>
             </a:r>
           </a:p>
         </p:txBody>
@@ -13071,7 +14494,7 @@
         </p:nvSpPr>
         <p:spPr>
           <a:xfrm>
-            <a:off x="0" y="320040"/>
+            <a:off x="731520" y="502920"/>
           </a:xfrm>
         </p:spPr>
         <p:txBody>
@@ -13084,7 +14507,7 @@
                   <a:srgbClr val="C7000B"/>
                 </a:solidFill>
               </a:rPr>
-              <a:t>Próximos Passos</a:t>
+              <a:t>Monitoramento e Alertas</a:t>
             </a:r>
           </a:p>
         </p:txBody>
@@ -13113,12 +14536,12 @@
           <a:p>
             <a:pPr algn="l"/>
             <a:r>
-              <a:rPr sz="1400" b="0">
+              <a:rPr sz="1300" b="0">
                 <a:solidFill>
                   <a:srgbClr val="1F2328"/>
                 </a:solidFill>
               </a:rPr>
-              <a:t>Objetivo: equipe autorando conteúdo a partir de 01/09</a:t>
+              <a:t>Ferramentas de monitoramento HCS:</a:t>
             </a:r>
           </a:p>
           <a:p>
@@ -13128,7 +14551,7 @@
               </a:spcBef>
             </a:pPr>
             <a:r>
-              <a:rPr sz="1400" b="0">
+              <a:rPr sz="1300" b="0">
                 <a:solidFill>
                   <a:srgbClr val="1F2328"/>
                 </a:solidFill>
@@ -13143,12 +14566,12 @@
               </a:spcBef>
             </a:pPr>
             <a:r>
-              <a:rPr sz="1400" b="0">
+              <a:rPr sz="1300" b="0">
                 <a:solidFill>
                   <a:srgbClr val="1F2328"/>
                 </a:solidFill>
               </a:rPr>
-              <a:t>Preparação necessária:</a:t>
+              <a:t>  • ManageOne Operation — dashboards de saúde</a:t>
             </a:r>
           </a:p>
           <a:p>
@@ -13158,12 +14581,12 @@
               </a:spcBef>
             </a:pPr>
             <a:r>
-              <a:rPr sz="1400" b="0">
+              <a:rPr sz="1300" b="0">
                 <a:solidFill>
                   <a:srgbClr val="1F2328"/>
                 </a:solidFill>
               </a:rPr>
-              <a:t>  1. Revisar este treinamento completo</a:t>
+              <a:t>  • AOM (Application Operations Management) — métricas de app</a:t>
             </a:r>
           </a:p>
           <a:p>
@@ -13173,12 +14596,12 @@
               </a:spcBef>
             </a:pPr>
             <a:r>
-              <a:rPr sz="1400" b="0">
+              <a:rPr sz="1300" b="0">
                 <a:solidFill>
                   <a:srgbClr val="1F2328"/>
                 </a:solidFill>
               </a:rPr>
-              <a:t>  2. Praticar abertura de SRs com template</a:t>
+              <a:t>  • APM (Application Performance Monitoring) — traces</a:t>
             </a:r>
           </a:p>
           <a:p>
@@ -13188,12 +14611,12 @@
               </a:spcBef>
             </a:pPr>
             <a:r>
-              <a:rPr sz="1400" b="0">
+              <a:rPr sz="1300" b="0">
                 <a:solidFill>
                   <a:srgbClr val="1F2328"/>
                 </a:solidFill>
               </a:rPr>
-              <a:t>  3. Familiarizar com ManageOne e ServiceCenter</a:t>
+              <a:t>  • CloudEye — monitoramento de infra</a:t>
             </a:r>
           </a:p>
           <a:p>
@@ -13203,37 +14626,7 @@
               </a:spcBef>
             </a:pPr>
             <a:r>
-              <a:rPr sz="1400" b="0">
-                <a:solidFill>
-                  <a:srgbClr val="1F2328"/>
-                </a:solidFill>
-              </a:rPr>
-              <a:t>  4. Estudar fluxos ITR e matriz de escalação</a:t>
-            </a:r>
-          </a:p>
-          <a:p>
-            <a:pPr algn="l">
-              <a:spcBef>
-                <a:spcPts val="400"/>
-              </a:spcBef>
-            </a:pPr>
-            <a:r>
-              <a:rPr sz="1400" b="0">
-                <a:solidFill>
-                  <a:srgbClr val="1F2328"/>
-                </a:solidFill>
-              </a:rPr>
-              <a:t>  5. Conhecer acronimos e famílias de serviços</a:t>
-            </a:r>
-          </a:p>
-          <a:p>
-            <a:pPr algn="l">
-              <a:spcBef>
-                <a:spcPts val="400"/>
-              </a:spcBef>
-            </a:pPr>
-            <a:r>
-              <a:rPr sz="1400" b="0">
+              <a:rPr sz="1300" b="0">
                 <a:solidFill>
                   <a:srgbClr val="1F2328"/>
                 </a:solidFill>
@@ -13248,56 +14641,72 @@
               </a:spcBef>
             </a:pPr>
             <a:r>
-              <a:rPr sz="1400" b="0">
+              <a:rPr sz="1300" b="0">
                 <a:solidFill>
                   <a:srgbClr val="1F2328"/>
                 </a:solidFill>
               </a:rPr>
-              <a:t>Stack alvo: HCS 8.6.1</a:t>
+              <a:t>Alertass comuns:</a:t>
             </a:r>
           </a:p>
-        </p:txBody>
-      </p:sp>
-      <p:sp>
-        <p:nvSpPr>
-          <p:cNvPr id="4" name="TextBox 3"/>
-          <p:cNvSpPr txBox="1"/>
-          <p:nvPr/>
-        </p:nvSpPr>
-        <p:spPr>
-          <a:xfrm>
-            <a:off x="731520" y="5303520"/>
-            <a:ext cx="10698480" cy="448056"/>
-          </a:xfrm>
-          <a:prstGeom prst="rect">
-            <a:avLst/>
-          </a:prstGeom>
-          <a:noFill/>
-          <a:solidFill>
-            <a:srgbClr val="EDF6ED"/>
-          </a:solidFill>
-        </p:spPr>
-        <p:txBody>
-          <a:bodyPr wrap="square">
-            <a:noAutofit/>
-          </a:bodyPr>
-          <a:lstStyle/>
           <a:p>
+            <a:pPr algn="l">
+              <a:spcBef>
+                <a:spcPts val="400"/>
+              </a:spcBef>
+            </a:pPr>
             <a:r>
-              <a:rPr sz="1400" b="1">
+              <a:rPr sz="1300" b="0">
                 <a:solidFill>
                   <a:srgbClr val="1F2328"/>
                 </a:solidFill>
               </a:rPr>
-              <a:t>✓  </a:t>
+              <a:t>  • CPU &gt; 80% por 5 min → verificar cargas</a:t>
             </a:r>
+          </a:p>
+          <a:p>
+            <a:pPr algn="l">
+              <a:spcBef>
+                <a:spcPts val="400"/>
+              </a:spcBef>
+            </a:pPr>
             <a:r>
-              <a:rPr sz="1200" b="0">
+              <a:rPr sz="1300" b="0">
                 <a:solidFill>
                   <a:srgbClr val="1F2328"/>
                 </a:solidFill>
               </a:rPr>
-              <a:t>Dúvidas? Consultar a matriz de escalação ou escalar para L2.</a:t>
+              <a:t>  • Disco &gt; 90% → verificar logs e snapshots</a:t>
+            </a:r>
+          </a:p>
+          <a:p>
+            <a:pPr algn="l">
+              <a:spcBef>
+                <a:spcPts val="400"/>
+              </a:spcBef>
+            </a:pPr>
+            <a:r>
+              <a:rPr sz="1300" b="0">
+                <a:solidFill>
+                  <a:srgbClr val="1F2328"/>
+                </a:solidFill>
+              </a:rPr>
+              <a:t>  • Memória &gt; 85% → verificar vazamentos</a:t>
+            </a:r>
+          </a:p>
+          <a:p>
+            <a:pPr algn="l">
+              <a:spcBef>
+                <a:spcPts val="400"/>
+              </a:spcBef>
+            </a:pPr>
+            <a:r>
+              <a:rPr sz="1300" b="0">
+                <a:solidFill>
+                  <a:srgbClr val="1F2328"/>
+                </a:solidFill>
+              </a:rPr>
+              <a:t>  • Latência de rede &gt; 100ms → verificar VPC/ELB</a:t>
             </a:r>
           </a:p>
         </p:txBody>
@@ -13320,6 +14729,521 @@
         <p:nvPr/>
       </p:nvGrpSpPr>
       <p:grpSpPr/>
+      <p:sp>
+        <p:nvSpPr>
+          <p:cNvPr id="2" name="Title 1"/>
+          <p:cNvSpPr>
+            <a:spLocks noGrp="1"/>
+          </p:cNvSpPr>
+          <p:nvPr>
+            <p:ph type="title"/>
+          </p:nvPr>
+        </p:nvSpPr>
+        <p:spPr>
+          <a:xfrm>
+            <a:off x="731520" y="502920"/>
+          </a:xfrm>
+        </p:spPr>
+        <p:txBody>
+          <a:bodyPr/>
+          <a:lstStyle/>
+          <a:p>
+            <a:r>
+              <a:rPr sz="2400" b="1">
+                <a:solidFill>
+                  <a:srgbClr val="C7000B"/>
+                </a:solidFill>
+              </a:rPr>
+              <a:t>Problemas Comuns e Soluções Rápidas</a:t>
+            </a:r>
+          </a:p>
+        </p:txBody>
+      </p:sp>
+      <p:graphicFrame>
+        <p:nvGraphicFramePr>
+          <p:cNvPr id="3" name="Table 2"/>
+          <p:cNvGraphicFramePr>
+            <a:graphicFrameLocks noGrp="1"/>
+          </p:cNvGraphicFramePr>
+          <p:nvPr/>
+        </p:nvGraphicFramePr>
+        <p:xfrm>
+          <a:off x="731520" y="1737360"/>
+          <a:ext cx="10698480" cy="2496312"/>
+        </p:xfrm>
+        <a:graphic>
+          <a:graphicData uri="http://schemas.openxmlformats.org/drawingml/2006/table">
+            <a:tbl>
+              <a:tblPr firstRow="1" bandRow="1">
+                <a:tableStyleId>{5C22544A-7EE6-4342-B048-85BDC9FD1C3A}</a:tableStyleId>
+              </a:tblPr>
+              <a:tblGrid>
+                <a:gridCol w="2674620"/>
+                <a:gridCol w="2674620"/>
+                <a:gridCol w="5349240"/>
+              </a:tblGrid>
+              <a:tr h="411480">
+                <a:tc>
+                  <a:txBody>
+                    <a:bodyPr/>
+                    <a:lstStyle/>
+                    <a:p>
+                      <a:pPr algn="ctr"/>
+                      <a:r>
+                        <a:rPr sz="1300" b="1">
+                          <a:solidFill>
+                            <a:srgbClr val="FFFFFF"/>
+                          </a:solidFill>
+                        </a:rPr>
+                        <a:t>Problema</a:t>
+                      </a:r>
+                    </a:p>
+                  </a:txBody>
+                  <a:tcPr marL="109728" marR="109728" marT="36576" marB="36576" anchor="ctr">
+                    <a:solidFill>
+                      <a:srgbClr val="C7000B"/>
+                    </a:solidFill>
+                  </a:tcPr>
+                </a:tc>
+                <a:tc>
+                  <a:txBody>
+                    <a:bodyPr/>
+                    <a:lstStyle/>
+                    <a:p>
+                      <a:pPr algn="ctr"/>
+                      <a:r>
+                        <a:rPr sz="1300" b="1">
+                          <a:solidFill>
+                            <a:srgbClr val="FFFFFF"/>
+                          </a:solidFill>
+                        </a:rPr>
+                        <a:t>Sintoma</a:t>
+                      </a:r>
+                    </a:p>
+                  </a:txBody>
+                  <a:tcPr marL="109728" marR="109728" marT="36576" marB="36576" anchor="ctr">
+                    <a:solidFill>
+                      <a:srgbClr val="C7000B"/>
+                    </a:solidFill>
+                  </a:tcPr>
+                </a:tc>
+                <a:tc>
+                  <a:txBody>
+                    <a:bodyPr/>
+                    <a:lstStyle/>
+                    <a:p>
+                      <a:pPr algn="ctr"/>
+                      <a:r>
+                        <a:rPr sz="1300" b="1">
+                          <a:solidFill>
+                            <a:srgbClr val="FFFFFF"/>
+                          </a:solidFill>
+                        </a:rPr>
+                        <a:t>Ação Rápida</a:t>
+                      </a:r>
+                    </a:p>
+                  </a:txBody>
+                  <a:tcPr marL="109728" marR="109728" marT="36576" marB="36576" anchor="ctr">
+                    <a:solidFill>
+                      <a:srgbClr val="C7000B"/>
+                    </a:solidFill>
+                  </a:tcPr>
+                </a:tc>
+              </a:tr>
+              <a:tr h="347472">
+                <a:tc>
+                  <a:txBody>
+                    <a:bodyPr/>
+                    <a:lstStyle/>
+                    <a:p>
+                      <a:r>
+                        <a:rPr sz="1100" b="1">
+                          <a:solidFill>
+                            <a:srgbClr val="1F2328"/>
+                          </a:solidFill>
+                        </a:rPr>
+                        <a:t>VM não liga</a:t>
+                      </a:r>
+                    </a:p>
+                  </a:txBody>
+                  <a:tcPr marL="109728" marR="109728" marT="27432" marB="27432" anchor="ctr">
+                    <a:solidFill>
+                      <a:srgbClr val="F6F8FA"/>
+                    </a:solidFill>
+                  </a:tcPr>
+                </a:tc>
+                <a:tc>
+                  <a:txBody>
+                    <a:bodyPr/>
+                    <a:lstStyle/>
+                    <a:p>
+                      <a:r>
+                        <a:rPr sz="1100">
+                          <a:solidFill>
+                            <a:srgbClr val="1F2328"/>
+                          </a:solidFill>
+                        </a:rPr>
+                        <a:t>Status: ERROR</a:t>
+                      </a:r>
+                    </a:p>
+                  </a:txBody>
+                  <a:tcPr marL="109728" marR="109728" marT="27432" marB="27432" anchor="ctr">
+                    <a:solidFill>
+                      <a:srgbClr val="F6F8FA"/>
+                    </a:solidFill>
+                  </a:tcPr>
+                </a:tc>
+                <a:tc>
+                  <a:txBody>
+                    <a:bodyPr/>
+                    <a:lstStyle/>
+                    <a:p>
+                      <a:r>
+                        <a:rPr sz="1100">
+                          <a:solidFill>
+                            <a:srgbClr val="1F2328"/>
+                          </a:solidFill>
+                        </a:rPr>
+                        <a:t>Verificar quotas, disco, rede</a:t>
+                      </a:r>
+                    </a:p>
+                  </a:txBody>
+                  <a:tcPr marL="109728" marR="109728" marT="27432" marB="27432" anchor="ctr">
+                    <a:solidFill>
+                      <a:srgbClr val="F6F8FA"/>
+                    </a:solidFill>
+                  </a:tcPr>
+                </a:tc>
+              </a:tr>
+              <a:tr h="347472">
+                <a:tc>
+                  <a:txBody>
+                    <a:bodyPr/>
+                    <a:lstStyle/>
+                    <a:p>
+                      <a:r>
+                        <a:rPr sz="1100" b="1">
+                          <a:solidFill>
+                            <a:srgbClr val="1F2328"/>
+                          </a:solidFill>
+                        </a:rPr>
+                        <a:t>Disco cheio</a:t>
+                      </a:r>
+                    </a:p>
+                  </a:txBody>
+                  <a:tcPr marL="109728" marR="109728" marT="27432" marB="27432" anchor="ctr">
+                    <a:solidFill>
+                      <a:srgbClr val="FFFFFF"/>
+                    </a:solidFill>
+                  </a:tcPr>
+                </a:tc>
+                <a:tc>
+                  <a:txBody>
+                    <a:bodyPr/>
+                    <a:lstStyle/>
+                    <a:p>
+                      <a:r>
+                        <a:rPr sz="1100">
+                          <a:solidFill>
+                            <a:srgbClr val="1F2328"/>
+                          </a:solidFill>
+                        </a:rPr>
+                        <a:t>Alerta &gt; 90%</a:t>
+                      </a:r>
+                    </a:p>
+                  </a:txBody>
+                  <a:tcPr marL="109728" marR="109728" marT="27432" marB="27432" anchor="ctr">
+                    <a:solidFill>
+                      <a:srgbClr val="FFFFFF"/>
+                    </a:solidFill>
+                  </a:tcPr>
+                </a:tc>
+                <a:tc>
+                  <a:txBody>
+                    <a:bodyPr/>
+                    <a:lstStyle/>
+                    <a:p>
+                      <a:r>
+                        <a:rPr sz="1100">
+                          <a:solidFill>
+                            <a:srgbClr val="1F2328"/>
+                          </a:solidFill>
+                        </a:rPr>
+                        <a:t>Limpar logs, expandir EVS</a:t>
+                      </a:r>
+                    </a:p>
+                  </a:txBody>
+                  <a:tcPr marL="109728" marR="109728" marT="27432" marB="27432" anchor="ctr">
+                    <a:solidFill>
+                      <a:srgbClr val="FFFFFF"/>
+                    </a:solidFill>
+                  </a:tcPr>
+                </a:tc>
+              </a:tr>
+              <a:tr h="347472">
+                <a:tc>
+                  <a:txBody>
+                    <a:bodyPr/>
+                    <a:lstStyle/>
+                    <a:p>
+                      <a:r>
+                        <a:rPr sz="1100" b="1">
+                          <a:solidFill>
+                            <a:srgbClr val="1F2328"/>
+                          </a:solidFill>
+                        </a:rPr>
+                        <a:t>Sem rede</a:t>
+                      </a:r>
+                    </a:p>
+                  </a:txBody>
+                  <a:tcPr marL="109728" marR="109728" marT="27432" marB="27432" anchor="ctr">
+                    <a:solidFill>
+                      <a:srgbClr val="F6F8FA"/>
+                    </a:solidFill>
+                  </a:tcPr>
+                </a:tc>
+                <a:tc>
+                  <a:txBody>
+                    <a:bodyPr/>
+                    <a:lstStyle/>
+                    <a:p>
+                      <a:r>
+                        <a:rPr sz="1100">
+                          <a:solidFill>
+                            <a:srgbClr val="1F2328"/>
+                          </a:solidFill>
+                        </a:rPr>
+                        <a:t>Ping falha</a:t>
+                      </a:r>
+                    </a:p>
+                  </a:txBody>
+                  <a:tcPr marL="109728" marR="109728" marT="27432" marB="27432" anchor="ctr">
+                    <a:solidFill>
+                      <a:srgbClr val="F6F8FA"/>
+                    </a:solidFill>
+                  </a:tcPr>
+                </a:tc>
+                <a:tc>
+                  <a:txBody>
+                    <a:bodyPr/>
+                    <a:lstStyle/>
+                    <a:p>
+                      <a:r>
+                        <a:rPr sz="1100">
+                          <a:solidFill>
+                            <a:srgbClr val="1F2328"/>
+                          </a:solidFill>
+                        </a:rPr>
+                        <a:t>Verificar VPC, EIP, SG</a:t>
+                      </a:r>
+                    </a:p>
+                  </a:txBody>
+                  <a:tcPr marL="109728" marR="109728" marT="27432" marB="27432" anchor="ctr">
+                    <a:solidFill>
+                      <a:srgbClr val="F6F8FA"/>
+                    </a:solidFill>
+                  </a:tcPr>
+                </a:tc>
+              </a:tr>
+              <a:tr h="347472">
+                <a:tc>
+                  <a:txBody>
+                    <a:bodyPr/>
+                    <a:lstStyle/>
+                    <a:p>
+                      <a:r>
+                        <a:rPr sz="1100" b="1">
+                          <a:solidFill>
+                            <a:srgbClr val="1F2328"/>
+                          </a:solidFill>
+                        </a:rPr>
+                        <a:t>ELB unhealthy</a:t>
+                      </a:r>
+                    </a:p>
+                  </a:txBody>
+                  <a:tcPr marL="109728" marR="109728" marT="27432" marB="27432" anchor="ctr">
+                    <a:solidFill>
+                      <a:srgbClr val="FFFFFF"/>
+                    </a:solidFill>
+                  </a:tcPr>
+                </a:tc>
+                <a:tc>
+                  <a:txBody>
+                    <a:bodyPr/>
+                    <a:lstStyle/>
+                    <a:p>
+                      <a:r>
+                        <a:rPr sz="1100">
+                          <a:solidFill>
+                            <a:srgbClr val="1F2328"/>
+                          </a:solidFill>
+                        </a:rPr>
+                        <a:t>Backend down</a:t>
+                      </a:r>
+                    </a:p>
+                  </a:txBody>
+                  <a:tcPr marL="109728" marR="109728" marT="27432" marB="27432" anchor="ctr">
+                    <a:solidFill>
+                      <a:srgbClr val="FFFFFF"/>
+                    </a:solidFill>
+                  </a:tcPr>
+                </a:tc>
+                <a:tc>
+                  <a:txBody>
+                    <a:bodyPr/>
+                    <a:lstStyle/>
+                    <a:p>
+                      <a:r>
+                        <a:rPr sz="1100">
+                          <a:solidFill>
+                            <a:srgbClr val="1F2328"/>
+                          </a:solidFill>
+                        </a:rPr>
+                        <a:t>Verificar health check, porta</a:t>
+                      </a:r>
+                    </a:p>
+                  </a:txBody>
+                  <a:tcPr marL="109728" marR="109728" marT="27432" marB="27432" anchor="ctr">
+                    <a:solidFill>
+                      <a:srgbClr val="FFFFFF"/>
+                    </a:solidFill>
+                  </a:tcPr>
+                </a:tc>
+              </a:tr>
+              <a:tr h="347472">
+                <a:tc>
+                  <a:txBody>
+                    <a:bodyPr/>
+                    <a:lstStyle/>
+                    <a:p>
+                      <a:r>
+                        <a:rPr sz="1100" b="1">
+                          <a:solidFill>
+                            <a:srgbClr val="1F2328"/>
+                          </a:solidFill>
+                        </a:rPr>
+                        <a:t>RDS lento</a:t>
+                      </a:r>
+                    </a:p>
+                  </a:txBody>
+                  <a:tcPr marL="109728" marR="109728" marT="27432" marB="27432" anchor="ctr">
+                    <a:solidFill>
+                      <a:srgbClr val="F6F8FA"/>
+                    </a:solidFill>
+                  </a:tcPr>
+                </a:tc>
+                <a:tc>
+                  <a:txBody>
+                    <a:bodyPr/>
+                    <a:lstStyle/>
+                    <a:p>
+                      <a:r>
+                        <a:rPr sz="1100">
+                          <a:solidFill>
+                            <a:srgbClr val="1F2328"/>
+                          </a:solidFill>
+                        </a:rPr>
+                        <a:t>Query timeout</a:t>
+                      </a:r>
+                    </a:p>
+                  </a:txBody>
+                  <a:tcPr marL="109728" marR="109728" marT="27432" marB="27432" anchor="ctr">
+                    <a:solidFill>
+                      <a:srgbClr val="F6F8FA"/>
+                    </a:solidFill>
+                  </a:tcPr>
+                </a:tc>
+                <a:tc>
+                  <a:txBody>
+                    <a:bodyPr/>
+                    <a:lstStyle/>
+                    <a:p>
+                      <a:r>
+                        <a:rPr sz="1100">
+                          <a:solidFill>
+                            <a:srgbClr val="1F2328"/>
+                          </a:solidFill>
+                        </a:rPr>
+                        <a:t>Verificar slow log, índices</a:t>
+                      </a:r>
+                    </a:p>
+                  </a:txBody>
+                  <a:tcPr marL="109728" marR="109728" marT="27432" marB="27432" anchor="ctr">
+                    <a:solidFill>
+                      <a:srgbClr val="F6F8FA"/>
+                    </a:solidFill>
+                  </a:tcPr>
+                </a:tc>
+              </a:tr>
+              <a:tr h="347472">
+                <a:tc>
+                  <a:txBody>
+                    <a:bodyPr/>
+                    <a:lstStyle/>
+                    <a:p>
+                      <a:r>
+                        <a:rPr sz="1100" b="1">
+                          <a:solidFill>
+                            <a:srgbClr val="1F2328"/>
+                          </a:solidFill>
+                        </a:rPr>
+                        <a:t>OBS 403</a:t>
+                      </a:r>
+                    </a:p>
+                  </a:txBody>
+                  <a:tcPr marL="109728" marR="109728" marT="27432" marB="27432" anchor="ctr">
+                    <a:solidFill>
+                      <a:srgbClr val="FFFFFF"/>
+                    </a:solidFill>
+                  </a:tcPr>
+                </a:tc>
+                <a:tc>
+                  <a:txBody>
+                    <a:bodyPr/>
+                    <a:lstStyle/>
+                    <a:p>
+                      <a:r>
+                        <a:rPr sz="1100">
+                          <a:solidFill>
+                            <a:srgbClr val="1F2328"/>
+                          </a:solidFill>
+                        </a:rPr>
+                        <a:t>Access denied</a:t>
+                      </a:r>
+                    </a:p>
+                  </a:txBody>
+                  <a:tcPr marL="109728" marR="109728" marT="27432" marB="27432" anchor="ctr">
+                    <a:solidFill>
+                      <a:srgbClr val="FFFFFF"/>
+                    </a:solidFill>
+                  </a:tcPr>
+                </a:tc>
+                <a:tc>
+                  <a:txBody>
+                    <a:bodyPr/>
+                    <a:lstStyle/>
+                    <a:p>
+                      <a:r>
+                        <a:rPr sz="1100">
+                          <a:solidFill>
+                            <a:srgbClr val="1F2328"/>
+                          </a:solidFill>
+                        </a:rPr>
+                        <a:t>Verificar AK/SK, policy IAM</a:t>
+                      </a:r>
+                    </a:p>
+                  </a:txBody>
+                  <a:tcPr marL="109728" marR="109728" marT="27432" marB="27432" anchor="ctr">
+                    <a:solidFill>
+                      <a:srgbClr val="FFFFFF"/>
+                    </a:solidFill>
+                  </a:tcPr>
+                </a:tc>
+              </a:tr>
+            </a:tbl>
+          </a:graphicData>
+        </a:graphic>
+      </p:graphicFrame>
     </p:spTree>
   </p:cSld>
   <p:clrMapOvr>
@@ -13328,7 +15252,7 @@
 </p:sld>
 </file>
 
-<file path=ppt/slides/slide3.xml><?xml version="1.0" encoding="utf-8"?>
+<file path=ppt/slides/slide26.xml><?xml version="1.0" encoding="utf-8"?>
 <p:sld xmlns:a="http://schemas.openxmlformats.org/drawingml/2006/main" xmlns:p="http://schemas.openxmlformats.org/presentationml/2006/main" xmlns:r="http://schemas.openxmlformats.org/officeDocument/2006/relationships">
   <p:cSld>
     <p:spTree>
@@ -13350,7 +15274,7 @@
         </p:nvSpPr>
         <p:spPr>
           <a:xfrm>
-            <a:off x="0" y="320040"/>
+            <a:off x="731520" y="502920"/>
           </a:xfrm>
         </p:spPr>
         <p:txBody>
@@ -13388,6 +15312,860 @@
                   <a:srgbClr val="C7000B"/>
                 </a:solidFill>
               </a:rPr>
+              <a:t>Melhores Práticas</a:t>
+            </a:r>
+          </a:p>
+        </p:txBody>
+      </p:sp>
+      <p:sp>
+        <p:nvSpPr>
+          <p:cNvPr id="4" name="TextBox 3"/>
+          <p:cNvSpPr txBox="1"/>
+          <p:nvPr/>
+        </p:nvSpPr>
+        <p:spPr>
+          <a:xfrm>
+            <a:off x="731520" y="3474720"/>
+            <a:ext cx="10698480" cy="914400"/>
+          </a:xfrm>
+          <a:prstGeom prst="rect">
+            <a:avLst/>
+          </a:prstGeom>
+          <a:noFill/>
+        </p:spPr>
+        <p:txBody>
+          <a:bodyPr wrap="square">
+            <a:noAutofit/>
+          </a:bodyPr>
+          <a:lstStyle/>
+          <a:p>
+            <a:pPr algn="ctr"/>
+            <a:r>
+              <a:rPr sz="1800" b="0">
+                <a:solidFill>
+                  <a:srgbClr val="666666"/>
+                </a:solidFill>
+              </a:rPr>
+              <a:t>Checklist e recursos</a:t>
+            </a:r>
+          </a:p>
+        </p:txBody>
+      </p:sp>
+    </p:spTree>
+  </p:cSld>
+  <p:clrMapOvr>
+    <a:masterClrMapping/>
+  </p:clrMapOvr>
+</p:sld>
+</file>
+
+<file path=ppt/slides/slide27.xml><?xml version="1.0" encoding="utf-8"?>
+<p:sld xmlns:a="http://schemas.openxmlformats.org/drawingml/2006/main" xmlns:p="http://schemas.openxmlformats.org/presentationml/2006/main" xmlns:r="http://schemas.openxmlformats.org/officeDocument/2006/relationships">
+  <p:cSld>
+    <p:spTree>
+      <p:nvGrpSpPr>
+        <p:cNvPr id="1" name=""/>
+        <p:cNvGrpSpPr/>
+        <p:nvPr/>
+      </p:nvGrpSpPr>
+      <p:grpSpPr/>
+      <p:sp>
+        <p:nvSpPr>
+          <p:cNvPr id="2" name="Title 1"/>
+          <p:cNvSpPr>
+            <a:spLocks noGrp="1"/>
+          </p:cNvSpPr>
+          <p:nvPr>
+            <p:ph type="title"/>
+          </p:nvPr>
+        </p:nvSpPr>
+        <p:spPr>
+          <a:xfrm>
+            <a:off x="731520" y="502920"/>
+          </a:xfrm>
+        </p:spPr>
+        <p:txBody>
+          <a:bodyPr/>
+          <a:lstStyle/>
+          <a:p>
+            <a:r>
+              <a:rPr sz="2400" b="1">
+                <a:solidFill>
+                  <a:srgbClr val="C7000B"/>
+                </a:solidFill>
+              </a:rPr>
+              <a:t>O Que Fazer e O Que Não Fazer</a:t>
+            </a:r>
+          </a:p>
+        </p:txBody>
+      </p:sp>
+      <p:sp>
+        <p:nvSpPr>
+          <p:cNvPr id="3" name="TextBox 2"/>
+          <p:cNvSpPr txBox="1"/>
+          <p:nvPr/>
+        </p:nvSpPr>
+        <p:spPr>
+          <a:xfrm>
+            <a:off x="731520" y="1645920"/>
+            <a:ext cx="10698480" cy="448056"/>
+          </a:xfrm>
+          <a:prstGeom prst="rect">
+            <a:avLst/>
+          </a:prstGeom>
+          <a:noFill/>
+          <a:solidFill>
+            <a:srgbClr val="FDF8EE"/>
+          </a:solidFill>
+        </p:spPr>
+        <p:txBody>
+          <a:bodyPr wrap="square">
+            <a:noAutofit/>
+          </a:bodyPr>
+          <a:lstStyle/>
+          <a:p>
+            <a:r>
+              <a:rPr sz="1400" b="1">
+                <a:solidFill>
+                  <a:srgbClr val="1F2328"/>
+                </a:solidFill>
+              </a:rPr>
+              <a:t>⚠  </a:t>
+            </a:r>
+            <a:r>
+              <a:rPr sz="1200" b="0">
+                <a:solidFill>
+                  <a:srgbClr val="1F2328"/>
+                </a:solidFill>
+              </a:rPr>
+              <a:t>Nunca solicitar ou aceitar credenciais do cliente. Oriente ao autoatendimento.</a:t>
+            </a:r>
+          </a:p>
+        </p:txBody>
+      </p:sp>
+      <p:sp>
+        <p:nvSpPr>
+          <p:cNvPr id="4" name="TextBox 3"/>
+          <p:cNvSpPr txBox="1"/>
+          <p:nvPr/>
+        </p:nvSpPr>
+        <p:spPr>
+          <a:xfrm>
+            <a:off x="731520" y="2468880"/>
+            <a:ext cx="10698480" cy="448056"/>
+          </a:xfrm>
+          <a:prstGeom prst="rect">
+            <a:avLst/>
+          </a:prstGeom>
+          <a:noFill/>
+          <a:solidFill>
+            <a:srgbClr val="EDF6ED"/>
+          </a:solidFill>
+        </p:spPr>
+        <p:txBody>
+          <a:bodyPr wrap="square">
+            <a:noAutofit/>
+          </a:bodyPr>
+          <a:lstStyle/>
+          <a:p>
+            <a:r>
+              <a:rPr sz="1400" b="1">
+                <a:solidFill>
+                  <a:srgbClr val="1F2328"/>
+                </a:solidFill>
+              </a:rPr>
+              <a:t>✓  </a:t>
+            </a:r>
+            <a:r>
+              <a:rPr sz="1200" b="0">
+                <a:solidFill>
+                  <a:srgbClr val="1F2328"/>
+                </a:solidFill>
+              </a:rPr>
+              <a:t>Sempre confirmar o nome exato do serviço e recurso antes de prosseguir.</a:t>
+            </a:r>
+          </a:p>
+        </p:txBody>
+      </p:sp>
+      <p:sp>
+        <p:nvSpPr>
+          <p:cNvPr id="5" name="TextBox 4"/>
+          <p:cNvSpPr txBox="1"/>
+          <p:nvPr/>
+        </p:nvSpPr>
+        <p:spPr>
+          <a:xfrm>
+            <a:off x="731520" y="3291839"/>
+            <a:ext cx="10698480" cy="448056"/>
+          </a:xfrm>
+          <a:prstGeom prst="rect">
+            <a:avLst/>
+          </a:prstGeom>
+          <a:noFill/>
+          <a:solidFill>
+            <a:srgbClr val="EDF3F9"/>
+          </a:solidFill>
+        </p:spPr>
+        <p:txBody>
+          <a:bodyPr wrap="square">
+            <a:noAutofit/>
+          </a:bodyPr>
+          <a:lstStyle/>
+          <a:p>
+            <a:r>
+              <a:rPr sz="1400" b="1">
+                <a:solidFill>
+                  <a:srgbClr val="1F2328"/>
+                </a:solidFill>
+              </a:rPr>
+              <a:t>ℹ  </a:t>
+            </a:r>
+            <a:r>
+              <a:rPr sz="1200" b="0">
+                <a:solidFill>
+                  <a:srgbClr val="1F2328"/>
+                </a:solidFill>
+              </a:rPr>
+              <a:t>Documentar cada passo do troubleshooting no SR para rastreabilidade.</a:t>
+            </a:r>
+          </a:p>
+        </p:txBody>
+      </p:sp>
+      <p:sp>
+        <p:nvSpPr>
+          <p:cNvPr id="6" name="TextBox 5"/>
+          <p:cNvSpPr txBox="1"/>
+          <p:nvPr/>
+        </p:nvSpPr>
+        <p:spPr>
+          <a:xfrm>
+            <a:off x="731520" y="4114800"/>
+            <a:ext cx="10698480" cy="448056"/>
+          </a:xfrm>
+          <a:prstGeom prst="rect">
+            <a:avLst/>
+          </a:prstGeom>
+          <a:noFill/>
+          <a:solidFill>
+            <a:srgbClr val="FDF8EE"/>
+          </a:solidFill>
+        </p:spPr>
+        <p:txBody>
+          <a:bodyPr wrap="square">
+            <a:noAutofit/>
+          </a:bodyPr>
+          <a:lstStyle/>
+          <a:p>
+            <a:r>
+              <a:rPr sz="1400" b="1">
+                <a:solidFill>
+                  <a:srgbClr val="1F2328"/>
+                </a:solidFill>
+              </a:rPr>
+              <a:t>⚠  </a:t>
+            </a:r>
+            <a:r>
+              <a:rPr sz="1200" b="0">
+                <a:solidFill>
+                  <a:srgbClr val="1F2328"/>
+                </a:solidFill>
+              </a:rPr>
+              <a:t>Não aplicar workaround em produção sem janela de manutenção aprovada.</a:t>
+            </a:r>
+          </a:p>
+        </p:txBody>
+      </p:sp>
+      <p:sp>
+        <p:nvSpPr>
+          <p:cNvPr id="7" name="TextBox 6"/>
+          <p:cNvSpPr txBox="1"/>
+          <p:nvPr/>
+        </p:nvSpPr>
+        <p:spPr>
+          <a:xfrm>
+            <a:off x="731520" y="4937760"/>
+            <a:ext cx="10698480" cy="448056"/>
+          </a:xfrm>
+          <a:prstGeom prst="rect">
+            <a:avLst/>
+          </a:prstGeom>
+          <a:noFill/>
+          <a:solidFill>
+            <a:srgbClr val="EDF6ED"/>
+          </a:solidFill>
+        </p:spPr>
+        <p:txBody>
+          <a:bodyPr wrap="square">
+            <a:noAutofit/>
+          </a:bodyPr>
+          <a:lstStyle/>
+          <a:p>
+            <a:r>
+              <a:rPr sz="1400" b="1">
+                <a:solidFill>
+                  <a:srgbClr val="1F2328"/>
+                </a:solidFill>
+              </a:rPr>
+              <a:t>✓  </a:t>
+            </a:r>
+            <a:r>
+              <a:rPr sz="1200" b="0">
+                <a:solidFill>
+                  <a:srgbClr val="1F2328"/>
+                </a:solidFill>
+              </a:rPr>
+              <a:t>Usar o template de SR oficial ao notificar o TAC Team.</a:t>
+            </a:r>
+          </a:p>
+        </p:txBody>
+      </p:sp>
+    </p:spTree>
+  </p:cSld>
+  <p:clrMapOvr>
+    <a:masterClrMapping/>
+  </p:clrMapOvr>
+</p:sld>
+</file>
+
+<file path=ppt/slides/slide28.xml><?xml version="1.0" encoding="utf-8"?>
+<p:sld xmlns:a="http://schemas.openxmlformats.org/drawingml/2006/main" xmlns:p="http://schemas.openxmlformats.org/presentationml/2006/main" xmlns:r="http://schemas.openxmlformats.org/officeDocument/2006/relationships">
+  <p:cSld>
+    <p:spTree>
+      <p:nvGrpSpPr>
+        <p:cNvPr id="1" name=""/>
+        <p:cNvGrpSpPr/>
+        <p:nvPr/>
+      </p:nvGrpSpPr>
+      <p:grpSpPr/>
+      <p:sp>
+        <p:nvSpPr>
+          <p:cNvPr id="2" name="Title 1"/>
+          <p:cNvSpPr>
+            <a:spLocks noGrp="1"/>
+          </p:cNvSpPr>
+          <p:nvPr>
+            <p:ph type="title"/>
+          </p:nvPr>
+        </p:nvSpPr>
+        <p:spPr>
+          <a:xfrm>
+            <a:off x="731520" y="502920"/>
+          </a:xfrm>
+        </p:spPr>
+        <p:txBody>
+          <a:bodyPr/>
+          <a:lstStyle/>
+          <a:p>
+            <a:r>
+              <a:rPr sz="2400" b="1">
+                <a:solidFill>
+                  <a:srgbClr val="C7000B"/>
+                </a:solidFill>
+              </a:rPr>
+              <a:t>Recursos de Autoatendimento</a:t>
+            </a:r>
+          </a:p>
+        </p:txBody>
+      </p:sp>
+      <p:sp>
+        <p:nvSpPr>
+          <p:cNvPr id="3" name="TextBox 2"/>
+          <p:cNvSpPr txBox="1"/>
+          <p:nvPr/>
+        </p:nvSpPr>
+        <p:spPr>
+          <a:xfrm>
+            <a:off x="731520" y="1554480"/>
+            <a:ext cx="10698480" cy="4114800"/>
+          </a:xfrm>
+          <a:prstGeom prst="rect">
+            <a:avLst/>
+          </a:prstGeom>
+          <a:noFill/>
+        </p:spPr>
+        <p:txBody>
+          <a:bodyPr wrap="square">
+            <a:noAutofit/>
+          </a:bodyPr>
+          <a:lstStyle/>
+          <a:p>
+            <a:pPr algn="l"/>
+            <a:r>
+              <a:rPr sz="1400" b="0">
+                <a:solidFill>
+                  <a:srgbClr val="1F2328"/>
+                </a:solidFill>
+              </a:rPr>
+              <a:t>Direcionar clientes para:</a:t>
+            </a:r>
+          </a:p>
+          <a:p>
+            <a:pPr algn="l">
+              <a:spcBef>
+                <a:spcPts val="400"/>
+              </a:spcBef>
+            </a:pPr>
+            <a:r>
+              <a:rPr sz="1400" b="0">
+                <a:solidFill>
+                  <a:srgbClr val="1F2328"/>
+                </a:solidFill>
+              </a:rPr>
+              <a:t/>
+            </a:r>
+          </a:p>
+          <a:p>
+            <a:pPr algn="l">
+              <a:spcBef>
+                <a:spcPts val="400"/>
+              </a:spcBef>
+            </a:pPr>
+            <a:r>
+              <a:rPr sz="1400" b="0">
+                <a:solidFill>
+                  <a:srgbClr val="1F2328"/>
+                </a:solidFill>
+              </a:rPr>
+              <a:t>  • ServiceCenter — portal de autoserviço</a:t>
+            </a:r>
+          </a:p>
+          <a:p>
+            <a:pPr algn="l">
+              <a:spcBef>
+                <a:spcPts val="400"/>
+              </a:spcBef>
+            </a:pPr>
+            <a:r>
+              <a:rPr sz="1400" b="0">
+                <a:solidFill>
+                  <a:srgbClr val="1F2328"/>
+                </a:solidFill>
+              </a:rPr>
+              <a:t>  • Documentação HCS — docs.huaweicloud.com</a:t>
+            </a:r>
+          </a:p>
+          <a:p>
+            <a:pPr algn="l">
+              <a:spcBef>
+                <a:spcPts val="400"/>
+              </a:spcBef>
+            </a:pPr>
+            <a:r>
+              <a:rPr sz="1400" b="0">
+                <a:solidFill>
+                  <a:srgbClr val="1F2328"/>
+                </a:solidFill>
+              </a:rPr>
+              <a:t>  • Knowledge Base — artigos de troubleshooting</a:t>
+            </a:r>
+          </a:p>
+          <a:p>
+            <a:pPr algn="l">
+              <a:spcBef>
+                <a:spcPts val="400"/>
+              </a:spcBef>
+            </a:pPr>
+            <a:r>
+              <a:rPr sz="1400" b="0">
+                <a:solidFill>
+                  <a:srgbClr val="1F2328"/>
+                </a:solidFill>
+              </a:rPr>
+              <a:t>  • Status Page — status dos serviços</a:t>
+            </a:r>
+          </a:p>
+          <a:p>
+            <a:pPr algn="l">
+              <a:spcBef>
+                <a:spcPts val="400"/>
+              </a:spcBef>
+            </a:pPr>
+            <a:r>
+              <a:rPr sz="1400" b="0">
+                <a:solidFill>
+                  <a:srgbClr val="1F2328"/>
+                </a:solidFill>
+              </a:rPr>
+              <a:t>  • Forum — comunidade técnica</a:t>
+            </a:r>
+          </a:p>
+          <a:p>
+            <a:pPr algn="l">
+              <a:spcBef>
+                <a:spcPts val="400"/>
+              </a:spcBef>
+            </a:pPr>
+            <a:r>
+              <a:rPr sz="1400" b="0">
+                <a:solidFill>
+                  <a:srgbClr val="1F2328"/>
+                </a:solidFill>
+              </a:rPr>
+              <a:t/>
+            </a:r>
+          </a:p>
+          <a:p>
+            <a:pPr algn="l">
+              <a:spcBef>
+                <a:spcPts val="400"/>
+              </a:spcBef>
+            </a:pPr>
+            <a:r>
+              <a:rPr sz="1400" b="0">
+                <a:solidFill>
+                  <a:srgbClr val="1F2328"/>
+                </a:solidFill>
+              </a:rPr>
+              <a:t>Benefícios:</a:t>
+            </a:r>
+          </a:p>
+          <a:p>
+            <a:pPr algn="l">
+              <a:spcBef>
+                <a:spcPts val="400"/>
+              </a:spcBef>
+            </a:pPr>
+            <a:r>
+              <a:rPr sz="1400" b="0">
+                <a:solidFill>
+                  <a:srgbClr val="1F2328"/>
+                </a:solidFill>
+              </a:rPr>
+              <a:t>  • Reduz volume de SRs de baixa severidade</a:t>
+            </a:r>
+          </a:p>
+          <a:p>
+            <a:pPr algn="l">
+              <a:spcBef>
+                <a:spcPts val="400"/>
+              </a:spcBef>
+            </a:pPr>
+            <a:r>
+              <a:rPr sz="1400" b="0">
+                <a:solidFill>
+                  <a:srgbClr val="1F2328"/>
+                </a:solidFill>
+              </a:rPr>
+              <a:t>  • Cliente resolve mais rápido</a:t>
+            </a:r>
+          </a:p>
+          <a:p>
+            <a:pPr algn="l">
+              <a:spcBef>
+                <a:spcPts val="400"/>
+              </a:spcBef>
+            </a:pPr>
+            <a:r>
+              <a:rPr sz="1400" b="0">
+                <a:solidFill>
+                  <a:srgbClr val="1F2328"/>
+                </a:solidFill>
+              </a:rPr>
+              <a:t>  • Hotline foca em S1/S2</a:t>
+            </a:r>
+          </a:p>
+        </p:txBody>
+      </p:sp>
+    </p:spTree>
+  </p:cSld>
+  <p:clrMapOvr>
+    <a:masterClrMapping/>
+  </p:clrMapOvr>
+</p:sld>
+</file>
+
+<file path=ppt/slides/slide29.xml><?xml version="1.0" encoding="utf-8"?>
+<p:sld xmlns:a="http://schemas.openxmlformats.org/drawingml/2006/main" xmlns:p="http://schemas.openxmlformats.org/presentationml/2006/main" xmlns:r="http://schemas.openxmlformats.org/officeDocument/2006/relationships">
+  <p:cSld>
+    <p:spTree>
+      <p:nvGrpSpPr>
+        <p:cNvPr id="1" name=""/>
+        <p:cNvGrpSpPr/>
+        <p:nvPr/>
+      </p:nvGrpSpPr>
+      <p:grpSpPr/>
+      <p:sp>
+        <p:nvSpPr>
+          <p:cNvPr id="2" name="Title 1"/>
+          <p:cNvSpPr>
+            <a:spLocks noGrp="1"/>
+          </p:cNvSpPr>
+          <p:nvPr>
+            <p:ph type="title"/>
+          </p:nvPr>
+        </p:nvSpPr>
+        <p:spPr>
+          <a:xfrm>
+            <a:off x="731520" y="502920"/>
+          </a:xfrm>
+        </p:spPr>
+        <p:txBody>
+          <a:bodyPr/>
+          <a:lstStyle/>
+          <a:p>
+            <a:r>
+              <a:rPr sz="2400" b="1">
+                <a:solidFill>
+                  <a:srgbClr val="C7000B"/>
+                </a:solidFill>
+              </a:rPr>
+              <a:t>Checklist de Validação do SR</a:t>
+            </a:r>
+          </a:p>
+        </p:txBody>
+      </p:sp>
+      <p:sp>
+        <p:nvSpPr>
+          <p:cNvPr id="3" name="TextBox 2"/>
+          <p:cNvSpPr txBox="1"/>
+          <p:nvPr/>
+        </p:nvSpPr>
+        <p:spPr>
+          <a:xfrm>
+            <a:off x="731520" y="1554480"/>
+            <a:ext cx="10698480" cy="4114800"/>
+          </a:xfrm>
+          <a:prstGeom prst="rect">
+            <a:avLst/>
+          </a:prstGeom>
+          <a:noFill/>
+        </p:spPr>
+        <p:txBody>
+          <a:bodyPr wrap="square">
+            <a:noAutofit/>
+          </a:bodyPr>
+          <a:lstStyle/>
+          <a:p>
+            <a:pPr algn="l"/>
+            <a:r>
+              <a:rPr sz="1400" b="0">
+                <a:solidFill>
+                  <a:srgbClr val="1F2328"/>
+                </a:solidFill>
+              </a:rPr>
+              <a:t>Antes de fechar qualquer SR, validar:</a:t>
+            </a:r>
+          </a:p>
+          <a:p>
+            <a:pPr algn="l">
+              <a:spcBef>
+                <a:spcPts val="400"/>
+              </a:spcBef>
+            </a:pPr>
+            <a:r>
+              <a:rPr sz="1400" b="0">
+                <a:solidFill>
+                  <a:srgbClr val="1F2328"/>
+                </a:solidFill>
+              </a:rPr>
+              <a:t/>
+            </a:r>
+          </a:p>
+          <a:p>
+            <a:pPr algn="l">
+              <a:spcBef>
+                <a:spcPts val="400"/>
+              </a:spcBef>
+            </a:pPr>
+            <a:r>
+              <a:rPr sz="1400" b="0">
+                <a:solidFill>
+                  <a:srgbClr val="1F2328"/>
+                </a:solidFill>
+              </a:rPr>
+              <a:t>  [ ] Identidade do solicitante confirmada</a:t>
+            </a:r>
+          </a:p>
+          <a:p>
+            <a:pPr algn="l">
+              <a:spcBef>
+                <a:spcPts val="400"/>
+              </a:spcBef>
+            </a:pPr>
+            <a:r>
+              <a:rPr sz="1400" b="0">
+                <a:solidFill>
+                  <a:srgbClr val="1F2328"/>
+                </a:solidFill>
+              </a:rPr>
+              <a:t>  [ ] Nome oficial do serviço identificado</a:t>
+            </a:r>
+          </a:p>
+          <a:p>
+            <a:pPr algn="l">
+              <a:spcBef>
+                <a:spcPts val="400"/>
+              </a:spcBef>
+            </a:pPr>
+            <a:r>
+              <a:rPr sz="1400" b="0">
+                <a:solidFill>
+                  <a:srgbClr val="1F2328"/>
+                </a:solidFill>
+              </a:rPr>
+              <a:t>  [ ] Severidade classificada corretamente</a:t>
+            </a:r>
+          </a:p>
+          <a:p>
+            <a:pPr algn="l">
+              <a:spcBef>
+                <a:spcPts val="400"/>
+              </a:spcBef>
+            </a:pPr>
+            <a:r>
+              <a:rPr sz="1400" b="0">
+                <a:solidFill>
+                  <a:srgbClr val="1F2328"/>
+                </a:solidFill>
+              </a:rPr>
+              <a:t>  [ ] TAC Team notificado com template</a:t>
+            </a:r>
+          </a:p>
+          <a:p>
+            <a:pPr algn="l">
+              <a:spcBef>
+                <a:spcPts val="400"/>
+              </a:spcBef>
+            </a:pPr>
+            <a:r>
+              <a:rPr sz="1400" b="0">
+                <a:solidFill>
+                  <a:srgbClr val="1F2328"/>
+                </a:solidFill>
+              </a:rPr>
+              <a:t>  [ ] Diagnóstico documentado no SR</a:t>
+            </a:r>
+          </a:p>
+          <a:p>
+            <a:pPr algn="l">
+              <a:spcBef>
+                <a:spcPts val="400"/>
+              </a:spcBef>
+            </a:pPr>
+            <a:r>
+              <a:rPr sz="1400" b="0">
+                <a:solidFill>
+                  <a:srgbClr val="1F2328"/>
+                </a:solidFill>
+              </a:rPr>
+              <a:t>  [ ] Solução aplicada e verificada</a:t>
+            </a:r>
+          </a:p>
+          <a:p>
+            <a:pPr algn="l">
+              <a:spcBef>
+                <a:spcPts val="400"/>
+              </a:spcBef>
+            </a:pPr>
+            <a:r>
+              <a:rPr sz="1400" b="0">
+                <a:solidFill>
+                  <a:srgbClr val="1F2328"/>
+                </a:solidFill>
+              </a:rPr>
+              <a:t>  [ ] Cliente confirmou a resolução</a:t>
+            </a:r>
+          </a:p>
+          <a:p>
+            <a:pPr algn="l">
+              <a:spcBef>
+                <a:spcPts val="400"/>
+              </a:spcBef>
+            </a:pPr>
+            <a:r>
+              <a:rPr sz="1400" b="0">
+                <a:solidFill>
+                  <a:srgbClr val="1F2328"/>
+                </a:solidFill>
+              </a:rPr>
+              <a:t>  [ ] SR fechado com resolução documentada</a:t>
+            </a:r>
+          </a:p>
+          <a:p>
+            <a:pPr algn="l">
+              <a:spcBef>
+                <a:spcPts val="400"/>
+              </a:spcBef>
+            </a:pPr>
+            <a:r>
+              <a:rPr sz="1400" b="0">
+                <a:solidFill>
+                  <a:srgbClr val="1F2328"/>
+                </a:solidFill>
+              </a:rPr>
+              <a:t>  [ ] Lições aprendidas registradas (se aplicável)</a:t>
+            </a:r>
+          </a:p>
+        </p:txBody>
+      </p:sp>
+    </p:spTree>
+  </p:cSld>
+  <p:clrMapOvr>
+    <a:masterClrMapping/>
+  </p:clrMapOvr>
+</p:sld>
+</file>
+
+<file path=ppt/slides/slide3.xml><?xml version="1.0" encoding="utf-8"?>
+<p:sld xmlns:a="http://schemas.openxmlformats.org/drawingml/2006/main" xmlns:p="http://schemas.openxmlformats.org/presentationml/2006/main" xmlns:r="http://schemas.openxmlformats.org/officeDocument/2006/relationships">
+  <p:cSld>
+    <p:spTree>
+      <p:nvGrpSpPr>
+        <p:cNvPr id="1" name=""/>
+        <p:cNvGrpSpPr/>
+        <p:nvPr/>
+      </p:nvGrpSpPr>
+      <p:grpSpPr/>
+      <p:sp>
+        <p:nvSpPr>
+          <p:cNvPr id="2" name="Title 1"/>
+          <p:cNvSpPr>
+            <a:spLocks noGrp="1"/>
+          </p:cNvSpPr>
+          <p:nvPr>
+            <p:ph type="title"/>
+          </p:nvPr>
+        </p:nvSpPr>
+        <p:spPr>
+          <a:xfrm>
+            <a:off x="731520" y="502920"/>
+          </a:xfrm>
+        </p:spPr>
+        <p:txBody>
+          <a:bodyPr/>
+          <a:lstStyle/>
+          <a:p/>
+        </p:txBody>
+      </p:sp>
+      <p:sp>
+        <p:nvSpPr>
+          <p:cNvPr id="3" name="TextBox 2"/>
+          <p:cNvSpPr txBox="1"/>
+          <p:nvPr/>
+        </p:nvSpPr>
+        <p:spPr>
+          <a:xfrm>
+            <a:off x="731520" y="2011680"/>
+            <a:ext cx="10698480" cy="1371600"/>
+          </a:xfrm>
+          <a:prstGeom prst="rect">
+            <a:avLst/>
+          </a:prstGeom>
+          <a:noFill/>
+        </p:spPr>
+        <p:txBody>
+          <a:bodyPr wrap="square">
+            <a:noAutofit/>
+          </a:bodyPr>
+          <a:lstStyle/>
+          <a:p>
+            <a:pPr algn="ctr"/>
+            <a:r>
+              <a:rPr sz="4000" b="1">
+                <a:solidFill>
+                  <a:srgbClr val="C7000B"/>
+                </a:solidFill>
+              </a:rPr>
               <a:t>Arquitetura HCS 8.6.1</a:t>
             </a:r>
           </a:p>
@@ -13423,6 +16201,320 @@
                 </a:solidFill>
               </a:rPr>
               <a:t>Plano de Gestão e Plano de Dados</a:t>
+            </a:r>
+          </a:p>
+        </p:txBody>
+      </p:sp>
+    </p:spTree>
+  </p:cSld>
+  <p:clrMapOvr>
+    <a:masterClrMapping/>
+  </p:clrMapOvr>
+</p:sld>
+</file>
+
+<file path=ppt/slides/slide30.xml><?xml version="1.0" encoding="utf-8"?>
+<p:sld xmlns:a="http://schemas.openxmlformats.org/drawingml/2006/main" xmlns:p="http://schemas.openxmlformats.org/presentationml/2006/main" xmlns:r="http://schemas.openxmlformats.org/officeDocument/2006/relationships">
+  <p:cSld>
+    <p:spTree>
+      <p:nvGrpSpPr>
+        <p:cNvPr id="1" name=""/>
+        <p:cNvGrpSpPr/>
+        <p:nvPr/>
+      </p:nvGrpSpPr>
+      <p:grpSpPr/>
+      <p:sp>
+        <p:nvSpPr>
+          <p:cNvPr id="2" name="Title 1"/>
+          <p:cNvSpPr>
+            <a:spLocks noGrp="1"/>
+          </p:cNvSpPr>
+          <p:nvPr>
+            <p:ph type="title"/>
+          </p:nvPr>
+        </p:nvSpPr>
+        <p:spPr>
+          <a:xfrm>
+            <a:off x="731520" y="502920"/>
+          </a:xfrm>
+        </p:spPr>
+        <p:txBody>
+          <a:bodyPr/>
+          <a:lstStyle/>
+          <a:p>
+            <a:r>
+              <a:rPr sz="2400" b="1">
+                <a:solidFill>
+                  <a:srgbClr val="C7000B"/>
+                </a:solidFill>
+              </a:rPr>
+              <a:t>Próximos Passos</a:t>
+            </a:r>
+          </a:p>
+        </p:txBody>
+      </p:sp>
+      <p:sp>
+        <p:nvSpPr>
+          <p:cNvPr id="3" name="TextBox 2"/>
+          <p:cNvSpPr txBox="1"/>
+          <p:nvPr/>
+        </p:nvSpPr>
+        <p:spPr>
+          <a:xfrm>
+            <a:off x="731520" y="1554480"/>
+            <a:ext cx="10698480" cy="4114800"/>
+          </a:xfrm>
+          <a:prstGeom prst="rect">
+            <a:avLst/>
+          </a:prstGeom>
+          <a:noFill/>
+        </p:spPr>
+        <p:txBody>
+          <a:bodyPr wrap="square">
+            <a:noAutofit/>
+          </a:bodyPr>
+          <a:lstStyle/>
+          <a:p>
+            <a:pPr algn="l"/>
+            <a:r>
+              <a:rPr sz="1400" b="0">
+                <a:solidFill>
+                  <a:srgbClr val="1F2328"/>
+                </a:solidFill>
+              </a:rPr>
+              <a:t>Objetivo: equipe autorando conteúdo a partir de 01/09</a:t>
+            </a:r>
+          </a:p>
+          <a:p>
+            <a:pPr algn="l">
+              <a:spcBef>
+                <a:spcPts val="400"/>
+              </a:spcBef>
+            </a:pPr>
+            <a:r>
+              <a:rPr sz="1400" b="0">
+                <a:solidFill>
+                  <a:srgbClr val="1F2328"/>
+                </a:solidFill>
+              </a:rPr>
+              <a:t/>
+            </a:r>
+          </a:p>
+          <a:p>
+            <a:pPr algn="l">
+              <a:spcBef>
+                <a:spcPts val="400"/>
+              </a:spcBef>
+            </a:pPr>
+            <a:r>
+              <a:rPr sz="1400" b="0">
+                <a:solidFill>
+                  <a:srgbClr val="1F2328"/>
+                </a:solidFill>
+              </a:rPr>
+              <a:t>Preparação necessária:</a:t>
+            </a:r>
+          </a:p>
+          <a:p>
+            <a:pPr algn="l">
+              <a:spcBef>
+                <a:spcPts val="400"/>
+              </a:spcBef>
+            </a:pPr>
+            <a:r>
+              <a:rPr sz="1400" b="0">
+                <a:solidFill>
+                  <a:srgbClr val="1F2328"/>
+                </a:solidFill>
+              </a:rPr>
+              <a:t>  1. Revisar este treinamento completo</a:t>
+            </a:r>
+          </a:p>
+          <a:p>
+            <a:pPr algn="l">
+              <a:spcBef>
+                <a:spcPts val="400"/>
+              </a:spcBef>
+            </a:pPr>
+            <a:r>
+              <a:rPr sz="1400" b="0">
+                <a:solidFill>
+                  <a:srgbClr val="1F2328"/>
+                </a:solidFill>
+              </a:rPr>
+              <a:t>  2. Praticar abertura de SRs com template</a:t>
+            </a:r>
+          </a:p>
+          <a:p>
+            <a:pPr algn="l">
+              <a:spcBef>
+                <a:spcPts val="400"/>
+              </a:spcBef>
+            </a:pPr>
+            <a:r>
+              <a:rPr sz="1400" b="0">
+                <a:solidFill>
+                  <a:srgbClr val="1F2328"/>
+                </a:solidFill>
+              </a:rPr>
+              <a:t>  3. Familiarizar com ManageOne e ServiceCenter</a:t>
+            </a:r>
+          </a:p>
+          <a:p>
+            <a:pPr algn="l">
+              <a:spcBef>
+                <a:spcPts val="400"/>
+              </a:spcBef>
+            </a:pPr>
+            <a:r>
+              <a:rPr sz="1400" b="0">
+                <a:solidFill>
+                  <a:srgbClr val="1F2328"/>
+                </a:solidFill>
+              </a:rPr>
+              <a:t>  4. Estudar fluxos ITR e matriz de escalação</a:t>
+            </a:r>
+          </a:p>
+          <a:p>
+            <a:pPr algn="l">
+              <a:spcBef>
+                <a:spcPts val="400"/>
+              </a:spcBef>
+            </a:pPr>
+            <a:r>
+              <a:rPr sz="1400" b="0">
+                <a:solidFill>
+                  <a:srgbClr val="1F2328"/>
+                </a:solidFill>
+              </a:rPr>
+              <a:t>  5. Conhecer acronimos e famílias de serviços</a:t>
+            </a:r>
+          </a:p>
+          <a:p>
+            <a:pPr algn="l">
+              <a:spcBef>
+                <a:spcPts val="400"/>
+              </a:spcBef>
+            </a:pPr>
+            <a:r>
+              <a:rPr sz="1400" b="0">
+                <a:solidFill>
+                  <a:srgbClr val="1F2328"/>
+                </a:solidFill>
+              </a:rPr>
+              <a:t/>
+            </a:r>
+          </a:p>
+          <a:p>
+            <a:pPr algn="l">
+              <a:spcBef>
+                <a:spcPts val="400"/>
+              </a:spcBef>
+            </a:pPr>
+            <a:r>
+              <a:rPr sz="1400" b="0">
+                <a:solidFill>
+                  <a:srgbClr val="1F2328"/>
+                </a:solidFill>
+              </a:rPr>
+              <a:t>Stack alvo: HCS 8.6.1</a:t>
+            </a:r>
+          </a:p>
+        </p:txBody>
+      </p:sp>
+      <p:sp>
+        <p:nvSpPr>
+          <p:cNvPr id="4" name="TextBox 3"/>
+          <p:cNvSpPr txBox="1"/>
+          <p:nvPr/>
+        </p:nvSpPr>
+        <p:spPr>
+          <a:xfrm>
+            <a:off x="731520" y="5303520"/>
+            <a:ext cx="10698480" cy="448056"/>
+          </a:xfrm>
+          <a:prstGeom prst="rect">
+            <a:avLst/>
+          </a:prstGeom>
+          <a:noFill/>
+          <a:solidFill>
+            <a:srgbClr val="EDF6ED"/>
+          </a:solidFill>
+        </p:spPr>
+        <p:txBody>
+          <a:bodyPr wrap="square">
+            <a:noAutofit/>
+          </a:bodyPr>
+          <a:lstStyle/>
+          <a:p>
+            <a:r>
+              <a:rPr sz="1400" b="1">
+                <a:solidFill>
+                  <a:srgbClr val="1F2328"/>
+                </a:solidFill>
+              </a:rPr>
+              <a:t>✓  </a:t>
+            </a:r>
+            <a:r>
+              <a:rPr sz="1200" b="0">
+                <a:solidFill>
+                  <a:srgbClr val="1F2328"/>
+                </a:solidFill>
+              </a:rPr>
+              <a:t>Dúvidas? Consultar a matriz de escalação ou escalar para L2.</a:t>
+            </a:r>
+          </a:p>
+        </p:txBody>
+      </p:sp>
+    </p:spTree>
+  </p:cSld>
+  <p:clrMapOvr>
+    <a:masterClrMapping/>
+  </p:clrMapOvr>
+</p:sld>
+</file>
+
+<file path=ppt/slides/slide31.xml><?xml version="1.0" encoding="utf-8"?>
+<p:sld xmlns:a="http://schemas.openxmlformats.org/drawingml/2006/main" xmlns:p="http://schemas.openxmlformats.org/presentationml/2006/main" xmlns:r="http://schemas.openxmlformats.org/officeDocument/2006/relationships">
+  <p:cSld>
+    <p:spTree>
+      <p:nvGrpSpPr>
+        <p:cNvPr id="1" name=""/>
+        <p:cNvGrpSpPr/>
+        <p:nvPr/>
+      </p:nvGrpSpPr>
+      <p:grpSpPr/>
+      <p:sp>
+        <p:nvSpPr>
+          <p:cNvPr id="2" name="TextBox 1"/>
+          <p:cNvSpPr txBox="1"/>
+          <p:nvPr/>
+        </p:nvSpPr>
+        <p:spPr>
+          <a:xfrm>
+            <a:off x="603504" y="1399032"/>
+            <a:ext cx="3922776" cy="850392"/>
+          </a:xfrm>
+          <a:prstGeom prst="rect">
+            <a:avLst/>
+          </a:prstGeom>
+          <a:noFill/>
+        </p:spPr>
+        <p:txBody>
+          <a:bodyPr wrap="square">
+            <a:noAutofit/>
+          </a:bodyPr>
+          <a:lstStyle/>
+          <a:p>
+            <a:pPr algn="l"/>
+            <a:r>
+              <a:rPr sz="4800" b="0">
+                <a:solidFill>
+                  <a:srgbClr val="1F2328"/>
+                </a:solidFill>
+                <a:latin typeface="Huawei Sans"/>
+              </a:rPr>
+              <a:t>Thank you.</a:t>
             </a:r>
           </a:p>
         </p:txBody>
@@ -13457,7 +16549,7 @@
         </p:nvSpPr>
         <p:spPr>
           <a:xfrm>
-            <a:off x="0" y="320040"/>
+            <a:off x="731520" y="502920"/>
           </a:xfrm>
         </p:spPr>
         <p:txBody>
@@ -13674,7 +16766,7 @@
         </p:nvSpPr>
         <p:spPr>
           <a:xfrm>
-            <a:off x="0" y="320040"/>
+            <a:off x="731520" y="502920"/>
           </a:xfrm>
         </p:spPr>
         <p:txBody>
@@ -13702,7 +16794,7 @@
         </p:nvGraphicFramePr>
         <p:xfrm>
           <a:off x="731520" y="1737360"/>
-          <a:ext cx="10698479" cy="2377440"/>
+          <a:ext cx="10698479" cy="2148840"/>
         </p:xfrm>
         <a:graphic>
           <a:graphicData uri="http://schemas.openxmlformats.org/drawingml/2006/table">
@@ -13715,7 +16807,7 @@
                 <a:gridCol w="3351331"/>
                 <a:gridCol w="4382509"/>
               </a:tblGrid>
-              <a:tr h="396240">
+              <a:tr h="411480">
                 <a:tc>
                   <a:txBody>
                     <a:bodyPr/>
@@ -13732,7 +16824,7 @@
                       </a:r>
                     </a:p>
                   </a:txBody>
-                  <a:tcPr marL="109728" marR="109728" marT="73152" marB="73152" anchor="ctr">
+                  <a:tcPr marL="109728" marR="109728" marT="36576" marB="36576" anchor="ctr">
                     <a:solidFill>
                       <a:srgbClr val="C7000B"/>
                     </a:solidFill>
@@ -13754,7 +16846,7 @@
                       </a:r>
                     </a:p>
                   </a:txBody>
-                  <a:tcPr marL="109728" marR="109728" marT="73152" marB="73152" anchor="ctr">
+                  <a:tcPr marL="109728" marR="109728" marT="36576" marB="36576" anchor="ctr">
                     <a:solidFill>
                       <a:srgbClr val="C7000B"/>
                     </a:solidFill>
@@ -13776,14 +16868,14 @@
                       </a:r>
                     </a:p>
                   </a:txBody>
-                  <a:tcPr marL="109728" marR="109728" marT="73152" marB="73152" anchor="ctr">
+                  <a:tcPr marL="109728" marR="109728" marT="36576" marB="36576" anchor="ctr">
                     <a:solidFill>
                       <a:srgbClr val="C7000B"/>
                     </a:solidFill>
                   </a:tcPr>
                 </a:tc>
               </a:tr>
-              <a:tr h="396240">
+              <a:tr h="347472">
                 <a:tc>
                   <a:txBody>
                     <a:bodyPr/>
@@ -13799,7 +16891,7 @@
                       </a:r>
                     </a:p>
                   </a:txBody>
-                  <a:tcPr marL="109728" marR="109728" marT="54864" marB="54864" anchor="ctr">
+                  <a:tcPr marL="109728" marR="109728" marT="27432" marB="27432" anchor="ctr">
                     <a:solidFill>
                       <a:srgbClr val="F6F8FA"/>
                     </a:solidFill>
@@ -13820,7 +16912,7 @@
                       </a:r>
                     </a:p>
                   </a:txBody>
-                  <a:tcPr marL="109728" marR="109728" marT="54864" marB="54864" anchor="ctr">
+                  <a:tcPr marL="109728" marR="109728" marT="27432" marB="27432" anchor="ctr">
                     <a:solidFill>
                       <a:srgbClr val="F6F8FA"/>
                     </a:solidFill>
@@ -13841,14 +16933,14 @@
                       </a:r>
                     </a:p>
                   </a:txBody>
-                  <a:tcPr marL="109728" marR="109728" marT="54864" marB="54864" anchor="ctr">
+                  <a:tcPr marL="109728" marR="109728" marT="27432" marB="27432" anchor="ctr">
                     <a:solidFill>
                       <a:srgbClr val="F6F8FA"/>
                     </a:solidFill>
                   </a:tcPr>
                 </a:tc>
               </a:tr>
-              <a:tr h="396240">
+              <a:tr h="347472">
                 <a:tc>
                   <a:txBody>
                     <a:bodyPr/>
@@ -13864,7 +16956,7 @@
                       </a:r>
                     </a:p>
                   </a:txBody>
-                  <a:tcPr marL="109728" marR="109728" marT="54864" marB="54864" anchor="ctr">
+                  <a:tcPr marL="109728" marR="109728" marT="27432" marB="27432" anchor="ctr">
                     <a:solidFill>
                       <a:srgbClr val="FFFFFF"/>
                     </a:solidFill>
@@ -13885,7 +16977,7 @@
                       </a:r>
                     </a:p>
                   </a:txBody>
-                  <a:tcPr marL="109728" marR="109728" marT="54864" marB="54864" anchor="ctr">
+                  <a:tcPr marL="109728" marR="109728" marT="27432" marB="27432" anchor="ctr">
                     <a:solidFill>
                       <a:srgbClr val="FFFFFF"/>
                     </a:solidFill>
@@ -13906,14 +16998,14 @@
                       </a:r>
                     </a:p>
                   </a:txBody>
-                  <a:tcPr marL="109728" marR="109728" marT="54864" marB="54864" anchor="ctr">
+                  <a:tcPr marL="109728" marR="109728" marT="27432" marB="27432" anchor="ctr">
                     <a:solidFill>
                       <a:srgbClr val="FFFFFF"/>
                     </a:solidFill>
                   </a:tcPr>
                 </a:tc>
               </a:tr>
-              <a:tr h="396240">
+              <a:tr h="347472">
                 <a:tc>
                   <a:txBody>
                     <a:bodyPr/>
@@ -13929,7 +17021,7 @@
                       </a:r>
                     </a:p>
                   </a:txBody>
-                  <a:tcPr marL="109728" marR="109728" marT="54864" marB="54864" anchor="ctr">
+                  <a:tcPr marL="109728" marR="109728" marT="27432" marB="27432" anchor="ctr">
                     <a:solidFill>
                       <a:srgbClr val="F6F8FA"/>
                     </a:solidFill>
@@ -13950,7 +17042,7 @@
                       </a:r>
                     </a:p>
                   </a:txBody>
-                  <a:tcPr marL="109728" marR="109728" marT="54864" marB="54864" anchor="ctr">
+                  <a:tcPr marL="109728" marR="109728" marT="27432" marB="27432" anchor="ctr">
                     <a:solidFill>
                       <a:srgbClr val="F6F8FA"/>
                     </a:solidFill>
@@ -13971,14 +17063,14 @@
                       </a:r>
                     </a:p>
                   </a:txBody>
-                  <a:tcPr marL="109728" marR="109728" marT="54864" marB="54864" anchor="ctr">
+                  <a:tcPr marL="109728" marR="109728" marT="27432" marB="27432" anchor="ctr">
                     <a:solidFill>
                       <a:srgbClr val="F6F8FA"/>
                     </a:solidFill>
                   </a:tcPr>
                 </a:tc>
               </a:tr>
-              <a:tr h="396240">
+              <a:tr h="347472">
                 <a:tc>
                   <a:txBody>
                     <a:bodyPr/>
@@ -13994,7 +17086,7 @@
                       </a:r>
                     </a:p>
                   </a:txBody>
-                  <a:tcPr marL="109728" marR="109728" marT="54864" marB="54864" anchor="ctr">
+                  <a:tcPr marL="109728" marR="109728" marT="27432" marB="27432" anchor="ctr">
                     <a:solidFill>
                       <a:srgbClr val="FFFFFF"/>
                     </a:solidFill>
@@ -14015,7 +17107,7 @@
                       </a:r>
                     </a:p>
                   </a:txBody>
-                  <a:tcPr marL="109728" marR="109728" marT="54864" marB="54864" anchor="ctr">
+                  <a:tcPr marL="109728" marR="109728" marT="27432" marB="27432" anchor="ctr">
                     <a:solidFill>
                       <a:srgbClr val="FFFFFF"/>
                     </a:solidFill>
@@ -14036,14 +17128,14 @@
                       </a:r>
                     </a:p>
                   </a:txBody>
-                  <a:tcPr marL="109728" marR="109728" marT="54864" marB="54864" anchor="ctr">
+                  <a:tcPr marL="109728" marR="109728" marT="27432" marB="27432" anchor="ctr">
                     <a:solidFill>
                       <a:srgbClr val="FFFFFF"/>
                     </a:solidFill>
                   </a:tcPr>
                 </a:tc>
               </a:tr>
-              <a:tr h="396240">
+              <a:tr h="347472">
                 <a:tc>
                   <a:txBody>
                     <a:bodyPr/>
@@ -14059,7 +17151,7 @@
                       </a:r>
                     </a:p>
                   </a:txBody>
-                  <a:tcPr marL="109728" marR="109728" marT="54864" marB="54864" anchor="ctr">
+                  <a:tcPr marL="109728" marR="109728" marT="27432" marB="27432" anchor="ctr">
                     <a:solidFill>
                       <a:srgbClr val="F6F8FA"/>
                     </a:solidFill>
@@ -14080,7 +17172,7 @@
                       </a:r>
                     </a:p>
                   </a:txBody>
-                  <a:tcPr marL="109728" marR="109728" marT="54864" marB="54864" anchor="ctr">
+                  <a:tcPr marL="109728" marR="109728" marT="27432" marB="27432" anchor="ctr">
                     <a:solidFill>
                       <a:srgbClr val="F6F8FA"/>
                     </a:solidFill>
@@ -14101,7 +17193,7 @@
                       </a:r>
                     </a:p>
                   </a:txBody>
-                  <a:tcPr marL="109728" marR="109728" marT="54864" marB="54864" anchor="ctr">
+                  <a:tcPr marL="109728" marR="109728" marT="27432" marB="27432" anchor="ctr">
                     <a:solidFill>
                       <a:srgbClr val="F6F8FA"/>
                     </a:solidFill>
@@ -14186,7 +17278,7 @@
         </p:nvSpPr>
         <p:spPr>
           <a:xfrm>
-            <a:off x="0" y="320040"/>
+            <a:off x="731520" y="502920"/>
           </a:xfrm>
         </p:spPr>
         <p:txBody>
@@ -14258,7 +17350,7 @@
                   <a:srgbClr val="666666"/>
                 </a:solidFill>
               </a:rPr>
-              <a:t>Famílias, Acronimos e Nomenclatura</a:t>
+              <a:t>Famílias, detalhes e o que o hotline precisa saber</a:t>
             </a:r>
           </a:p>
         </p:txBody>
@@ -14293,7 +17385,7 @@
         </p:nvSpPr>
         <p:spPr>
           <a:xfrm>
-            <a:off x="0" y="320040"/>
+            <a:off x="731520" y="502920"/>
           </a:xfrm>
         </p:spPr>
         <p:txBody>
@@ -14321,7 +17413,7 @@
         </p:nvGraphicFramePr>
         <p:xfrm>
           <a:off x="731520" y="1737360"/>
-          <a:ext cx="10698479" cy="2377440"/>
+          <a:ext cx="10698479" cy="2148840"/>
         </p:xfrm>
         <a:graphic>
           <a:graphicData uri="http://schemas.openxmlformats.org/drawingml/2006/table">
@@ -14334,7 +17426,7 @@
                 <a:gridCol w="6141720"/>
                 <a:gridCol w="1188719"/>
               </a:tblGrid>
-              <a:tr h="396240">
+              <a:tr h="411480">
                 <a:tc>
                   <a:txBody>
                     <a:bodyPr/>
@@ -14351,7 +17443,7 @@
                       </a:r>
                     </a:p>
                   </a:txBody>
-                  <a:tcPr marL="109728" marR="109728" marT="73152" marB="73152" anchor="ctr">
+                  <a:tcPr marL="109728" marR="109728" marT="36576" marB="36576" anchor="ctr">
                     <a:solidFill>
                       <a:srgbClr val="C7000B"/>
                     </a:solidFill>
@@ -14373,7 +17465,7 @@
                       </a:r>
                     </a:p>
                   </a:txBody>
-                  <a:tcPr marL="109728" marR="109728" marT="73152" marB="73152" anchor="ctr">
+                  <a:tcPr marL="109728" marR="109728" marT="36576" marB="36576" anchor="ctr">
                     <a:solidFill>
                       <a:srgbClr val="C7000B"/>
                     </a:solidFill>
@@ -14395,14 +17487,14 @@
                       </a:r>
                     </a:p>
                   </a:txBody>
-                  <a:tcPr marL="109728" marR="109728" marT="73152" marB="73152" anchor="ctr">
+                  <a:tcPr marL="109728" marR="109728" marT="36576" marB="36576" anchor="ctr">
                     <a:solidFill>
                       <a:srgbClr val="C7000B"/>
                     </a:solidFill>
                   </a:tcPr>
                 </a:tc>
               </a:tr>
-              <a:tr h="396240">
+              <a:tr h="347472">
                 <a:tc>
                   <a:txBody>
                     <a:bodyPr/>
@@ -14418,7 +17510,7 @@
                       </a:r>
                     </a:p>
                   </a:txBody>
-                  <a:tcPr marL="109728" marR="109728" marT="54864" marB="54864" anchor="ctr">
+                  <a:tcPr marL="109728" marR="109728" marT="27432" marB="27432" anchor="ctr">
                     <a:solidFill>
                       <a:srgbClr val="F6F8FA"/>
                     </a:solidFill>
@@ -14439,7 +17531,7 @@
                       </a:r>
                     </a:p>
                   </a:txBody>
-                  <a:tcPr marL="109728" marR="109728" marT="54864" marB="54864" anchor="ctr">
+                  <a:tcPr marL="109728" marR="109728" marT="27432" marB="27432" anchor="ctr">
                     <a:solidFill>
                       <a:srgbClr val="F6F8FA"/>
                     </a:solidFill>
@@ -14460,14 +17552,14 @@
                       </a:r>
                     </a:p>
                   </a:txBody>
-                  <a:tcPr marL="109728" marR="109728" marT="54864" marB="54864" anchor="ctr">
+                  <a:tcPr marL="109728" marR="109728" marT="27432" marB="27432" anchor="ctr">
                     <a:solidFill>
                       <a:srgbClr val="F6F8FA"/>
                     </a:solidFill>
                   </a:tcPr>
                 </a:tc>
               </a:tr>
-              <a:tr h="396240">
+              <a:tr h="347472">
                 <a:tc>
                   <a:txBody>
                     <a:bodyPr/>
@@ -14483,7 +17575,7 @@
                       </a:r>
                     </a:p>
                   </a:txBody>
-                  <a:tcPr marL="109728" marR="109728" marT="54864" marB="54864" anchor="ctr">
+                  <a:tcPr marL="109728" marR="109728" marT="27432" marB="27432" anchor="ctr">
                     <a:solidFill>
                       <a:srgbClr val="FFFFFF"/>
                     </a:solidFill>
@@ -14504,7 +17596,7 @@
                       </a:r>
                     </a:p>
                   </a:txBody>
-                  <a:tcPr marL="109728" marR="109728" marT="54864" marB="54864" anchor="ctr">
+                  <a:tcPr marL="109728" marR="109728" marT="27432" marB="27432" anchor="ctr">
                     <a:solidFill>
                       <a:srgbClr val="FFFFFF"/>
                     </a:solidFill>
@@ -14525,14 +17617,14 @@
                       </a:r>
                     </a:p>
                   </a:txBody>
-                  <a:tcPr marL="109728" marR="109728" marT="54864" marB="54864" anchor="ctr">
+                  <a:tcPr marL="109728" marR="109728" marT="27432" marB="27432" anchor="ctr">
                     <a:solidFill>
                       <a:srgbClr val="FFFFFF"/>
                     </a:solidFill>
                   </a:tcPr>
                 </a:tc>
               </a:tr>
-              <a:tr h="396240">
+              <a:tr h="347472">
                 <a:tc>
                   <a:txBody>
                     <a:bodyPr/>
@@ -14548,7 +17640,7 @@
                       </a:r>
                     </a:p>
                   </a:txBody>
-                  <a:tcPr marL="109728" marR="109728" marT="54864" marB="54864" anchor="ctr">
+                  <a:tcPr marL="109728" marR="109728" marT="27432" marB="27432" anchor="ctr">
                     <a:solidFill>
                       <a:srgbClr val="F6F8FA"/>
                     </a:solidFill>
@@ -14569,7 +17661,7 @@
                       </a:r>
                     </a:p>
                   </a:txBody>
-                  <a:tcPr marL="109728" marR="109728" marT="54864" marB="54864" anchor="ctr">
+                  <a:tcPr marL="109728" marR="109728" marT="27432" marB="27432" anchor="ctr">
                     <a:solidFill>
                       <a:srgbClr val="F6F8FA"/>
                     </a:solidFill>
@@ -14590,14 +17682,14 @@
                       </a:r>
                     </a:p>
                   </a:txBody>
-                  <a:tcPr marL="109728" marR="109728" marT="54864" marB="54864" anchor="ctr">
+                  <a:tcPr marL="109728" marR="109728" marT="27432" marB="27432" anchor="ctr">
                     <a:solidFill>
                       <a:srgbClr val="F6F8FA"/>
                     </a:solidFill>
                   </a:tcPr>
                 </a:tc>
               </a:tr>
-              <a:tr h="396240">
+              <a:tr h="347472">
                 <a:tc>
                   <a:txBody>
                     <a:bodyPr/>
@@ -14613,7 +17705,7 @@
                       </a:r>
                     </a:p>
                   </a:txBody>
-                  <a:tcPr marL="109728" marR="109728" marT="54864" marB="54864" anchor="ctr">
+                  <a:tcPr marL="109728" marR="109728" marT="27432" marB="27432" anchor="ctr">
                     <a:solidFill>
                       <a:srgbClr val="FFFFFF"/>
                     </a:solidFill>
@@ -14634,7 +17726,7 @@
                       </a:r>
                     </a:p>
                   </a:txBody>
-                  <a:tcPr marL="109728" marR="109728" marT="54864" marB="54864" anchor="ctr">
+                  <a:tcPr marL="109728" marR="109728" marT="27432" marB="27432" anchor="ctr">
                     <a:solidFill>
                       <a:srgbClr val="FFFFFF"/>
                     </a:solidFill>
@@ -14655,14 +17747,14 @@
                       </a:r>
                     </a:p>
                   </a:txBody>
-                  <a:tcPr marL="109728" marR="109728" marT="54864" marB="54864" anchor="ctr">
+                  <a:tcPr marL="109728" marR="109728" marT="27432" marB="27432" anchor="ctr">
                     <a:solidFill>
                       <a:srgbClr val="FFFFFF"/>
                     </a:solidFill>
                   </a:tcPr>
                 </a:tc>
               </a:tr>
-              <a:tr h="396240">
+              <a:tr h="347472">
                 <a:tc>
                   <a:txBody>
                     <a:bodyPr/>
@@ -14678,7 +17770,7 @@
                       </a:r>
                     </a:p>
                   </a:txBody>
-                  <a:tcPr marL="109728" marR="109728" marT="54864" marB="54864" anchor="ctr">
+                  <a:tcPr marL="109728" marR="109728" marT="27432" marB="27432" anchor="ctr">
                     <a:solidFill>
                       <a:srgbClr val="F6F8FA"/>
                     </a:solidFill>
@@ -14699,7 +17791,7 @@
                       </a:r>
                     </a:p>
                   </a:txBody>
-                  <a:tcPr marL="109728" marR="109728" marT="54864" marB="54864" anchor="ctr">
+                  <a:tcPr marL="109728" marR="109728" marT="27432" marB="27432" anchor="ctr">
                     <a:solidFill>
                       <a:srgbClr val="F6F8FA"/>
                     </a:solidFill>
@@ -14720,7 +17812,7 @@
                       </a:r>
                     </a:p>
                   </a:txBody>
-                  <a:tcPr marL="109728" marR="109728" marT="54864" marB="54864" anchor="ctr">
+                  <a:tcPr marL="109728" marR="109728" marT="27432" marB="27432" anchor="ctr">
                     <a:solidFill>
                       <a:srgbClr val="F6F8FA"/>
                     </a:solidFill>
@@ -14740,7 +17832,7 @@
         <p:spPr>
           <a:xfrm>
             <a:off x="731520" y="4754880"/>
-            <a:ext cx="10698480" cy="448056"/>
+            <a:ext cx="10698480" cy="667512"/>
           </a:xfrm>
           <a:prstGeom prst="rect">
             <a:avLst/>
@@ -14770,7 +17862,7 @@
                   <a:srgbClr val="1F2328"/>
                 </a:solidFill>
               </a:rPr>
-              <a:t>O hotline precisa saber o nome oficial do serviço para roteamento do SR.</a:t>
+              <a:t>O hotline precisa saber o nome oficial do serviço para roteamento do SR. Cada família tem características e problemas próprios — veremos a seguir.</a:t>
             </a:r>
           </a:p>
         </p:txBody>
@@ -14805,7 +17897,7 @@
         </p:nvSpPr>
         <p:spPr>
           <a:xfrm>
-            <a:off x="0" y="320040"/>
+            <a:off x="731520" y="502920"/>
           </a:xfrm>
         </p:spPr>
         <p:txBody>
@@ -14818,7 +17910,7 @@
                   <a:srgbClr val="C7000B"/>
                 </a:solidFill>
               </a:rPr>
-              <a:t>Acronimos Principais</a:t>
+              <a:t>Computação — Serviços em Detalhe</a:t>
             </a:r>
           </a:p>
         </p:txBody>
@@ -14832,8 +17924,8 @@
           <p:nvPr/>
         </p:nvGraphicFramePr>
         <p:xfrm>
-          <a:off x="731521" y="1737360"/>
-          <a:ext cx="10698478" cy="4206240"/>
+          <a:off x="731520" y="1737360"/>
+          <a:ext cx="10698480" cy="1801368"/>
         </p:xfrm>
         <a:graphic>
           <a:graphicData uri="http://schemas.openxmlformats.org/drawingml/2006/table">
@@ -14842,11 +17934,12 @@
                 <a:tableStyleId>{5C22544A-7EE6-4342-B048-85BDC9FD1C3A}</a:tableStyleId>
               </a:tblPr>
               <a:tblGrid>
-                <a:gridCol w="1590314"/>
-                <a:gridCol w="4481795"/>
-                <a:gridCol w="4626369"/>
+                <a:gridCol w="731520"/>
+                <a:gridCol w="3200400"/>
+                <a:gridCol w="2926080"/>
+                <a:gridCol w="3840480"/>
               </a:tblGrid>
-              <a:tr h="382385">
+              <a:tr h="411480">
                 <a:tc>
                   <a:txBody>
                     <a:bodyPr/>
@@ -14859,11 +17952,11 @@
                             <a:srgbClr val="FFFFFF"/>
                           </a:solidFill>
                         </a:rPr>
-                        <a:t>Acronimo</a:t>
-                      </a:r>
-                    </a:p>
-                  </a:txBody>
-                  <a:tcPr marL="109728" marR="109728" marT="73152" marB="73152" anchor="ctr">
+                        <a:t>Svc</a:t>
+                      </a:r>
+                    </a:p>
+                  </a:txBody>
+                  <a:tcPr marL="109728" marR="109728" marT="36576" marB="36576" anchor="ctr">
                     <a:solidFill>
                       <a:srgbClr val="C7000B"/>
                     </a:solidFill>
@@ -14881,11 +17974,11 @@
                             <a:srgbClr val="FFFFFF"/>
                           </a:solidFill>
                         </a:rPr>
-                        <a:t>Full Name</a:t>
-                      </a:r>
-                    </a:p>
-                  </a:txBody>
-                  <a:tcPr marL="109728" marR="109728" marT="73152" marB="73152" anchor="ctr">
+                        <a:t>O Que É</a:t>
+                      </a:r>
+                    </a:p>
+                  </a:txBody>
+                  <a:tcPr marL="109728" marR="109728" marT="36576" marB="36576" anchor="ctr">
                     <a:solidFill>
                       <a:srgbClr val="C7000B"/>
                     </a:solidFill>
@@ -14903,18 +17996,40 @@
                             <a:srgbClr val="FFFFFF"/>
                           </a:solidFill>
                         </a:rPr>
-                        <a:t>Descrição</a:t>
-                      </a:r>
-                    </a:p>
-                  </a:txBody>
-                  <a:tcPr marL="109728" marR="109728" marT="73152" marB="73152" anchor="ctr">
+                        <a:t>Quando Usar</a:t>
+                      </a:r>
+                    </a:p>
+                  </a:txBody>
+                  <a:tcPr marL="109728" marR="109728" marT="36576" marB="36576" anchor="ctr">
                     <a:solidFill>
                       <a:srgbClr val="C7000B"/>
                     </a:solidFill>
                   </a:tcPr>
                 </a:tc>
+                <a:tc>
+                  <a:txBody>
+                    <a:bodyPr/>
+                    <a:lstStyle/>
+                    <a:p>
+                      <a:pPr algn="ctr"/>
+                      <a:r>
+                        <a:rPr sz="1300" b="1">
+                          <a:solidFill>
+                            <a:srgbClr val="FFFFFF"/>
+                          </a:solidFill>
+                        </a:rPr>
+                        <a:t>O Que Verificar Primeiro</a:t>
+                      </a:r>
+                    </a:p>
+                  </a:txBody>
+                  <a:tcPr marL="109728" marR="109728" marT="36576" marB="36576" anchor="ctr">
+                    <a:solidFill>
+                      <a:srgbClr val="C7000B"/>
+                    </a:solidFill>
+                  </a:tcPr>
+                </a:tc>
               </a:tr>
-              <a:tr h="382385">
+              <a:tr h="347472">
                 <a:tc>
                   <a:txBody>
                     <a:bodyPr/>
@@ -14930,7 +18045,7 @@
                       </a:r>
                     </a:p>
                   </a:txBody>
-                  <a:tcPr marL="109728" marR="109728" marT="54864" marB="54864" anchor="ctr">
+                  <a:tcPr marL="109728" marR="109728" marT="27432" marB="27432" anchor="ctr">
                     <a:solidFill>
                       <a:srgbClr val="F6F8FA"/>
                     </a:solidFill>
@@ -14947,11 +18062,11 @@
                             <a:srgbClr val="1F2328"/>
                           </a:solidFill>
                         </a:rPr>
-                        <a:t>Elastic Cloud Server</a:t>
-                      </a:r>
-                    </a:p>
-                  </a:txBody>
-                  <a:tcPr marL="109728" marR="109728" marT="54864" marB="54864" anchor="ctr">
+                        <a:t>Servidor virtual que você aluga na nuvem</a:t>
+                      </a:r>
+                    </a:p>
+                  </a:txBody>
+                  <a:tcPr marL="109728" marR="109728" marT="27432" marB="27432" anchor="ctr">
                     <a:solidFill>
                       <a:srgbClr val="F6F8FA"/>
                     </a:solidFill>
@@ -14968,18 +18083,39 @@
                             <a:srgbClr val="1F2328"/>
                           </a:solidFill>
                         </a:rPr>
-                        <a:t>Servidor virtual escalável</a:t>
-                      </a:r>
-                    </a:p>
-                  </a:txBody>
-                  <a:tcPr marL="109728" marR="109728" marT="54864" marB="54864" anchor="ctr">
+                        <a:t>Apps web, APIs, processamento de dados</a:t>
+                      </a:r>
+                    </a:p>
+                  </a:txBody>
+                  <a:tcPr marL="109728" marR="109728" marT="27432" marB="27432" anchor="ctr">
                     <a:solidFill>
                       <a:srgbClr val="F6F8FA"/>
                     </a:solidFill>
                   </a:tcPr>
                 </a:tc>
+                <a:tc>
+                  <a:txBody>
+                    <a:bodyPr/>
+                    <a:lstStyle/>
+                    <a:p>
+                      <a:r>
+                        <a:rPr sz="1100">
+                          <a:solidFill>
+                            <a:srgbClr val="1F2328"/>
+                          </a:solidFill>
+                        </a:rPr>
+                        <a:t>Status da VM, quotas, eventos do sistema</a:t>
+                      </a:r>
+                    </a:p>
+                  </a:txBody>
+                  <a:tcPr marL="109728" marR="109728" marT="27432" marB="27432" anchor="ctr">
+                    <a:solidFill>
+                      <a:srgbClr val="F6F8FA"/>
+                    </a:solidFill>
+                  </a:tcPr>
+                </a:tc>
               </a:tr>
-              <a:tr h="382385">
+              <a:tr h="347472">
                 <a:tc>
                   <a:txBody>
                     <a:bodyPr/>
@@ -14991,11 +18127,11 @@
                             <a:srgbClr val="1F2328"/>
                           </a:solidFill>
                         </a:rPr>
-                        <a:t>EVS</a:t>
-                      </a:r>
-                    </a:p>
-                  </a:txBody>
-                  <a:tcPr marL="109728" marR="109728" marT="54864" marB="54864" anchor="ctr">
+                        <a:t>IMS</a:t>
+                      </a:r>
+                    </a:p>
+                  </a:txBody>
+                  <a:tcPr marL="109728" marR="109728" marT="27432" marB="27432" anchor="ctr">
                     <a:solidFill>
                       <a:srgbClr val="FFFFFF"/>
                     </a:solidFill>
@@ -15012,11 +18148,11 @@
                             <a:srgbClr val="1F2328"/>
                           </a:solidFill>
                         </a:rPr>
-                        <a:t>Elastic Volume Service</a:t>
-                      </a:r>
-                    </a:p>
-                  </a:txBody>
-                  <a:tcPr marL="109728" marR="109728" marT="54864" marB="54864" anchor="ctr">
+                        <a:t>Imagem/template para criar VMs rápido</a:t>
+                      </a:r>
+                    </a:p>
+                  </a:txBody>
+                  <a:tcPr marL="109728" marR="109728" marT="27432" marB="27432" anchor="ctr">
                     <a:solidFill>
                       <a:srgbClr val="FFFFFF"/>
                     </a:solidFill>
@@ -15033,18 +18169,39 @@
                             <a:srgbClr val="1F2328"/>
                           </a:solidFill>
                         </a:rPr>
-                        <a:t>Disco de bloco elástico</a:t>
-                      </a:r>
-                    </a:p>
-                  </a:txBody>
-                  <a:tcPr marL="109728" marR="109728" marT="54864" marB="54864" anchor="ctr">
+                        <a:t>Deploy repetível e padronizado</a:t>
+                      </a:r>
+                    </a:p>
+                  </a:txBody>
+                  <a:tcPr marL="109728" marR="109728" marT="27432" marB="27432" anchor="ctr">
                     <a:solidFill>
                       <a:srgbClr val="FFFFFF"/>
                     </a:solidFill>
                   </a:tcPr>
                 </a:tc>
+                <a:tc>
+                  <a:txBody>
+                    <a:bodyPr/>
+                    <a:lstStyle/>
+                    <a:p>
+                      <a:r>
+                        <a:rPr sz="1100">
+                          <a:solidFill>
+                            <a:srgbClr val="1F2328"/>
+                          </a:solidFill>
+                        </a:rPr>
+                        <a:t>Imagem existe? Versão correta?</a:t>
+                      </a:r>
+                    </a:p>
+                  </a:txBody>
+                  <a:tcPr marL="109728" marR="109728" marT="27432" marB="27432" anchor="ctr">
+                    <a:solidFill>
+                      <a:srgbClr val="FFFFFF"/>
+                    </a:solidFill>
+                  </a:tcPr>
+                </a:tc>
               </a:tr>
-              <a:tr h="382385">
+              <a:tr h="347472">
                 <a:tc>
                   <a:txBody>
                     <a:bodyPr/>
@@ -15056,11 +18213,11 @@
                             <a:srgbClr val="1F2328"/>
                           </a:solidFill>
                         </a:rPr>
-                        <a:t>VPC</a:t>
-                      </a:r>
-                    </a:p>
-                  </a:txBody>
-                  <a:tcPr marL="109728" marR="109728" marT="54864" marB="54864" anchor="ctr">
+                        <a:t>AS</a:t>
+                      </a:r>
+                    </a:p>
+                  </a:txBody>
+                  <a:tcPr marL="109728" marR="109728" marT="27432" marB="27432" anchor="ctr">
                     <a:solidFill>
                       <a:srgbClr val="F6F8FA"/>
                     </a:solidFill>
@@ -15077,11 +18234,11 @@
                             <a:srgbClr val="1F2328"/>
                           </a:solidFill>
                         </a:rPr>
-                        <a:t>Virtual Private Cloud</a:t>
-                      </a:r>
-                    </a:p>
-                  </a:txBody>
-                  <a:tcPr marL="109728" marR="109728" marT="54864" marB="54864" anchor="ctr">
+                        <a:t>Adiciona/remove VMs automaticamente</a:t>
+                      </a:r>
+                    </a:p>
+                  </a:txBody>
+                  <a:tcPr marL="109728" marR="109728" marT="27432" marB="27432" anchor="ctr">
                     <a:solidFill>
                       <a:srgbClr val="F6F8FA"/>
                     </a:solidFill>
@@ -15098,18 +18255,39 @@
                             <a:srgbClr val="1F2328"/>
                           </a:solidFill>
                         </a:rPr>
-                        <a:t>Rede virtual isolada</a:t>
-                      </a:r>
-                    </a:p>
-                  </a:txBody>
-                  <a:tcPr marL="109728" marR="109728" marT="54864" marB="54864" anchor="ctr">
+                        <a:t>Picos de tráfego, workloads variáveis</a:t>
+                      </a:r>
+                    </a:p>
+                  </a:txBody>
+                  <a:tcPr marL="109728" marR="109728" marT="27432" marB="27432" anchor="ctr">
                     <a:solidFill>
                       <a:srgbClr val="F6F8FA"/>
                     </a:solidFill>
                   </a:tcPr>
                 </a:tc>
+                <a:tc>
+                  <a:txBody>
+                    <a:bodyPr/>
+                    <a:lstStyle/>
+                    <a:p>
+                      <a:r>
+                        <a:rPr sz="1100">
+                          <a:solidFill>
+                            <a:srgbClr val="1F2328"/>
+                          </a:solidFill>
+                        </a:rPr>
+                        <a:t>Políticas de scaling, min/max instâncias</a:t>
+                      </a:r>
+                    </a:p>
+                  </a:txBody>
+                  <a:tcPr marL="109728" marR="109728" marT="27432" marB="27432" anchor="ctr">
+                    <a:solidFill>
+                      <a:srgbClr val="F6F8FA"/>
+                    </a:solidFill>
+                  </a:tcPr>
+                </a:tc>
               </a:tr>
-              <a:tr h="382385">
+              <a:tr h="347472">
                 <a:tc>
                   <a:txBody>
                     <a:bodyPr/>
@@ -15121,11 +18299,11 @@
                             <a:srgbClr val="1F2328"/>
                           </a:solidFill>
                         </a:rPr>
-                        <a:t>ELB</a:t>
-                      </a:r>
-                    </a:p>
-                  </a:txBody>
-                  <a:tcPr marL="109728" marR="109728" marT="54864" marB="54864" anchor="ctr">
+                        <a:t>CCE</a:t>
+                      </a:r>
+                    </a:p>
+                  </a:txBody>
+                  <a:tcPr marL="109728" marR="109728" marT="27432" marB="27432" anchor="ctr">
                     <a:solidFill>
                       <a:srgbClr val="FFFFFF"/>
                     </a:solidFill>
@@ -15142,11 +18320,11 @@
                             <a:srgbClr val="1F2328"/>
                           </a:solidFill>
                         </a:rPr>
-                        <a:t>Elastic Load Balance</a:t>
-                      </a:r>
-                    </a:p>
-                  </a:txBody>
-                  <a:tcPr marL="109728" marR="109728" marT="54864" marB="54864" anchor="ctr">
+                        <a:t>Kubernetes gerenciado (containers)</a:t>
+                      </a:r>
+                    </a:p>
+                  </a:txBody>
+                  <a:tcPr marL="109728" marR="109728" marT="27432" marB="27432" anchor="ctr">
                     <a:solidFill>
                       <a:srgbClr val="FFFFFF"/>
                     </a:solidFill>
@@ -15163,401 +18341,32 @@
                             <a:srgbClr val="1F2328"/>
                           </a:solidFill>
                         </a:rPr>
-                        <a:t>Balanceador de carga</a:t>
-                      </a:r>
-                    </a:p>
-                  </a:txBody>
-                  <a:tcPr marL="109728" marR="109728" marT="54864" marB="54864" anchor="ctr">
+                        <a:t>Microserviços, aplicações modernas</a:t>
+                      </a:r>
+                    </a:p>
+                  </a:txBody>
+                  <a:tcPr marL="109728" marR="109728" marT="27432" marB="27432" anchor="ctr">
                     <a:solidFill>
                       <a:srgbClr val="FFFFFF"/>
                     </a:solidFill>
                   </a:tcPr>
                 </a:tc>
-              </a:tr>
-              <a:tr h="382385">
-                <a:tc>
-                  <a:txBody>
-                    <a:bodyPr/>
-                    <a:lstStyle/>
-                    <a:p>
-                      <a:r>
-                        <a:rPr sz="1100" b="1">
+                <a:tc>
+                  <a:txBody>
+                    <a:bodyPr/>
+                    <a:lstStyle/>
+                    <a:p>
+                      <a:r>
+                        <a:rPr sz="1100">
                           <a:solidFill>
                             <a:srgbClr val="1F2328"/>
                           </a:solidFill>
                         </a:rPr>
-                        <a:t>RDS</a:t>
-                      </a:r>
-                    </a:p>
-                  </a:txBody>
-                  <a:tcPr marL="109728" marR="109728" marT="54864" marB="54864" anchor="ctr">
-                    <a:solidFill>
-                      <a:srgbClr val="F6F8FA"/>
-                    </a:solidFill>
-                  </a:tcPr>
-                </a:tc>
-                <a:tc>
-                  <a:txBody>
-                    <a:bodyPr/>
-                    <a:lstStyle/>
-                    <a:p>
-                      <a:r>
-                        <a:rPr sz="1100">
-                          <a:solidFill>
-                            <a:srgbClr val="1F2328"/>
-                          </a:solidFill>
-                        </a:rPr>
-                        <a:t>Relational Database Service</a:t>
-                      </a:r>
-                    </a:p>
-                  </a:txBody>
-                  <a:tcPr marL="109728" marR="109728" marT="54864" marB="54864" anchor="ctr">
-                    <a:solidFill>
-                      <a:srgbClr val="F6F8FA"/>
-                    </a:solidFill>
-                  </a:tcPr>
-                </a:tc>
-                <a:tc>
-                  <a:txBody>
-                    <a:bodyPr/>
-                    <a:lstStyle/>
-                    <a:p>
-                      <a:r>
-                        <a:rPr sz="1100">
-                          <a:solidFill>
-                            <a:srgbClr val="1F2328"/>
-                          </a:solidFill>
-                        </a:rPr>
-                        <a:t>BD relacional gerenciado</a:t>
-                      </a:r>
-                    </a:p>
-                  </a:txBody>
-                  <a:tcPr marL="109728" marR="109728" marT="54864" marB="54864" anchor="ctr">
-                    <a:solidFill>
-                      <a:srgbClr val="F6F8FA"/>
-                    </a:solidFill>
-                  </a:tcPr>
-                </a:tc>
-              </a:tr>
-              <a:tr h="382385">
-                <a:tc>
-                  <a:txBody>
-                    <a:bodyPr/>
-                    <a:lstStyle/>
-                    <a:p>
-                      <a:r>
-                        <a:rPr sz="1100" b="1">
-                          <a:solidFill>
-                            <a:srgbClr val="1F2328"/>
-                          </a:solidFill>
-                        </a:rPr>
-                        <a:t>OBS</a:t>
-                      </a:r>
-                    </a:p>
-                  </a:txBody>
-                  <a:tcPr marL="109728" marR="109728" marT="54864" marB="54864" anchor="ctr">
-                    <a:solidFill>
-                      <a:srgbClr val="FFFFFF"/>
-                    </a:solidFill>
-                  </a:tcPr>
-                </a:tc>
-                <a:tc>
-                  <a:txBody>
-                    <a:bodyPr/>
-                    <a:lstStyle/>
-                    <a:p>
-                      <a:r>
-                        <a:rPr sz="1100">
-                          <a:solidFill>
-                            <a:srgbClr val="1F2328"/>
-                          </a:solidFill>
-                        </a:rPr>
-                        <a:t>Object Storage Service</a:t>
-                      </a:r>
-                    </a:p>
-                  </a:txBody>
-                  <a:tcPr marL="109728" marR="109728" marT="54864" marB="54864" anchor="ctr">
-                    <a:solidFill>
-                      <a:srgbClr val="FFFFFF"/>
-                    </a:solidFill>
-                  </a:tcPr>
-                </a:tc>
-                <a:tc>
-                  <a:txBody>
-                    <a:bodyPr/>
-                    <a:lstStyle/>
-                    <a:p>
-                      <a:r>
-                        <a:rPr sz="1100">
-                          <a:solidFill>
-                            <a:srgbClr val="1F2328"/>
-                          </a:solidFill>
-                        </a:rPr>
-                        <a:t>Armazenamento de objetos</a:t>
-                      </a:r>
-                    </a:p>
-                  </a:txBody>
-                  <a:tcPr marL="109728" marR="109728" marT="54864" marB="54864" anchor="ctr">
-                    <a:solidFill>
-                      <a:srgbClr val="FFFFFF"/>
-                    </a:solidFill>
-                  </a:tcPr>
-                </a:tc>
-              </a:tr>
-              <a:tr h="382385">
-                <a:tc>
-                  <a:txBody>
-                    <a:bodyPr/>
-                    <a:lstStyle/>
-                    <a:p>
-                      <a:r>
-                        <a:rPr sz="1100" b="1">
-                          <a:solidFill>
-                            <a:srgbClr val="1F2328"/>
-                          </a:solidFill>
-                        </a:rPr>
-                        <a:t>IAM</a:t>
-                      </a:r>
-                    </a:p>
-                  </a:txBody>
-                  <a:tcPr marL="109728" marR="109728" marT="54864" marB="54864" anchor="ctr">
-                    <a:solidFill>
-                      <a:srgbClr val="F6F8FA"/>
-                    </a:solidFill>
-                  </a:tcPr>
-                </a:tc>
-                <a:tc>
-                  <a:txBody>
-                    <a:bodyPr/>
-                    <a:lstStyle/>
-                    <a:p>
-                      <a:r>
-                        <a:rPr sz="1100">
-                          <a:solidFill>
-                            <a:srgbClr val="1F2328"/>
-                          </a:solidFill>
-                        </a:rPr>
-                        <a:t>Identity &amp; Access Management</a:t>
-                      </a:r>
-                    </a:p>
-                  </a:txBody>
-                  <a:tcPr marL="109728" marR="109728" marT="54864" marB="54864" anchor="ctr">
-                    <a:solidFill>
-                      <a:srgbClr val="F6F8FA"/>
-                    </a:solidFill>
-                  </a:tcPr>
-                </a:tc>
-                <a:tc>
-                  <a:txBody>
-                    <a:bodyPr/>
-                    <a:lstStyle/>
-                    <a:p>
-                      <a:r>
-                        <a:rPr sz="1100">
-                          <a:solidFill>
-                            <a:srgbClr val="1F2328"/>
-                          </a:solidFill>
-                        </a:rPr>
-                        <a:t>Gestão de identidade</a:t>
-                      </a:r>
-                    </a:p>
-                  </a:txBody>
-                  <a:tcPr marL="109728" marR="109728" marT="54864" marB="54864" anchor="ctr">
-                    <a:solidFill>
-                      <a:srgbClr val="F6F8FA"/>
-                    </a:solidFill>
-                  </a:tcPr>
-                </a:tc>
-              </a:tr>
-              <a:tr h="382385">
-                <a:tc>
-                  <a:txBody>
-                    <a:bodyPr/>
-                    <a:lstStyle/>
-                    <a:p>
-                      <a:r>
-                        <a:rPr sz="1100" b="1">
-                          <a:solidFill>
-                            <a:srgbClr val="1F2328"/>
-                          </a:solidFill>
-                        </a:rPr>
-                        <a:t>SR</a:t>
-                      </a:r>
-                    </a:p>
-                  </a:txBody>
-                  <a:tcPr marL="109728" marR="109728" marT="54864" marB="54864" anchor="ctr">
-                    <a:solidFill>
-                      <a:srgbClr val="FFFFFF"/>
-                    </a:solidFill>
-                  </a:tcPr>
-                </a:tc>
-                <a:tc>
-                  <a:txBody>
-                    <a:bodyPr/>
-                    <a:lstStyle/>
-                    <a:p>
-                      <a:r>
-                        <a:rPr sz="1100">
-                          <a:solidFill>
-                            <a:srgbClr val="1F2328"/>
-                          </a:solidFill>
-                        </a:rPr>
-                        <a:t>Service Request</a:t>
-                      </a:r>
-                    </a:p>
-                  </a:txBody>
-                  <a:tcPr marL="109728" marR="109728" marT="54864" marB="54864" anchor="ctr">
-                    <a:solidFill>
-                      <a:srgbClr val="FFFFFF"/>
-                    </a:solidFill>
-                  </a:tcPr>
-                </a:tc>
-                <a:tc>
-                  <a:txBody>
-                    <a:bodyPr/>
-                    <a:lstStyle/>
-                    <a:p>
-                      <a:r>
-                        <a:rPr sz="1100">
-                          <a:solidFill>
-                            <a:srgbClr val="1F2328"/>
-                          </a:solidFill>
-                        </a:rPr>
-                        <a:t>Solicitação de serviço</a:t>
-                      </a:r>
-                    </a:p>
-                  </a:txBody>
-                  <a:tcPr marL="109728" marR="109728" marT="54864" marB="54864" anchor="ctr">
-                    <a:solidFill>
-                      <a:srgbClr val="FFFFFF"/>
-                    </a:solidFill>
-                  </a:tcPr>
-                </a:tc>
-              </a:tr>
-              <a:tr h="382385">
-                <a:tc>
-                  <a:txBody>
-                    <a:bodyPr/>
-                    <a:lstStyle/>
-                    <a:p>
-                      <a:r>
-                        <a:rPr sz="1100" b="1">
-                          <a:solidFill>
-                            <a:srgbClr val="1F2328"/>
-                          </a:solidFill>
-                        </a:rPr>
-                        <a:t>ITR</a:t>
-                      </a:r>
-                    </a:p>
-                  </a:txBody>
-                  <a:tcPr marL="109728" marR="109728" marT="54864" marB="54864" anchor="ctr">
-                    <a:solidFill>
-                      <a:srgbClr val="F6F8FA"/>
-                    </a:solidFill>
-                  </a:tcPr>
-                </a:tc>
-                <a:tc>
-                  <a:txBody>
-                    <a:bodyPr/>
-                    <a:lstStyle/>
-                    <a:p>
-                      <a:r>
-                        <a:rPr sz="1100">
-                          <a:solidFill>
-                            <a:srgbClr val="1F2328"/>
-                          </a:solidFill>
-                        </a:rPr>
-                        <a:t>Issue To Resolve</a:t>
-                      </a:r>
-                    </a:p>
-                  </a:txBody>
-                  <a:tcPr marL="109728" marR="109728" marT="54864" marB="54864" anchor="ctr">
-                    <a:solidFill>
-                      <a:srgbClr val="F6F8FA"/>
-                    </a:solidFill>
-                  </a:tcPr>
-                </a:tc>
-                <a:tc>
-                  <a:txBody>
-                    <a:bodyPr/>
-                    <a:lstStyle/>
-                    <a:p>
-                      <a:r>
-                        <a:rPr sz="1100">
-                          <a:solidFill>
-                            <a:srgbClr val="1F2328"/>
-                          </a:solidFill>
-                        </a:rPr>
-                        <a:t>Incidente até resolução</a:t>
-                      </a:r>
-                    </a:p>
-                  </a:txBody>
-                  <a:tcPr marL="109728" marR="109728" marT="54864" marB="54864" anchor="ctr">
-                    <a:solidFill>
-                      <a:srgbClr val="F6F8FA"/>
-                    </a:solidFill>
-                  </a:tcPr>
-                </a:tc>
-              </a:tr>
-              <a:tr h="382390">
-                <a:tc>
-                  <a:txBody>
-                    <a:bodyPr/>
-                    <a:lstStyle/>
-                    <a:p>
-                      <a:r>
-                        <a:rPr sz="1100" b="1">
-                          <a:solidFill>
-                            <a:srgbClr val="1F2328"/>
-                          </a:solidFill>
-                        </a:rPr>
-                        <a:t>TAC</a:t>
-                      </a:r>
-                    </a:p>
-                  </a:txBody>
-                  <a:tcPr marL="109728" marR="109728" marT="54864" marB="54864" anchor="ctr">
-                    <a:solidFill>
-                      <a:srgbClr val="FFFFFF"/>
-                    </a:solidFill>
-                  </a:tcPr>
-                </a:tc>
-                <a:tc>
-                  <a:txBody>
-                    <a:bodyPr/>
-                    <a:lstStyle/>
-                    <a:p>
-                      <a:r>
-                        <a:rPr sz="1100">
-                          <a:solidFill>
-                            <a:srgbClr val="1F2328"/>
-                          </a:solidFill>
-                        </a:rPr>
-                        <a:t>Technical Assistance Center</a:t>
-                      </a:r>
-                    </a:p>
-                  </a:txBody>
-                  <a:tcPr marL="109728" marR="109728" marT="54864" marB="54864" anchor="ctr">
-                    <a:solidFill>
-                      <a:srgbClr val="FFFFFF"/>
-                    </a:solidFill>
-                  </a:tcPr>
-                </a:tc>
-                <a:tc>
-                  <a:txBody>
-                    <a:bodyPr/>
-                    <a:lstStyle/>
-                    <a:p>
-                      <a:r>
-                        <a:rPr sz="1100">
-                          <a:solidFill>
-                            <a:srgbClr val="1F2328"/>
-                          </a:solidFill>
-                        </a:rPr>
-                        <a:t>Centro de assistência técnica</a:t>
-                      </a:r>
-                    </a:p>
-                  </a:txBody>
-                  <a:tcPr marL="109728" marR="109728" marT="54864" marB="54864" anchor="ctr">
+                        <a:t>Status dos pods, nós prontos, quotas</a:t>
+                      </a:r>
+                    </a:p>
+                  </a:txBody>
+                  <a:tcPr marL="109728" marR="109728" marT="27432" marB="27432" anchor="ctr">
                     <a:solidFill>
                       <a:srgbClr val="FFFFFF"/>
                     </a:solidFill>
@@ -15568,6 +18377,50 @@
           </a:graphicData>
         </a:graphic>
       </p:graphicFrame>
+      <p:sp>
+        <p:nvSpPr>
+          <p:cNvPr id="4" name="TextBox 3"/>
+          <p:cNvSpPr txBox="1"/>
+          <p:nvPr/>
+        </p:nvSpPr>
+        <p:spPr>
+          <a:xfrm>
+            <a:off x="731520" y="4754880"/>
+            <a:ext cx="10698480" cy="667512"/>
+          </a:xfrm>
+          <a:prstGeom prst="rect">
+            <a:avLst/>
+          </a:prstGeom>
+          <a:noFill/>
+          <a:solidFill>
+            <a:srgbClr val="EDF3F9"/>
+          </a:solidFill>
+        </p:spPr>
+        <p:txBody>
+          <a:bodyPr wrap="square">
+            <a:noAutofit/>
+          </a:bodyPr>
+          <a:lstStyle/>
+          <a:p>
+            <a:r>
+              <a:rPr sz="1400" b="1">
+                <a:solidFill>
+                  <a:srgbClr val="1F2328"/>
+                </a:solidFill>
+              </a:rPr>
+              <a:t>ℹ  </a:t>
+            </a:r>
+            <a:r>
+              <a:rPr sz="1200" b="0">
+                <a:solidFill>
+                  <a:srgbClr val="1F2328"/>
+                </a:solidFill>
+              </a:rPr>
+              <a:t>ECS é o serviço mais comum — a maioria dos SRs de computação começa aqui. Sempre confirmar: nome da VM, flavor (CPU/RAM) e status atual.</a:t>
+            </a:r>
+          </a:p>
+        </p:txBody>
+      </p:sp>
     </p:spTree>
   </p:cSld>
   <p:clrMapOvr>
@@ -15598,7 +18451,7 @@
         </p:nvSpPr>
         <p:spPr>
           <a:xfrm>
-            <a:off x="0" y="320040"/>
+            <a:off x="731520" y="502920"/>
           </a:xfrm>
         </p:spPr>
         <p:txBody>
@@ -15611,26 +18464,491 @@
                   <a:srgbClr val="C7000B"/>
                 </a:solidFill>
               </a:rPr>
-              <a:t>Convenção de Nomenclatura</a:t>
+              <a:t>Armazenamento — Serviços em Detalhe</a:t>
             </a:r>
           </a:p>
         </p:txBody>
       </p:sp>
+      <p:graphicFrame>
+        <p:nvGraphicFramePr>
+          <p:cNvPr id="3" name="Table 2"/>
+          <p:cNvGraphicFramePr>
+            <a:graphicFrameLocks noGrp="1"/>
+          </p:cNvGraphicFramePr>
+          <p:nvPr/>
+        </p:nvGraphicFramePr>
+        <p:xfrm>
+          <a:off x="731520" y="1737360"/>
+          <a:ext cx="10698480" cy="1801368"/>
+        </p:xfrm>
+        <a:graphic>
+          <a:graphicData uri="http://schemas.openxmlformats.org/drawingml/2006/table">
+            <a:tbl>
+              <a:tblPr firstRow="1" bandRow="1">
+                <a:tableStyleId>{5C22544A-7EE6-4342-B048-85BDC9FD1C3A}</a:tableStyleId>
+              </a:tblPr>
+              <a:tblGrid>
+                <a:gridCol w="731520"/>
+                <a:gridCol w="3200400"/>
+                <a:gridCol w="2926080"/>
+                <a:gridCol w="3840480"/>
+              </a:tblGrid>
+              <a:tr h="411480">
+                <a:tc>
+                  <a:txBody>
+                    <a:bodyPr/>
+                    <a:lstStyle/>
+                    <a:p>
+                      <a:pPr algn="ctr"/>
+                      <a:r>
+                        <a:rPr sz="1300" b="1">
+                          <a:solidFill>
+                            <a:srgbClr val="FFFFFF"/>
+                          </a:solidFill>
+                        </a:rPr>
+                        <a:t>Svc</a:t>
+                      </a:r>
+                    </a:p>
+                  </a:txBody>
+                  <a:tcPr marL="109728" marR="109728" marT="36576" marB="36576" anchor="ctr">
+                    <a:solidFill>
+                      <a:srgbClr val="C7000B"/>
+                    </a:solidFill>
+                  </a:tcPr>
+                </a:tc>
+                <a:tc>
+                  <a:txBody>
+                    <a:bodyPr/>
+                    <a:lstStyle/>
+                    <a:p>
+                      <a:pPr algn="ctr"/>
+                      <a:r>
+                        <a:rPr sz="1300" b="1">
+                          <a:solidFill>
+                            <a:srgbClr val="FFFFFF"/>
+                          </a:solidFill>
+                        </a:rPr>
+                        <a:t>O Que É</a:t>
+                      </a:r>
+                    </a:p>
+                  </a:txBody>
+                  <a:tcPr marL="109728" marR="109728" marT="36576" marB="36576" anchor="ctr">
+                    <a:solidFill>
+                      <a:srgbClr val="C7000B"/>
+                    </a:solidFill>
+                  </a:tcPr>
+                </a:tc>
+                <a:tc>
+                  <a:txBody>
+                    <a:bodyPr/>
+                    <a:lstStyle/>
+                    <a:p>
+                      <a:pPr algn="ctr"/>
+                      <a:r>
+                        <a:rPr sz="1300" b="1">
+                          <a:solidFill>
+                            <a:srgbClr val="FFFFFF"/>
+                          </a:solidFill>
+                        </a:rPr>
+                        <a:t>Quando Usar</a:t>
+                      </a:r>
+                    </a:p>
+                  </a:txBody>
+                  <a:tcPr marL="109728" marR="109728" marT="36576" marB="36576" anchor="ctr">
+                    <a:solidFill>
+                      <a:srgbClr val="C7000B"/>
+                    </a:solidFill>
+                  </a:tcPr>
+                </a:tc>
+                <a:tc>
+                  <a:txBody>
+                    <a:bodyPr/>
+                    <a:lstStyle/>
+                    <a:p>
+                      <a:pPr algn="ctr"/>
+                      <a:r>
+                        <a:rPr sz="1300" b="1">
+                          <a:solidFill>
+                            <a:srgbClr val="FFFFFF"/>
+                          </a:solidFill>
+                        </a:rPr>
+                        <a:t>O Que Verificar Primeiro</a:t>
+                      </a:r>
+                    </a:p>
+                  </a:txBody>
+                  <a:tcPr marL="109728" marR="109728" marT="36576" marB="36576" anchor="ctr">
+                    <a:solidFill>
+                      <a:srgbClr val="C7000B"/>
+                    </a:solidFill>
+                  </a:tcPr>
+                </a:tc>
+              </a:tr>
+              <a:tr h="347472">
+                <a:tc>
+                  <a:txBody>
+                    <a:bodyPr/>
+                    <a:lstStyle/>
+                    <a:p>
+                      <a:r>
+                        <a:rPr sz="1100" b="1">
+                          <a:solidFill>
+                            <a:srgbClr val="1F2328"/>
+                          </a:solidFill>
+                        </a:rPr>
+                        <a:t>EVS</a:t>
+                      </a:r>
+                    </a:p>
+                  </a:txBody>
+                  <a:tcPr marL="109728" marR="109728" marT="27432" marB="27432" anchor="ctr">
+                    <a:solidFill>
+                      <a:srgbClr val="F6F8FA"/>
+                    </a:solidFill>
+                  </a:tcPr>
+                </a:tc>
+                <a:tc>
+                  <a:txBody>
+                    <a:bodyPr/>
+                    <a:lstStyle/>
+                    <a:p>
+                      <a:r>
+                        <a:rPr sz="1100">
+                          <a:solidFill>
+                            <a:srgbClr val="1F2328"/>
+                          </a:solidFill>
+                        </a:rPr>
+                        <a:t>Disco virtual anexado a uma VM</a:t>
+                      </a:r>
+                    </a:p>
+                  </a:txBody>
+                  <a:tcPr marL="109728" marR="109728" marT="27432" marB="27432" anchor="ctr">
+                    <a:solidFill>
+                      <a:srgbClr val="F6F8FA"/>
+                    </a:solidFill>
+                  </a:tcPr>
+                </a:tc>
+                <a:tc>
+                  <a:txBody>
+                    <a:bodyPr/>
+                    <a:lstStyle/>
+                    <a:p>
+                      <a:r>
+                        <a:rPr sz="1100">
+                          <a:solidFill>
+                            <a:srgbClr val="1F2328"/>
+                          </a:solidFill>
+                        </a:rPr>
+                        <a:t>Discos de sistema e dados</a:t>
+                      </a:r>
+                    </a:p>
+                  </a:txBody>
+                  <a:tcPr marL="109728" marR="109728" marT="27432" marB="27432" anchor="ctr">
+                    <a:solidFill>
+                      <a:srgbClr val="F6F8FA"/>
+                    </a:solidFill>
+                  </a:tcPr>
+                </a:tc>
+                <a:tc>
+                  <a:txBody>
+                    <a:bodyPr/>
+                    <a:lstStyle/>
+                    <a:p>
+                      <a:r>
+                        <a:rPr sz="1100">
+                          <a:solidFill>
+                            <a:srgbClr val="1F2328"/>
+                          </a:solidFill>
+                        </a:rPr>
+                        <a:t>Capacidade, IOPS, está anexado?</a:t>
+                      </a:r>
+                    </a:p>
+                  </a:txBody>
+                  <a:tcPr marL="109728" marR="109728" marT="27432" marB="27432" anchor="ctr">
+                    <a:solidFill>
+                      <a:srgbClr val="F6F8FA"/>
+                    </a:solidFill>
+                  </a:tcPr>
+                </a:tc>
+              </a:tr>
+              <a:tr h="347472">
+                <a:tc>
+                  <a:txBody>
+                    <a:bodyPr/>
+                    <a:lstStyle/>
+                    <a:p>
+                      <a:r>
+                        <a:rPr sz="1100" b="1">
+                          <a:solidFill>
+                            <a:srgbClr val="1F2328"/>
+                          </a:solidFill>
+                        </a:rPr>
+                        <a:t>OBS</a:t>
+                      </a:r>
+                    </a:p>
+                  </a:txBody>
+                  <a:tcPr marL="109728" marR="109728" marT="27432" marB="27432" anchor="ctr">
+                    <a:solidFill>
+                      <a:srgbClr val="FFFFFF"/>
+                    </a:solidFill>
+                  </a:tcPr>
+                </a:tc>
+                <a:tc>
+                  <a:txBody>
+                    <a:bodyPr/>
+                    <a:lstStyle/>
+                    <a:p>
+                      <a:r>
+                        <a:rPr sz="1100">
+                          <a:solidFill>
+                            <a:srgbClr val="1F2328"/>
+                          </a:solidFill>
+                        </a:rPr>
+                        <a:t>Armazenamento de objetos (tipo S3)</a:t>
+                      </a:r>
+                    </a:p>
+                  </a:txBody>
+                  <a:tcPr marL="109728" marR="109728" marT="27432" marB="27432" anchor="ctr">
+                    <a:solidFill>
+                      <a:srgbClr val="FFFFFF"/>
+                    </a:solidFill>
+                  </a:tcPr>
+                </a:tc>
+                <a:tc>
+                  <a:txBody>
+                    <a:bodyPr/>
+                    <a:lstStyle/>
+                    <a:p>
+                      <a:r>
+                        <a:rPr sz="1100">
+                          <a:solidFill>
+                            <a:srgbClr val="1F2328"/>
+                          </a:solidFill>
+                        </a:rPr>
+                        <a:t>Backups, mídia, arquivos estáticos</a:t>
+                      </a:r>
+                    </a:p>
+                  </a:txBody>
+                  <a:tcPr marL="109728" marR="109728" marT="27432" marB="27432" anchor="ctr">
+                    <a:solidFill>
+                      <a:srgbClr val="FFFFFF"/>
+                    </a:solidFill>
+                  </a:tcPr>
+                </a:tc>
+                <a:tc>
+                  <a:txBody>
+                    <a:bodyPr/>
+                    <a:lstStyle/>
+                    <a:p>
+                      <a:r>
+                        <a:rPr sz="1100">
+                          <a:solidFill>
+                            <a:srgbClr val="1F2328"/>
+                          </a:solidFill>
+                        </a:rPr>
+                        <a:t>AK/SK válidas? Bucket existe?</a:t>
+                      </a:r>
+                    </a:p>
+                  </a:txBody>
+                  <a:tcPr marL="109728" marR="109728" marT="27432" marB="27432" anchor="ctr">
+                    <a:solidFill>
+                      <a:srgbClr val="FFFFFF"/>
+                    </a:solidFill>
+                  </a:tcPr>
+                </a:tc>
+              </a:tr>
+              <a:tr h="347472">
+                <a:tc>
+                  <a:txBody>
+                    <a:bodyPr/>
+                    <a:lstStyle/>
+                    <a:p>
+                      <a:r>
+                        <a:rPr sz="1100" b="1">
+                          <a:solidFill>
+                            <a:srgbClr val="1F2328"/>
+                          </a:solidFill>
+                        </a:rPr>
+                        <a:t>SFS</a:t>
+                      </a:r>
+                    </a:p>
+                  </a:txBody>
+                  <a:tcPr marL="109728" marR="109728" marT="27432" marB="27432" anchor="ctr">
+                    <a:solidFill>
+                      <a:srgbClr val="F6F8FA"/>
+                    </a:solidFill>
+                  </a:tcPr>
+                </a:tc>
+                <a:tc>
+                  <a:txBody>
+                    <a:bodyPr/>
+                    <a:lstStyle/>
+                    <a:p>
+                      <a:r>
+                        <a:rPr sz="1100">
+                          <a:solidFill>
+                            <a:srgbClr val="1F2328"/>
+                          </a:solidFill>
+                        </a:rPr>
+                        <a:t>Sistema de arquivos compartilhado</a:t>
+                      </a:r>
+                    </a:p>
+                  </a:txBody>
+                  <a:tcPr marL="109728" marR="109728" marT="27432" marB="27432" anchor="ctr">
+                    <a:solidFill>
+                      <a:srgbClr val="F6F8FA"/>
+                    </a:solidFill>
+                  </a:tcPr>
+                </a:tc>
+                <a:tc>
+                  <a:txBody>
+                    <a:bodyPr/>
+                    <a:lstStyle/>
+                    <a:p>
+                      <a:r>
+                        <a:rPr sz="1100">
+                          <a:solidFill>
+                            <a:srgbClr val="1F2328"/>
+                          </a:solidFill>
+                        </a:rPr>
+                        <a:t>Arquivos compartilhados entre VMs</a:t>
+                      </a:r>
+                    </a:p>
+                  </a:txBody>
+                  <a:tcPr marL="109728" marR="109728" marT="27432" marB="27432" anchor="ctr">
+                    <a:solidFill>
+                      <a:srgbClr val="F6F8FA"/>
+                    </a:solidFill>
+                  </a:tcPr>
+                </a:tc>
+                <a:tc>
+                  <a:txBody>
+                    <a:bodyPr/>
+                    <a:lstStyle/>
+                    <a:p>
+                      <a:r>
+                        <a:rPr sz="1100">
+                          <a:solidFill>
+                            <a:srgbClr val="1F2328"/>
+                          </a:solidFill>
+                        </a:rPr>
+                        <a:t>Mount point, quota, performance</a:t>
+                      </a:r>
+                    </a:p>
+                  </a:txBody>
+                  <a:tcPr marL="109728" marR="109728" marT="27432" marB="27432" anchor="ctr">
+                    <a:solidFill>
+                      <a:srgbClr val="F6F8FA"/>
+                    </a:solidFill>
+                  </a:tcPr>
+                </a:tc>
+              </a:tr>
+              <a:tr h="347472">
+                <a:tc>
+                  <a:txBody>
+                    <a:bodyPr/>
+                    <a:lstStyle/>
+                    <a:p>
+                      <a:r>
+                        <a:rPr sz="1100" b="1">
+                          <a:solidFill>
+                            <a:srgbClr val="1F2328"/>
+                          </a:solidFill>
+                        </a:rPr>
+                        <a:t>HBR</a:t>
+                      </a:r>
+                    </a:p>
+                  </a:txBody>
+                  <a:tcPr marL="109728" marR="109728" marT="27432" marB="27432" anchor="ctr">
+                    <a:solidFill>
+                      <a:srgbClr val="FFFFFF"/>
+                    </a:solidFill>
+                  </a:tcPr>
+                </a:tc>
+                <a:tc>
+                  <a:txBody>
+                    <a:bodyPr/>
+                    <a:lstStyle/>
+                    <a:p>
+                      <a:r>
+                        <a:rPr sz="1100">
+                          <a:solidFill>
+                            <a:srgbClr val="1F2328"/>
+                          </a:solidFill>
+                        </a:rPr>
+                        <a:t>Backup e recuperação híbrida</a:t>
+                      </a:r>
+                    </a:p>
+                  </a:txBody>
+                  <a:tcPr marL="109728" marR="109728" marT="27432" marB="27432" anchor="ctr">
+                    <a:solidFill>
+                      <a:srgbClr val="FFFFFF"/>
+                    </a:solidFill>
+                  </a:tcPr>
+                </a:tc>
+                <a:tc>
+                  <a:txBody>
+                    <a:bodyPr/>
+                    <a:lstStyle/>
+                    <a:p>
+                      <a:r>
+                        <a:rPr sz="1100">
+                          <a:solidFill>
+                            <a:srgbClr val="1F2328"/>
+                          </a:solidFill>
+                        </a:rPr>
+                        <a:t>DR, backups de VMs e dados</a:t>
+                      </a:r>
+                    </a:p>
+                  </a:txBody>
+                  <a:tcPr marL="109728" marR="109728" marT="27432" marB="27432" anchor="ctr">
+                    <a:solidFill>
+                      <a:srgbClr val="FFFFFF"/>
+                    </a:solidFill>
+                  </a:tcPr>
+                </a:tc>
+                <a:tc>
+                  <a:txBody>
+                    <a:bodyPr/>
+                    <a:lstStyle/>
+                    <a:p>
+                      <a:r>
+                        <a:rPr sz="1100">
+                          <a:solidFill>
+                            <a:srgbClr val="1F2328"/>
+                          </a:solidFill>
+                        </a:rPr>
+                        <a:t>Job rodou? Restore foi testado?</a:t>
+                      </a:r>
+                    </a:p>
+                  </a:txBody>
+                  <a:tcPr marL="109728" marR="109728" marT="27432" marB="27432" anchor="ctr">
+                    <a:solidFill>
+                      <a:srgbClr val="FFFFFF"/>
+                    </a:solidFill>
+                  </a:tcPr>
+                </a:tc>
+              </a:tr>
+            </a:tbl>
+          </a:graphicData>
+        </a:graphic>
+      </p:graphicFrame>
       <p:sp>
         <p:nvSpPr>
-          <p:cNvPr id="3" name="TextBox 2"/>
+          <p:cNvPr id="4" name="TextBox 3"/>
           <p:cNvSpPr txBox="1"/>
           <p:nvPr/>
         </p:nvSpPr>
         <p:spPr>
           <a:xfrm>
-            <a:off x="731520" y="1554480"/>
-            <a:ext cx="10698480" cy="4114800"/>
+            <a:off x="731520" y="4754880"/>
+            <a:ext cx="10698480" cy="667512"/>
           </a:xfrm>
           <a:prstGeom prst="rect">
             <a:avLst/>
           </a:prstGeom>
           <a:noFill/>
+          <a:solidFill>
+            <a:srgbClr val="FDF8EE"/>
+          </a:solidFill>
         </p:spPr>
         <p:txBody>
           <a:bodyPr wrap="square">
@@ -15638,119 +18956,21 @@
           </a:bodyPr>
           <a:lstStyle/>
           <a:p>
-            <a:pPr algn="l"/>
             <a:r>
-              <a:rPr sz="1400" b="0">
+              <a:rPr sz="1400" b="1">
                 <a:solidFill>
                   <a:srgbClr val="1F2328"/>
                 </a:solidFill>
               </a:rPr>
-              <a:t>Regras para nomes de recursos no HCS:</a:t>
+              <a:t>⚠  </a:t>
             </a:r>
-          </a:p>
-          <a:p>
-            <a:pPr algn="l">
-              <a:spcBef>
-                <a:spcPts val="400"/>
-              </a:spcBef>
-            </a:pPr>
             <a:r>
-              <a:rPr sz="1400" b="0">
+              <a:rPr sz="1200" b="0">
                 <a:solidFill>
                   <a:srgbClr val="1F2328"/>
                 </a:solidFill>
               </a:rPr>
-              <a:t/>
-            </a:r>
-          </a:p>
-          <a:p>
-            <a:pPr algn="l">
-              <a:spcBef>
-                <a:spcPts val="400"/>
-              </a:spcBef>
-            </a:pPr>
-            <a:r>
-              <a:rPr sz="1400" b="0">
-                <a:solidFill>
-                  <a:srgbClr val="1F2328"/>
-                </a:solidFill>
-              </a:rPr>
-              <a:t>  • VMs: [projeto]-[função]-[seq]  (ex: billing-app-01)</a:t>
-            </a:r>
-          </a:p>
-          <a:p>
-            <a:pPr algn="l">
-              <a:spcBef>
-                <a:spcPts val="400"/>
-              </a:spcBef>
-            </a:pPr>
-            <a:r>
-              <a:rPr sz="1400" b="0">
-                <a:solidFill>
-                  <a:srgbClr val="1F2328"/>
-                </a:solidFill>
-              </a:rPr>
-              <a:t>  • Volumes: [vm]-[disk]-[seq]     (ex: billing-app-disk-01)</a:t>
-            </a:r>
-          </a:p>
-          <a:p>
-            <a:pPr algn="l">
-              <a:spcBef>
-                <a:spcPts val="400"/>
-              </a:spcBef>
-            </a:pPr>
-            <a:r>
-              <a:rPr sz="1400" b="0">
-                <a:solidFill>
-                  <a:srgbClr val="1F2328"/>
-                </a:solidFill>
-              </a:rPr>
-              <a:t>  • VPCs: [region]-[env]-vpc       (ex: sa-east-1-prod-vpc)</a:t>
-            </a:r>
-          </a:p>
-          <a:p>
-            <a:pPr algn="l">
-              <a:spcBef>
-                <a:spcPts val="400"/>
-              </a:spcBef>
-            </a:pPr>
-            <a:r>
-              <a:rPr sz="1400" b="0">
-                <a:solidFill>
-                  <a:srgbClr val="1F2328"/>
-                </a:solidFill>
-              </a:rPr>
-              <a:t>  • SRs: SR-[ano][mes][seq]        (ex: SR-202609-00123)</a:t>
-            </a:r>
-          </a:p>
-          <a:p>
-            <a:pPr algn="l">
-              <a:spcBef>
-                <a:spcPts val="400"/>
-              </a:spcBef>
-            </a:pPr>
-            <a:r>
-              <a:rPr sz="1400" b="0">
-                <a:solidFill>
-                  <a:srgbClr val="1F2328"/>
-                </a:solidFill>
-              </a:rPr>
-              <a:t/>
-            </a:r>
-          </a:p>
-          <a:p>
-            <a:pPr algn="l">
-              <a:spcBef>
-                <a:spcPts val="400"/>
-              </a:spcBef>
-            </a:pPr>
-            <a:r>
-              <a:rPr sz="1400" b="0">
-                <a:solidFill>
-                  <a:srgbClr val="1F2328"/>
-                </a:solidFill>
-              </a:rPr>
-              <a:t>Validação: sempre confirmar o nome exato do recurso antes de prosseguir.</a:t>
+              <a:t>Disco cheio (&gt;90%) é o problema mais comum de armazenamento. Verificar sempre capacidade e IOPS antes de escalar.</a:t>
             </a:r>
           </a:p>
         </p:txBody>
